--- a/docs/presentation/보험발표-편집가능.pptx
+++ b/docs/presentation/보험발표-편집가능.pptx
@@ -7371,7 +7371,7 @@
                 </a:solidFill>
                 <a:latin typeface="Apple SD Gothic Neo"/>
               </a:rPr>
-              <a:t>누가 사용하나 — 세 주체</a:t>
+              <a:t>세 주체</a:t>
             </a:r>
           </a:p>
         </p:txBody>
@@ -7428,7 +7428,7 @@
         </p:nvSpPr>
         <p:spPr>
           <a:xfrm>
-            <a:off x="1554480" y="1828800"/>
+            <a:off x="1691640" y="1691640"/>
             <a:ext cx="1920240" cy="1920240"/>
           </a:xfrm>
           <a:prstGeom prst="ellipse">
@@ -7462,7 +7462,7 @@
           <a:p>
             <a:pPr algn="ctr"/>
             <a:r>
-              <a:rPr sz="1800" b="1">
+              <a:rPr sz="1900" b="1">
                 <a:solidFill>
                   <a:srgbClr val="FFFFFF"/>
                 </a:solidFill>
@@ -7481,8 +7481,8 @@
         </p:nvSpPr>
         <p:spPr>
           <a:xfrm>
-            <a:off x="1097280" y="3886200"/>
-            <a:ext cx="2834640" cy="548640"/>
+            <a:off x="1143000" y="3794760"/>
+            <a:ext cx="3017520" cy="548640"/>
           </a:xfrm>
           <a:prstGeom prst="rect">
             <a:avLst/>
@@ -7516,8 +7516,8 @@
         </p:nvSpPr>
         <p:spPr>
           <a:xfrm>
-            <a:off x="1097280" y="4434840"/>
-            <a:ext cx="2834640" cy="1005840"/>
+            <a:off x="1143000" y="4389120"/>
+            <a:ext cx="3017520" cy="1005840"/>
           </a:xfrm>
           <a:prstGeom prst="rect">
             <a:avLst/>
@@ -7563,7 +7563,7 @@
         </p:nvSpPr>
         <p:spPr>
           <a:xfrm>
-            <a:off x="5120640" y="1828800"/>
+            <a:off x="5138928" y="1691640"/>
             <a:ext cx="1920240" cy="1920240"/>
           </a:xfrm>
           <a:prstGeom prst="ellipse">
@@ -7597,13 +7597,13 @@
           <a:p>
             <a:pPr algn="ctr"/>
             <a:r>
-              <a:rPr sz="1800" b="1">
+              <a:rPr sz="1900" b="1">
                 <a:solidFill>
                   <a:srgbClr val="FFFFFF"/>
                 </a:solidFill>
                 <a:latin typeface="Apple SD Gothic Neo"/>
               </a:rPr>
-              <a:t>보험사</a:t>
+              <a:t>직원</a:t>
             </a:r>
           </a:p>
         </p:txBody>
@@ -7616,8 +7616,8 @@
         </p:nvSpPr>
         <p:spPr>
           <a:xfrm>
-            <a:off x="4663440" y="3886200"/>
-            <a:ext cx="2834640" cy="548640"/>
+            <a:off x="4590288" y="3794760"/>
+            <a:ext cx="3017520" cy="548640"/>
           </a:xfrm>
           <a:prstGeom prst="rect">
             <a:avLst/>
@@ -7651,8 +7651,8 @@
         </p:nvSpPr>
         <p:spPr>
           <a:xfrm>
-            <a:off x="4663440" y="4434840"/>
-            <a:ext cx="2834640" cy="1005840"/>
+            <a:off x="4590288" y="4389120"/>
+            <a:ext cx="3017520" cy="1005840"/>
           </a:xfrm>
           <a:prstGeom prst="rect">
             <a:avLst/>
@@ -7698,7 +7698,7 @@
         </p:nvSpPr>
         <p:spPr>
           <a:xfrm>
-            <a:off x="8686800" y="1828800"/>
+            <a:off x="8586216" y="1691640"/>
             <a:ext cx="1920240" cy="1920240"/>
           </a:xfrm>
           <a:prstGeom prst="ellipse">
@@ -7732,7 +7732,7 @@
           <a:p>
             <a:pPr algn="ctr"/>
             <a:r>
-              <a:rPr sz="1800" b="1">
+              <a:rPr sz="1900" b="1">
                 <a:solidFill>
                   <a:srgbClr val="FFFFFF"/>
                 </a:solidFill>
@@ -7751,8 +7751,8 @@
         </p:nvSpPr>
         <p:spPr>
           <a:xfrm>
-            <a:off x="8229600" y="3886200"/>
-            <a:ext cx="2834640" cy="548640"/>
+            <a:off x="8037576" y="3794760"/>
+            <a:ext cx="3017520" cy="548640"/>
           </a:xfrm>
           <a:prstGeom prst="rect">
             <a:avLst/>
@@ -7786,8 +7786,8 @@
         </p:nvSpPr>
         <p:spPr>
           <a:xfrm>
-            <a:off x="8229600" y="4434840"/>
-            <a:ext cx="2834640" cy="1005840"/>
+            <a:off x="8037576" y="4389120"/>
+            <a:ext cx="3017520" cy="1005840"/>
           </a:xfrm>
           <a:prstGeom prst="rect">
             <a:avLst/>
@@ -8026,8 +8026,8 @@
         </p:nvSpPr>
         <p:spPr>
           <a:xfrm>
-            <a:off x="1828800" y="2377440"/>
-            <a:ext cx="3749039" cy="2103120"/>
+            <a:off x="1554480" y="2286000"/>
+            <a:ext cx="4114800" cy="2377440"/>
           </a:xfrm>
           <a:prstGeom prst="roundRect">
             <a:avLst/>
@@ -8057,7 +8057,7 @@
           </a:fontRef>
         </p:style>
         <p:txBody>
-          <a:bodyPr rtlCol="0" anchor="t" tIns="50800" bIns="50800" lIns="101600" rIns="101600" wrap="square"/>
+          <a:bodyPr rtlCol="0" anchor="ctr" tIns="50800" bIns="50800" lIns="101600" rIns="101600" wrap="square"/>
           <a:lstStyle/>
           <a:p>
             <a:pPr algn="ctr"/>
@@ -8072,8 +8072,8 @@
         </p:nvSpPr>
         <p:spPr>
           <a:xfrm>
-            <a:off x="1828800" y="2377440"/>
-            <a:ext cx="3749039" cy="109728"/>
+            <a:off x="1554480" y="2286000"/>
+            <a:ext cx="4114800" cy="128016"/>
           </a:xfrm>
           <a:prstGeom prst="rect">
             <a:avLst/>
@@ -8116,8 +8116,8 @@
         </p:nvSpPr>
         <p:spPr>
           <a:xfrm>
-            <a:off x="1828800" y="2834640"/>
-            <a:ext cx="3749039" cy="822960"/>
+            <a:off x="1554480" y="2880360"/>
+            <a:ext cx="4114800" cy="822960"/>
           </a:xfrm>
           <a:prstGeom prst="rect">
             <a:avLst/>
@@ -8132,7 +8132,7 @@
           <a:p>
             <a:pPr algn="ctr"/>
             <a:r>
-              <a:rPr sz="3000" b="1">
+              <a:rPr sz="3200" b="1">
                 <a:solidFill>
                   <a:srgbClr val="0B3D5C"/>
                 </a:solidFill>
@@ -8151,8 +8151,8 @@
         </p:nvSpPr>
         <p:spPr>
           <a:xfrm>
-            <a:off x="1828800" y="3611880"/>
-            <a:ext cx="3749039" cy="640080"/>
+            <a:off x="1554480" y="3794760"/>
+            <a:ext cx="4114800" cy="640080"/>
           </a:xfrm>
           <a:prstGeom prst="rect">
             <a:avLst/>
@@ -8167,13 +8167,13 @@
           <a:p>
             <a:pPr algn="ctr"/>
             <a:r>
-              <a:rPr sz="2100" b="0">
+              <a:rPr sz="2000" b="0">
                 <a:solidFill>
                   <a:srgbClr val="5B7185"/>
                 </a:solidFill>
                 <a:latin typeface="Apple SD Gothic Neo"/>
               </a:rPr>
-              <a:t>병원비</a:t>
+              <a:t>아플 때 — 병원비</a:t>
             </a:r>
           </a:p>
         </p:txBody>
@@ -8186,8 +8186,8 @@
         </p:nvSpPr>
         <p:spPr>
           <a:xfrm>
-            <a:off x="6583680" y="2377440"/>
-            <a:ext cx="3749039" cy="2103120"/>
+            <a:off x="6519672" y="2286000"/>
+            <a:ext cx="4114800" cy="2377440"/>
           </a:xfrm>
           <a:prstGeom prst="roundRect">
             <a:avLst/>
@@ -8217,7 +8217,7 @@
           </a:fontRef>
         </p:style>
         <p:txBody>
-          <a:bodyPr rtlCol="0" anchor="t" tIns="50800" bIns="50800" lIns="101600" rIns="101600" wrap="square"/>
+          <a:bodyPr rtlCol="0" anchor="ctr" tIns="50800" bIns="50800" lIns="101600" rIns="101600" wrap="square"/>
           <a:lstStyle/>
           <a:p>
             <a:pPr algn="ctr"/>
@@ -8232,8 +8232,8 @@
         </p:nvSpPr>
         <p:spPr>
           <a:xfrm>
-            <a:off x="6583680" y="2377440"/>
-            <a:ext cx="3749039" cy="109728"/>
+            <a:off x="6519672" y="2286000"/>
+            <a:ext cx="4114800" cy="128016"/>
           </a:xfrm>
           <a:prstGeom prst="rect">
             <a:avLst/>
@@ -8276,8 +8276,8 @@
         </p:nvSpPr>
         <p:spPr>
           <a:xfrm>
-            <a:off x="6583680" y="2834640"/>
-            <a:ext cx="3749039" cy="822960"/>
+            <a:off x="6519672" y="2880360"/>
+            <a:ext cx="4114800" cy="822960"/>
           </a:xfrm>
           <a:prstGeom prst="rect">
             <a:avLst/>
@@ -8292,7 +8292,7 @@
           <a:p>
             <a:pPr algn="ctr"/>
             <a:r>
-              <a:rPr sz="3000" b="1">
+              <a:rPr sz="3200" b="1">
                 <a:solidFill>
                   <a:srgbClr val="0B3D5C"/>
                 </a:solidFill>
@@ -8311,8 +8311,8 @@
         </p:nvSpPr>
         <p:spPr>
           <a:xfrm>
-            <a:off x="6583680" y="3611880"/>
-            <a:ext cx="3749039" cy="640080"/>
+            <a:off x="6519672" y="3794760"/>
+            <a:ext cx="4114800" cy="640080"/>
           </a:xfrm>
           <a:prstGeom prst="rect">
             <a:avLst/>
@@ -8327,13 +8327,13 @@
           <a:p>
             <a:pPr algn="ctr"/>
             <a:r>
-              <a:rPr sz="2100" b="0">
+              <a:rPr sz="2000" b="0">
                 <a:solidFill>
                   <a:srgbClr val="5B7185"/>
                 </a:solidFill>
                 <a:latin typeface="Apple SD Gothic Neo"/>
               </a:rPr>
-              <a:t>자동차 사고</a:t>
+              <a:t>사고 났을 때 — 수리·치료비</a:t>
             </a:r>
           </a:p>
         </p:txBody>
@@ -8386,7 +8386,7 @@
                 </a:solidFill>
                 <a:latin typeface="Apple SD Gothic Neo"/>
               </a:rPr>
-              <a:t>의료보험이란</a:t>
+              <a:t>의료보험</a:t>
             </a:r>
           </a:p>
         </p:txBody>
@@ -8437,20 +8437,55 @@
       </p:sp>
       <p:sp>
         <p:nvSpPr>
-          <p:cNvPr id="4" name="Rectangle 3"/>
+          <p:cNvPr id="4" name="TextBox 3"/>
+          <p:cNvSpPr txBox="1"/>
+          <p:nvPr/>
+        </p:nvSpPr>
+        <p:spPr>
+          <a:xfrm>
+            <a:off x="640080" y="1554480"/>
+            <a:ext cx="10972800" cy="731520"/>
+          </a:xfrm>
+          <a:prstGeom prst="rect">
+            <a:avLst/>
+          </a:prstGeom>
+          <a:noFill/>
+        </p:spPr>
+        <p:txBody>
+          <a:bodyPr wrap="square" anchor="ctr">
+            <a:spAutoFit/>
+          </a:bodyPr>
+          <a:lstStyle/>
+          <a:p>
+            <a:pPr algn="l"/>
+            <a:r>
+              <a:rPr sz="2800" b="1">
+                <a:solidFill>
+                  <a:srgbClr val="0B3D5C"/>
+                </a:solidFill>
+                <a:latin typeface="Apple SD Gothic Neo"/>
+              </a:rPr>
+              <a:t>병원비를 보험금으로 돌려주는 보험</a:t>
+            </a:r>
+          </a:p>
+        </p:txBody>
+      </p:sp>
+      <p:sp>
+        <p:nvSpPr>
+          <p:cNvPr id="5" name="Rounded Rectangle 4"/>
           <p:cNvSpPr/>
           <p:nvPr/>
         </p:nvSpPr>
         <p:spPr>
           <a:xfrm>
-            <a:off x="640080" y="1828800"/>
-            <a:ext cx="128016" cy="640080"/>
-          </a:xfrm>
-          <a:prstGeom prst="rect">
-            <a:avLst/>
-          </a:prstGeom>
-          <a:solidFill>
-            <a:srgbClr val="F2A900"/>
+            <a:off x="1097280" y="3383280"/>
+            <a:ext cx="2743200" cy="1005840"/>
+          </a:xfrm>
+          <a:prstGeom prst="roundRect">
+            <a:avLst/>
+          </a:prstGeom>
+          <a:solidFill>
+            <a:srgbClr val="0B3D5C"/>
           </a:solidFill>
           <a:ln>
             <a:noFill/>
@@ -8472,23 +8507,32 @@
           </a:fontRef>
         </p:style>
         <p:txBody>
-          <a:bodyPr rtlCol="0" anchor="ctr"/>
-          <a:lstStyle/>
-          <a:p>
-            <a:pPr algn="ctr"/>
-          </a:p>
-        </p:txBody>
-      </p:sp>
-      <p:sp>
-        <p:nvSpPr>
-          <p:cNvPr id="5" name="TextBox 4"/>
+          <a:bodyPr rtlCol="0" anchor="ctr" tIns="50800" bIns="50800" lIns="101600" rIns="101600" wrap="square"/>
+          <a:lstStyle/>
+          <a:p>
+            <a:pPr algn="ctr"/>
+            <a:r>
+              <a:rPr sz="2200" b="1">
+                <a:solidFill>
+                  <a:srgbClr val="FFFFFF"/>
+                </a:solidFill>
+                <a:latin typeface="Apple SD Gothic Neo"/>
+              </a:rPr>
+              <a:t>병원비 청구</a:t>
+            </a:r>
+          </a:p>
+        </p:txBody>
+      </p:sp>
+      <p:sp>
+        <p:nvSpPr>
+          <p:cNvPr id="6" name="TextBox 5"/>
           <p:cNvSpPr txBox="1"/>
           <p:nvPr/>
         </p:nvSpPr>
         <p:spPr>
           <a:xfrm>
-            <a:off x="914400" y="1828800"/>
-            <a:ext cx="10058400" cy="731520"/>
+            <a:off x="4023360" y="2697480"/>
+            <a:ext cx="548640" cy="548640"/>
           </a:xfrm>
           <a:prstGeom prst="rect">
             <a:avLst/>
@@ -8501,29 +8545,29 @@
           </a:bodyPr>
           <a:lstStyle/>
           <a:p>
-            <a:pPr algn="l"/>
-            <a:r>
-              <a:rPr sz="3000" b="1">
-                <a:solidFill>
-                  <a:srgbClr val="0B3D5C"/>
-                </a:solidFill>
-                <a:latin typeface="Apple SD Gothic Neo"/>
-              </a:rPr>
-              <a:t>병원비를 보험금으로 돌려주는 보험</a:t>
-            </a:r>
-          </a:p>
-        </p:txBody>
-      </p:sp>
-      <p:sp>
-        <p:nvSpPr>
-          <p:cNvPr id="6" name="TextBox 5"/>
+            <a:pPr algn="ctr"/>
+            <a:r>
+              <a:rPr sz="2600" b="1">
+                <a:solidFill>
+                  <a:srgbClr val="F2A900"/>
+                </a:solidFill>
+                <a:latin typeface="Apple SD Gothic Neo"/>
+              </a:rPr>
+              <a:t>→</a:t>
+            </a:r>
+          </a:p>
+        </p:txBody>
+      </p:sp>
+      <p:sp>
+        <p:nvSpPr>
+          <p:cNvPr id="7" name="TextBox 6"/>
           <p:cNvSpPr txBox="1"/>
           <p:nvPr/>
         </p:nvSpPr>
         <p:spPr>
           <a:xfrm>
-            <a:off x="914400" y="2926080"/>
-            <a:ext cx="10515600" cy="2743200"/>
+            <a:off x="4023360" y="4160520"/>
+            <a:ext cx="548640" cy="548640"/>
           </a:xfrm>
           <a:prstGeom prst="rect">
             <a:avLst/>
@@ -8531,83 +8575,166 @@
           <a:noFill/>
         </p:spPr>
         <p:txBody>
-          <a:bodyPr wrap="square" anchor="t">
+          <a:bodyPr wrap="square" anchor="ctr">
             <a:spAutoFit/>
           </a:bodyPr>
           <a:lstStyle/>
           <a:p>
-            <a:pPr algn="l">
-              <a:spcAft>
-                <a:spcPts val="1400"/>
-              </a:spcAft>
-            </a:pPr>
-            <a:r>
-              <a:rPr sz="2300" b="1">
+            <a:pPr algn="ctr"/>
+            <a:r>
+              <a:rPr sz="2600" b="1">
                 <a:solidFill>
                   <a:srgbClr val="F2A900"/>
                 </a:solidFill>
                 <a:latin typeface="Apple SD Gothic Neo"/>
               </a:rPr>
-              <a:t>—  </a:t>
-            </a:r>
-            <a:r>
-              <a:rPr sz="2300" b="0">
+              <a:t>→</a:t>
+            </a:r>
+          </a:p>
+        </p:txBody>
+      </p:sp>
+      <p:sp>
+        <p:nvSpPr>
+          <p:cNvPr id="8" name="Rounded Rectangle 7"/>
+          <p:cNvSpPr/>
+          <p:nvPr/>
+        </p:nvSpPr>
+        <p:spPr>
+          <a:xfrm>
+            <a:off x="4754880" y="2377440"/>
+            <a:ext cx="6400800" cy="1097280"/>
+          </a:xfrm>
+          <a:prstGeom prst="roundRect">
+            <a:avLst/>
+          </a:prstGeom>
+          <a:solidFill>
+            <a:srgbClr val="F5F9FC"/>
+          </a:solidFill>
+          <a:ln w="19050">
+            <a:solidFill>
+              <a:srgbClr val="1F9E8F"/>
+            </a:solidFill>
+          </a:ln>
+          <a:effectLst/>
+        </p:spPr>
+        <p:style>
+          <a:lnRef idx="1">
+            <a:schemeClr val="accent1"/>
+          </a:lnRef>
+          <a:fillRef idx="3">
+            <a:schemeClr val="accent1"/>
+          </a:fillRef>
+          <a:effectRef idx="2">
+            <a:schemeClr val="accent1"/>
+          </a:effectRef>
+          <a:fontRef idx="minor">
+            <a:schemeClr val="lt1"/>
+          </a:fontRef>
+        </p:style>
+        <p:txBody>
+          <a:bodyPr rtlCol="0" anchor="ctr" tIns="50800" bIns="50800" lIns="101600" rIns="101600" wrap="square"/>
+          <a:lstStyle/>
+          <a:p>
+            <a:pPr algn="l"/>
+            <a:r>
+              <a:rPr sz="1900" b="1">
+                <a:solidFill>
+                  <a:srgbClr val="0B3D5C"/>
+                </a:solidFill>
+                <a:latin typeface="Apple SD Gothic Neo"/>
+              </a:rPr>
+              <a:t>100만 원 </a:t>
+            </a:r>
+            <a:r>
+              <a:rPr sz="1900" b="1">
+                <a:solidFill>
+                  <a:srgbClr val="1F9E8F"/>
+                </a:solidFill>
+                <a:latin typeface="Apple SD Gothic Neo"/>
+              </a:rPr>
+              <a:t>미만</a:t>
+            </a:r>
+            <a:r>
+              <a:rPr sz="1900" b="1">
                 <a:solidFill>
                   <a:srgbClr val="1C2B36"/>
                 </a:solidFill>
                 <a:latin typeface="Apple SD Gothic Neo"/>
               </a:rPr>
-              <a:t>병원비를 청구하면 보험금을 계좌로 입금해 준다</a:t>
-            </a:r>
-          </a:p>
-          <a:p>
-            <a:pPr algn="l">
-              <a:spcAft>
-                <a:spcPts val="1400"/>
-              </a:spcAft>
-            </a:pPr>
-            <a:r>
-              <a:rPr sz="2300" b="1">
-                <a:solidFill>
-                  <a:srgbClr val="F2A900"/>
-                </a:solidFill>
-                <a:latin typeface="Apple SD Gothic Neo"/>
-              </a:rPr>
-              <a:t>—  </a:t>
-            </a:r>
-            <a:r>
-              <a:rPr sz="2300" b="0">
+              <a:t>  →  바로 입금</a:t>
+            </a:r>
+          </a:p>
+        </p:txBody>
+      </p:sp>
+      <p:sp>
+        <p:nvSpPr>
+          <p:cNvPr id="9" name="Rounded Rectangle 8"/>
+          <p:cNvSpPr/>
+          <p:nvPr/>
+        </p:nvSpPr>
+        <p:spPr>
+          <a:xfrm>
+            <a:off x="4754880" y="3840480"/>
+            <a:ext cx="6400800" cy="1097280"/>
+          </a:xfrm>
+          <a:prstGeom prst="roundRect">
+            <a:avLst/>
+          </a:prstGeom>
+          <a:solidFill>
+            <a:srgbClr val="F5F9FC"/>
+          </a:solidFill>
+          <a:ln w="19050">
+            <a:solidFill>
+              <a:srgbClr val="F2A900"/>
+            </a:solidFill>
+          </a:ln>
+          <a:effectLst/>
+        </p:spPr>
+        <p:style>
+          <a:lnRef idx="1">
+            <a:schemeClr val="accent1"/>
+          </a:lnRef>
+          <a:fillRef idx="3">
+            <a:schemeClr val="accent1"/>
+          </a:fillRef>
+          <a:effectRef idx="2">
+            <a:schemeClr val="accent1"/>
+          </a:effectRef>
+          <a:fontRef idx="minor">
+            <a:schemeClr val="lt1"/>
+          </a:fontRef>
+        </p:style>
+        <p:txBody>
+          <a:bodyPr rtlCol="0" anchor="ctr" tIns="50800" bIns="50800" lIns="101600" rIns="101600" wrap="square"/>
+          <a:lstStyle/>
+          <a:p>
+            <a:pPr algn="l"/>
+            <a:r>
+              <a:rPr sz="1900" b="1">
+                <a:solidFill>
+                  <a:srgbClr val="0B3D5C"/>
+                </a:solidFill>
+                <a:latin typeface="Apple SD Gothic Neo"/>
+              </a:rPr>
+              <a:t>100만 원 </a:t>
+            </a:r>
+            <a:r>
+              <a:rPr sz="1900" b="1">
+                <a:solidFill>
+                  <a:srgbClr val="C8860A"/>
+                </a:solidFill>
+                <a:latin typeface="Apple SD Gothic Neo"/>
+              </a:rPr>
+              <a:t>이상</a:t>
+            </a:r>
+            <a:r>
+              <a:rPr sz="1900" b="1">
                 <a:solidFill>
                   <a:srgbClr val="1C2B36"/>
                 </a:solidFill>
                 <a:latin typeface="Apple SD Gothic Neo"/>
               </a:rPr>
-              <a:t>청구액이 100만 원보다 적으면 — 묻지 않고 바로 입금 (예: 30만 원 청구 → 즉시)</a:t>
-            </a:r>
-          </a:p>
-          <a:p>
-            <a:pPr algn="l">
-              <a:spcAft>
-                <a:spcPts val="1400"/>
-              </a:spcAft>
-            </a:pPr>
-            <a:r>
-              <a:rPr sz="2300" b="1">
-                <a:solidFill>
-                  <a:srgbClr val="F2A900"/>
-                </a:solidFill>
-                <a:latin typeface="Apple SD Gothic Neo"/>
-              </a:rPr>
-              <a:t>—  </a:t>
-            </a:r>
-            <a:r>
-              <a:rPr sz="2300" b="0">
-                <a:solidFill>
-                  <a:srgbClr val="1C2B36"/>
-                </a:solidFill>
-                <a:latin typeface="Apple SD Gothic Neo"/>
-              </a:rPr>
-              <a:t>100만 원 이상이면 — 직원이 확인한 뒤 입금</a:t>
+              <a:t>  →  직원 확인 후 입금</a:t>
             </a:r>
           </a:p>
         </p:txBody>
@@ -8660,7 +8787,7 @@
                 </a:solidFill>
                 <a:latin typeface="Apple SD Gothic Neo"/>
               </a:rPr>
-              <a:t>자동차보험이란</a:t>
+              <a:t>자동차보험</a:t>
             </a:r>
           </a:p>
         </p:txBody>
@@ -8711,23 +8838,60 @@
       </p:sp>
       <p:sp>
         <p:nvSpPr>
-          <p:cNvPr id="4" name="Rectangle 3"/>
+          <p:cNvPr id="4" name="TextBox 3"/>
+          <p:cNvSpPr txBox="1"/>
+          <p:nvPr/>
+        </p:nvSpPr>
+        <p:spPr>
+          <a:xfrm>
+            <a:off x="640080" y="1554480"/>
+            <a:ext cx="10972800" cy="731520"/>
+          </a:xfrm>
+          <a:prstGeom prst="rect">
+            <a:avLst/>
+          </a:prstGeom>
+          <a:noFill/>
+        </p:spPr>
+        <p:txBody>
+          <a:bodyPr wrap="square" anchor="ctr">
+            <a:spAutoFit/>
+          </a:bodyPr>
+          <a:lstStyle/>
+          <a:p>
+            <a:pPr algn="l"/>
+            <a:r>
+              <a:rPr sz="2800" b="1">
+                <a:solidFill>
+                  <a:srgbClr val="0B3D5C"/>
+                </a:solidFill>
+                <a:latin typeface="Apple SD Gothic Neo"/>
+              </a:rPr>
+              <a:t>사고 피해를 보상해 주는 보험</a:t>
+            </a:r>
+          </a:p>
+        </p:txBody>
+      </p:sp>
+      <p:sp>
+        <p:nvSpPr>
+          <p:cNvPr id="5" name="Rounded Rectangle 4"/>
           <p:cNvSpPr/>
           <p:nvPr/>
         </p:nvSpPr>
         <p:spPr>
           <a:xfrm>
-            <a:off x="640080" y="1828800"/>
-            <a:ext cx="128016" cy="640080"/>
-          </a:xfrm>
-          <a:prstGeom prst="rect">
-            <a:avLst/>
-          </a:prstGeom>
-          <a:solidFill>
-            <a:srgbClr val="F2A900"/>
-          </a:solidFill>
-          <a:ln>
-            <a:noFill/>
+            <a:off x="769467" y="3291840"/>
+            <a:ext cx="2286000" cy="1097280"/>
+          </a:xfrm>
+          <a:prstGeom prst="roundRect">
+            <a:avLst/>
+          </a:prstGeom>
+          <a:solidFill>
+            <a:srgbClr val="F5F9FC"/>
+          </a:solidFill>
+          <a:ln w="16510">
+            <a:solidFill>
+              <a:srgbClr val="D7E1EA"/>
+            </a:solidFill>
           </a:ln>
           <a:effectLst/>
         </p:spPr>
@@ -8746,23 +8910,32 @@
           </a:fontRef>
         </p:style>
         <p:txBody>
-          <a:bodyPr rtlCol="0" anchor="ctr"/>
-          <a:lstStyle/>
-          <a:p>
-            <a:pPr algn="ctr"/>
-          </a:p>
-        </p:txBody>
-      </p:sp>
-      <p:sp>
-        <p:nvSpPr>
-          <p:cNvPr id="5" name="TextBox 4"/>
+          <a:bodyPr rtlCol="0" anchor="ctr" tIns="50800" bIns="50800" lIns="101600" rIns="101600" wrap="square"/>
+          <a:lstStyle/>
+          <a:p>
+            <a:pPr algn="ctr"/>
+            <a:r>
+              <a:rPr sz="2000" b="1">
+                <a:solidFill>
+                  <a:srgbClr val="0B3D5C"/>
+                </a:solidFill>
+                <a:latin typeface="Apple SD Gothic Neo"/>
+              </a:rPr>
+              <a:t>사고 접수</a:t>
+            </a:r>
+          </a:p>
+        </p:txBody>
+      </p:sp>
+      <p:sp>
+        <p:nvSpPr>
+          <p:cNvPr id="6" name="TextBox 5"/>
           <p:cNvSpPr txBox="1"/>
           <p:nvPr/>
         </p:nvSpPr>
         <p:spPr>
           <a:xfrm>
-            <a:off x="914400" y="1828800"/>
-            <a:ext cx="10058400" cy="731520"/>
+            <a:off x="3073755" y="3429000"/>
+            <a:ext cx="548640" cy="548640"/>
           </a:xfrm>
           <a:prstGeom prst="rect">
             <a:avLst/>
@@ -8775,29 +8948,84 @@
           </a:bodyPr>
           <a:lstStyle/>
           <a:p>
-            <a:pPr algn="l"/>
+            <a:pPr algn="ctr"/>
             <a:r>
               <a:rPr sz="3000" b="1">
                 <a:solidFill>
+                  <a:srgbClr val="F2A900"/>
+                </a:solidFill>
+                <a:latin typeface="Apple SD Gothic Neo"/>
+              </a:rPr>
+              <a:t>→</a:t>
+            </a:r>
+          </a:p>
+        </p:txBody>
+      </p:sp>
+      <p:sp>
+        <p:nvSpPr>
+          <p:cNvPr id="7" name="Rounded Rectangle 6"/>
+          <p:cNvSpPr/>
+          <p:nvPr/>
+        </p:nvSpPr>
+        <p:spPr>
+          <a:xfrm>
+            <a:off x="3558387" y="3291840"/>
+            <a:ext cx="2286000" cy="1097280"/>
+          </a:xfrm>
+          <a:prstGeom prst="roundRect">
+            <a:avLst/>
+          </a:prstGeom>
+          <a:solidFill>
+            <a:srgbClr val="F5F9FC"/>
+          </a:solidFill>
+          <a:ln w="16510">
+            <a:solidFill>
+              <a:srgbClr val="D7E1EA"/>
+            </a:solidFill>
+          </a:ln>
+          <a:effectLst/>
+        </p:spPr>
+        <p:style>
+          <a:lnRef idx="1">
+            <a:schemeClr val="accent1"/>
+          </a:lnRef>
+          <a:fillRef idx="3">
+            <a:schemeClr val="accent1"/>
+          </a:fillRef>
+          <a:effectRef idx="2">
+            <a:schemeClr val="accent1"/>
+          </a:effectRef>
+          <a:fontRef idx="minor">
+            <a:schemeClr val="lt1"/>
+          </a:fontRef>
+        </p:style>
+        <p:txBody>
+          <a:bodyPr rtlCol="0" anchor="ctr" tIns="50800" bIns="50800" lIns="101600" rIns="101600" wrap="square"/>
+          <a:lstStyle/>
+          <a:p>
+            <a:pPr algn="ctr"/>
+            <a:r>
+              <a:rPr sz="2000" b="1">
+                <a:solidFill>
                   <a:srgbClr val="0B3D5C"/>
                 </a:solidFill>
                 <a:latin typeface="Apple SD Gothic Neo"/>
               </a:rPr>
-              <a:t>사고 피해를 보상해 주는 보험</a:t>
-            </a:r>
-          </a:p>
-        </p:txBody>
-      </p:sp>
-      <p:sp>
-        <p:nvSpPr>
-          <p:cNvPr id="6" name="TextBox 5"/>
+              <a:t>직원이 맡음</a:t>
+            </a:r>
+          </a:p>
+        </p:txBody>
+      </p:sp>
+      <p:sp>
+        <p:nvSpPr>
+          <p:cNvPr id="8" name="TextBox 7"/>
           <p:cNvSpPr txBox="1"/>
           <p:nvPr/>
         </p:nvSpPr>
         <p:spPr>
           <a:xfrm>
-            <a:off x="914400" y="2926080"/>
-            <a:ext cx="10515600" cy="2743200"/>
+            <a:off x="5862675" y="3429000"/>
+            <a:ext cx="548640" cy="548640"/>
           </a:xfrm>
           <a:prstGeom prst="rect">
             <a:avLst/>
@@ -8805,83 +9033,165 @@
           <a:noFill/>
         </p:spPr>
         <p:txBody>
-          <a:bodyPr wrap="square" anchor="t">
+          <a:bodyPr wrap="square" anchor="ctr">
             <a:spAutoFit/>
           </a:bodyPr>
           <a:lstStyle/>
           <a:p>
-            <a:pPr algn="l">
-              <a:spcAft>
-                <a:spcPts val="1400"/>
-              </a:spcAft>
-            </a:pPr>
-            <a:r>
-              <a:rPr sz="2300" b="1">
+            <a:pPr algn="ctr"/>
+            <a:r>
+              <a:rPr sz="3000" b="1">
                 <a:solidFill>
                   <a:srgbClr val="F2A900"/>
                 </a:solidFill>
                 <a:latin typeface="Apple SD Gothic Neo"/>
               </a:rPr>
-              <a:t>—  </a:t>
-            </a:r>
-            <a:r>
-              <a:rPr sz="2300" b="0">
-                <a:solidFill>
-                  <a:srgbClr val="1C2B36"/>
-                </a:solidFill>
-                <a:latin typeface="Apple SD Gothic Neo"/>
-              </a:rPr>
-              <a:t>사고를 접수하면 접수번호가 나온다</a:t>
-            </a:r>
-          </a:p>
-          <a:p>
-            <a:pPr algn="l">
-              <a:spcAft>
-                <a:spcPts val="1400"/>
-              </a:spcAft>
-            </a:pPr>
-            <a:r>
-              <a:rPr sz="2300" b="1">
+              <a:t>→</a:t>
+            </a:r>
+          </a:p>
+        </p:txBody>
+      </p:sp>
+      <p:sp>
+        <p:nvSpPr>
+          <p:cNvPr id="9" name="Rounded Rectangle 8"/>
+          <p:cNvSpPr/>
+          <p:nvPr/>
+        </p:nvSpPr>
+        <p:spPr>
+          <a:xfrm>
+            <a:off x="6347307" y="3291840"/>
+            <a:ext cx="2286000" cy="1097280"/>
+          </a:xfrm>
+          <a:prstGeom prst="roundRect">
+            <a:avLst/>
+          </a:prstGeom>
+          <a:solidFill>
+            <a:srgbClr val="F5F9FC"/>
+          </a:solidFill>
+          <a:ln w="16510">
+            <a:solidFill>
+              <a:srgbClr val="D7E1EA"/>
+            </a:solidFill>
+          </a:ln>
+          <a:effectLst/>
+        </p:spPr>
+        <p:style>
+          <a:lnRef idx="1">
+            <a:schemeClr val="accent1"/>
+          </a:lnRef>
+          <a:fillRef idx="3">
+            <a:schemeClr val="accent1"/>
+          </a:fillRef>
+          <a:effectRef idx="2">
+            <a:schemeClr val="accent1"/>
+          </a:effectRef>
+          <a:fontRef idx="minor">
+            <a:schemeClr val="lt1"/>
+          </a:fontRef>
+        </p:style>
+        <p:txBody>
+          <a:bodyPr rtlCol="0" anchor="ctr" tIns="50800" bIns="50800" lIns="101600" rIns="101600" wrap="square"/>
+          <a:lstStyle/>
+          <a:p>
+            <a:pPr algn="ctr"/>
+            <a:r>
+              <a:rPr sz="2000" b="1">
+                <a:solidFill>
+                  <a:srgbClr val="0B3D5C"/>
+                </a:solidFill>
+                <a:latin typeface="Apple SD Gothic Neo"/>
+              </a:rPr>
+              <a:t>보상액 사정</a:t>
+            </a:r>
+          </a:p>
+        </p:txBody>
+      </p:sp>
+      <p:sp>
+        <p:nvSpPr>
+          <p:cNvPr id="10" name="TextBox 9"/>
+          <p:cNvSpPr txBox="1"/>
+          <p:nvPr/>
+        </p:nvSpPr>
+        <p:spPr>
+          <a:xfrm>
+            <a:off x="8651595" y="3429000"/>
+            <a:ext cx="548640" cy="548640"/>
+          </a:xfrm>
+          <a:prstGeom prst="rect">
+            <a:avLst/>
+          </a:prstGeom>
+          <a:noFill/>
+        </p:spPr>
+        <p:txBody>
+          <a:bodyPr wrap="square" anchor="ctr">
+            <a:spAutoFit/>
+          </a:bodyPr>
+          <a:lstStyle/>
+          <a:p>
+            <a:pPr algn="ctr"/>
+            <a:r>
+              <a:rPr sz="3000" b="1">
                 <a:solidFill>
                   <a:srgbClr val="F2A900"/>
                 </a:solidFill>
                 <a:latin typeface="Apple SD Gothic Neo"/>
               </a:rPr>
-              <a:t>—  </a:t>
-            </a:r>
-            <a:r>
-              <a:rPr sz="2300" b="0">
-                <a:solidFill>
-                  <a:srgbClr val="1C2B36"/>
-                </a:solidFill>
-                <a:latin typeface="Apple SD Gothic Neo"/>
-              </a:rPr>
-              <a:t>직원 한 명이 그 사고를 맡아(배정) 보상 금액을 정한다</a:t>
-            </a:r>
-          </a:p>
-          <a:p>
-            <a:pPr algn="l">
-              <a:spcAft>
-                <a:spcPts val="1400"/>
-              </a:spcAft>
-            </a:pPr>
-            <a:r>
-              <a:rPr sz="2300" b="1">
-                <a:solidFill>
-                  <a:srgbClr val="F2A900"/>
-                </a:solidFill>
-                <a:latin typeface="Apple SD Gothic Neo"/>
-              </a:rPr>
-              <a:t>—  </a:t>
-            </a:r>
-            <a:r>
-              <a:rPr sz="2300" b="0">
-                <a:solidFill>
-                  <a:srgbClr val="1C2B36"/>
-                </a:solidFill>
-                <a:latin typeface="Apple SD Gothic Neo"/>
-              </a:rPr>
-              <a:t>정해진 금액이 계좌로 입금된다</a:t>
+              <a:t>→</a:t>
+            </a:r>
+          </a:p>
+        </p:txBody>
+      </p:sp>
+      <p:sp>
+        <p:nvSpPr>
+          <p:cNvPr id="11" name="Rounded Rectangle 10"/>
+          <p:cNvSpPr/>
+          <p:nvPr/>
+        </p:nvSpPr>
+        <p:spPr>
+          <a:xfrm>
+            <a:off x="9136227" y="3291840"/>
+            <a:ext cx="2286000" cy="1097280"/>
+          </a:xfrm>
+          <a:prstGeom prst="roundRect">
+            <a:avLst/>
+          </a:prstGeom>
+          <a:solidFill>
+            <a:srgbClr val="0B3D5C"/>
+          </a:solidFill>
+          <a:ln w="16510">
+            <a:solidFill>
+              <a:srgbClr val="D7E1EA"/>
+            </a:solidFill>
+          </a:ln>
+          <a:effectLst/>
+        </p:spPr>
+        <p:style>
+          <a:lnRef idx="1">
+            <a:schemeClr val="accent1"/>
+          </a:lnRef>
+          <a:fillRef idx="3">
+            <a:schemeClr val="accent1"/>
+          </a:fillRef>
+          <a:effectRef idx="2">
+            <a:schemeClr val="accent1"/>
+          </a:effectRef>
+          <a:fontRef idx="minor">
+            <a:schemeClr val="lt1"/>
+          </a:fontRef>
+        </p:style>
+        <p:txBody>
+          <a:bodyPr rtlCol="0" anchor="ctr" tIns="50800" bIns="50800" lIns="101600" rIns="101600" wrap="square"/>
+          <a:lstStyle/>
+          <a:p>
+            <a:pPr algn="ctr"/>
+            <a:r>
+              <a:rPr sz="2000" b="1">
+                <a:solidFill>
+                  <a:srgbClr val="FFFFFF"/>
+                </a:solidFill>
+                <a:latin typeface="Apple SD Gothic Neo"/>
+              </a:rPr>
+              <a:t>계좌 입금</a:t>
             </a:r>
           </a:p>
         </p:txBody>

--- a/docs/presentation/보험발표-편집가능.pptx
+++ b/docs/presentation/보험발표-편집가능.pptx
@@ -3123,8 +3123,8 @@
         </p:nvSpPr>
         <p:spPr>
           <a:xfrm>
-            <a:off x="914400" y="2468880"/>
-            <a:ext cx="10332720" cy="1188720"/>
+            <a:off x="914400" y="2377440"/>
+            <a:ext cx="10332720" cy="1280160"/>
           </a:xfrm>
           <a:prstGeom prst="rect">
             <a:avLst/>
@@ -3139,7 +3139,7 @@
           <a:p>
             <a:pPr algn="l"/>
             <a:r>
-              <a:rPr sz="4000" b="1">
+              <a:rPr sz="4600" b="1">
                 <a:solidFill>
                   <a:srgbClr val="FFFFFF"/>
                 </a:solidFill>
@@ -3158,8 +3158,8 @@
         </p:nvSpPr>
         <p:spPr>
           <a:xfrm>
-            <a:off x="914400" y="3657600"/>
-            <a:ext cx="10332720" cy="731520"/>
+            <a:off x="914400" y="3703320"/>
+            <a:ext cx="10332720" cy="822960"/>
           </a:xfrm>
           <a:prstGeom prst="rect">
             <a:avLst/>
@@ -3174,7 +3174,7 @@
           <a:p>
             <a:pPr algn="l"/>
             <a:r>
-              <a:rPr sz="2400" b="1">
+              <a:rPr sz="2800" b="1">
                 <a:solidFill>
                   <a:srgbClr val="F2A900"/>
                 </a:solidFill>
@@ -3211,8 +3211,8 @@
         </p:nvSpPr>
         <p:spPr>
           <a:xfrm>
-            <a:off x="548640" y="411480"/>
-            <a:ext cx="10972800" cy="822960"/>
+            <a:off x="548640" y="365760"/>
+            <a:ext cx="11064240" cy="914400"/>
           </a:xfrm>
           <a:prstGeom prst="rect">
             <a:avLst/>
@@ -3227,7 +3227,7 @@
           <a:p>
             <a:pPr algn="l"/>
             <a:r>
-              <a:rPr sz="3000" b="1">
+              <a:rPr sz="3600" b="1">
                 <a:solidFill>
                   <a:srgbClr val="0B3D5C"/>
                 </a:solidFill>
@@ -3246,8 +3246,8 @@
         </p:nvSpPr>
         <p:spPr>
           <a:xfrm>
-            <a:off x="566928" y="1207008"/>
-            <a:ext cx="2377440" cy="54864"/>
+            <a:off x="566928" y="1298448"/>
+            <a:ext cx="2651760" cy="64008"/>
           </a:xfrm>
           <a:prstGeom prst="rect">
             <a:avLst/>
@@ -3290,14 +3290,14 @@
         </p:nvSpPr>
         <p:spPr>
           <a:xfrm>
-            <a:off x="548640" y="1325880"/>
-            <a:ext cx="5394960" cy="457200"/>
+            <a:off x="548640" y="1371600"/>
+            <a:ext cx="5394960" cy="502920"/>
           </a:xfrm>
           <a:prstGeom prst="roundRect">
             <a:avLst/>
           </a:prstGeom>
           <a:solidFill>
-            <a:srgbClr val="EEF3F7"/>
+            <a:srgbClr val="0B3D5C"/>
           </a:solidFill>
           <a:ln>
             <a:noFill/>
@@ -3319,14 +3319,14 @@
           </a:fontRef>
         </p:style>
         <p:txBody>
-          <a:bodyPr rtlCol="0" anchor="ctr" tIns="50800" bIns="50800" lIns="101600" rIns="101600" wrap="square"/>
-          <a:lstStyle/>
-          <a:p>
-            <a:pPr algn="ctr"/>
-            <a:r>
-              <a:rPr sz="1700" b="1">
-                <a:solidFill>
-                  <a:srgbClr val="0B3D5C"/>
+          <a:bodyPr rtlCol="0" anchor="ctr" tIns="63500" bIns="63500" lIns="127000" rIns="127000" wrap="square"/>
+          <a:lstStyle/>
+          <a:p>
+            <a:pPr algn="ctr"/>
+            <a:r>
+              <a:rPr sz="2000" b="1">
+                <a:solidFill>
+                  <a:srgbClr val="FFFFFF"/>
                 </a:solidFill>
                 <a:latin typeface="Apple SD Gothic Neo"/>
               </a:rPr>
@@ -3343,8 +3343,8 @@
         </p:nvSpPr>
         <p:spPr>
           <a:xfrm>
-            <a:off x="6245352" y="1325880"/>
-            <a:ext cx="5394960" cy="457200"/>
+            <a:off x="6245352" y="1371600"/>
+            <a:ext cx="5394960" cy="502920"/>
           </a:xfrm>
           <a:prstGeom prst="roundRect">
             <a:avLst/>
@@ -3372,12 +3372,12 @@
           </a:fontRef>
         </p:style>
         <p:txBody>
-          <a:bodyPr rtlCol="0" anchor="ctr" tIns="50800" bIns="50800" lIns="101600" rIns="101600" wrap="square"/>
-          <a:lstStyle/>
-          <a:p>
-            <a:pPr algn="ctr"/>
-            <a:r>
-              <a:rPr sz="1700" b="1">
+          <a:bodyPr rtlCol="0" anchor="ctr" tIns="63500" bIns="63500" lIns="127000" rIns="127000" wrap="square"/>
+          <a:lstStyle/>
+          <a:p>
+            <a:pPr algn="ctr"/>
+            <a:r>
+              <a:rPr sz="2000" b="1">
                 <a:solidFill>
                   <a:srgbClr val="0F2A43"/>
                 </a:solidFill>
@@ -3404,8 +3404,8 @@
         </p:blipFill>
         <p:spPr>
           <a:xfrm>
-            <a:off x="1849032" y="1874519"/>
-            <a:ext cx="2794176" cy="3017520"/>
+            <a:off x="1891368" y="1965960"/>
+            <a:ext cx="2709504" cy="2926080"/>
           </a:xfrm>
           <a:prstGeom prst="rect">
             <a:avLst/>
@@ -3428,8 +3428,8 @@
         </p:blipFill>
         <p:spPr>
           <a:xfrm>
-            <a:off x="7536240" y="1874519"/>
-            <a:ext cx="2813184" cy="3017520"/>
+            <a:off x="7578864" y="1965960"/>
+            <a:ext cx="2727936" cy="2926080"/>
           </a:xfrm>
           <a:prstGeom prst="rect">
             <a:avLst/>
@@ -3444,17 +3444,19 @@
         </p:nvSpPr>
         <p:spPr>
           <a:xfrm>
-            <a:off x="548640" y="5120640"/>
-            <a:ext cx="5394960" cy="1188720"/>
+            <a:off x="548640" y="5074920"/>
+            <a:ext cx="5394960" cy="1234440"/>
           </a:xfrm>
           <a:prstGeom prst="roundRect">
             <a:avLst/>
           </a:prstGeom>
           <a:solidFill>
-            <a:srgbClr val="EEF6F4"/>
-          </a:solidFill>
-          <a:ln>
-            <a:noFill/>
+            <a:srgbClr val="DCF1EC"/>
+          </a:solidFill>
+          <a:ln w="19050">
+            <a:solidFill>
+              <a:srgbClr val="158073"/>
+            </a:solidFill>
           </a:ln>
           <a:effectLst/>
         </p:spPr>
@@ -3473,14 +3475,14 @@
           </a:fontRef>
         </p:style>
         <p:txBody>
-          <a:bodyPr rtlCol="0" anchor="ctr" tIns="50800" bIns="50800" lIns="101600" rIns="101600" wrap="square"/>
+          <a:bodyPr rtlCol="0" anchor="ctr" tIns="63500" bIns="63500" lIns="127000" rIns="127000" wrap="square"/>
           <a:lstStyle/>
           <a:p>
             <a:pPr algn="l"/>
             <a:r>
-              <a:rPr sz="1600" b="1">
-                <a:solidFill>
-                  <a:srgbClr val="1F9E8F"/>
+              <a:rPr sz="1800" b="1">
+                <a:solidFill>
+                  <a:srgbClr val="158073"/>
                 </a:solidFill>
                 <a:latin typeface="Apple SD Gothic Neo"/>
               </a:rPr>
@@ -3490,7 +3492,7 @@
           <a:p>
             <a:pPr algn="l"/>
             <a:r>
-              <a:rPr sz="1500" b="0">
+              <a:rPr sz="1700" b="0">
                 <a:solidFill>
                   <a:srgbClr val="1C2B36"/>
                 </a:solidFill>
@@ -3509,17 +3511,19 @@
         </p:nvSpPr>
         <p:spPr>
           <a:xfrm>
-            <a:off x="6245352" y="5120640"/>
-            <a:ext cx="5394960" cy="1188720"/>
+            <a:off x="6245352" y="5074920"/>
+            <a:ext cx="5394960" cy="1234440"/>
           </a:xfrm>
           <a:prstGeom prst="roundRect">
             <a:avLst/>
           </a:prstGeom>
           <a:solidFill>
-            <a:srgbClr val="FFF3D6"/>
-          </a:solidFill>
-          <a:ln>
-            <a:noFill/>
+            <a:srgbClr val="FDECC4"/>
+          </a:solidFill>
+          <a:ln w="19050">
+            <a:solidFill>
+              <a:srgbClr val="F2A900"/>
+            </a:solidFill>
           </a:ln>
           <a:effectLst/>
         </p:spPr>
@@ -3538,14 +3542,14 @@
           </a:fontRef>
         </p:style>
         <p:txBody>
-          <a:bodyPr rtlCol="0" anchor="ctr" tIns="50800" bIns="50800" lIns="101600" rIns="101600" wrap="square"/>
+          <a:bodyPr rtlCol="0" anchor="ctr" tIns="63500" bIns="63500" lIns="127000" rIns="127000" wrap="square"/>
           <a:lstStyle/>
           <a:p>
             <a:pPr algn="l"/>
             <a:r>
-              <a:rPr sz="1600" b="1">
-                <a:solidFill>
-                  <a:srgbClr val="C8860A"/>
+              <a:rPr sz="1800" b="1">
+                <a:solidFill>
+                  <a:srgbClr val="B57900"/>
                 </a:solidFill>
                 <a:latin typeface="Apple SD Gothic Neo"/>
               </a:rPr>
@@ -3555,7 +3559,7 @@
           <a:p>
             <a:pPr algn="l"/>
             <a:r>
-              <a:rPr sz="1500" b="0">
+              <a:rPr sz="1700" b="0">
                 <a:solidFill>
                   <a:srgbClr val="1C2B36"/>
                 </a:solidFill>
@@ -3592,8 +3596,8 @@
         </p:nvSpPr>
         <p:spPr>
           <a:xfrm>
-            <a:off x="548640" y="411480"/>
-            <a:ext cx="10972800" cy="822960"/>
+            <a:off x="548640" y="365760"/>
+            <a:ext cx="11064240" cy="914400"/>
           </a:xfrm>
           <a:prstGeom prst="rect">
             <a:avLst/>
@@ -3608,7 +3612,7 @@
           <a:p>
             <a:pPr algn="l"/>
             <a:r>
-              <a:rPr sz="3000" b="1">
+              <a:rPr sz="3600" b="1">
                 <a:solidFill>
                   <a:srgbClr val="0B3D5C"/>
                 </a:solidFill>
@@ -3627,8 +3631,8 @@
         </p:nvSpPr>
         <p:spPr>
           <a:xfrm>
-            <a:off x="566928" y="1207008"/>
-            <a:ext cx="2377440" cy="54864"/>
+            <a:off x="566928" y="1298448"/>
+            <a:ext cx="2651760" cy="64008"/>
           </a:xfrm>
           <a:prstGeom prst="rect">
             <a:avLst/>
@@ -3671,14 +3675,14 @@
         </p:nvSpPr>
         <p:spPr>
           <a:xfrm>
-            <a:off x="548640" y="1325880"/>
-            <a:ext cx="5394960" cy="457200"/>
+            <a:off x="548640" y="1371600"/>
+            <a:ext cx="5394960" cy="502920"/>
           </a:xfrm>
           <a:prstGeom prst="roundRect">
             <a:avLst/>
           </a:prstGeom>
           <a:solidFill>
-            <a:srgbClr val="EEF3F7"/>
+            <a:srgbClr val="0B3D5C"/>
           </a:solidFill>
           <a:ln>
             <a:noFill/>
@@ -3700,14 +3704,14 @@
           </a:fontRef>
         </p:style>
         <p:txBody>
-          <a:bodyPr rtlCol="0" anchor="ctr" tIns="50800" bIns="50800" lIns="101600" rIns="101600" wrap="square"/>
-          <a:lstStyle/>
-          <a:p>
-            <a:pPr algn="ctr"/>
-            <a:r>
-              <a:rPr sz="1700" b="1">
-                <a:solidFill>
-                  <a:srgbClr val="0B3D5C"/>
+          <a:bodyPr rtlCol="0" anchor="ctr" tIns="63500" bIns="63500" lIns="127000" rIns="127000" wrap="square"/>
+          <a:lstStyle/>
+          <a:p>
+            <a:pPr algn="ctr"/>
+            <a:r>
+              <a:rPr sz="2000" b="1">
+                <a:solidFill>
+                  <a:srgbClr val="FFFFFF"/>
                 </a:solidFill>
                 <a:latin typeface="Apple SD Gothic Neo"/>
               </a:rPr>
@@ -3724,8 +3728,8 @@
         </p:nvSpPr>
         <p:spPr>
           <a:xfrm>
-            <a:off x="6245352" y="1325880"/>
-            <a:ext cx="5394960" cy="457200"/>
+            <a:off x="6245352" y="1371600"/>
+            <a:ext cx="5394960" cy="502920"/>
           </a:xfrm>
           <a:prstGeom prst="roundRect">
             <a:avLst/>
@@ -3753,12 +3757,12 @@
           </a:fontRef>
         </p:style>
         <p:txBody>
-          <a:bodyPr rtlCol="0" anchor="ctr" tIns="50800" bIns="50800" lIns="101600" rIns="101600" wrap="square"/>
-          <a:lstStyle/>
-          <a:p>
-            <a:pPr algn="ctr"/>
-            <a:r>
-              <a:rPr sz="1700" b="1">
+          <a:bodyPr rtlCol="0" anchor="ctr" tIns="63500" bIns="63500" lIns="127000" rIns="127000" wrap="square"/>
+          <a:lstStyle/>
+          <a:p>
+            <a:pPr algn="ctr"/>
+            <a:r>
+              <a:rPr sz="2000" b="1">
                 <a:solidFill>
                   <a:srgbClr val="0F2A43"/>
                 </a:solidFill>
@@ -3785,8 +3789,8 @@
         </p:blipFill>
         <p:spPr>
           <a:xfrm>
-            <a:off x="599883" y="1874519"/>
-            <a:ext cx="5292473" cy="3017520"/>
+            <a:off x="680072" y="1965960"/>
+            <a:ext cx="5132095" cy="2926080"/>
           </a:xfrm>
           <a:prstGeom prst="rect">
             <a:avLst/>
@@ -3809,8 +3813,8 @@
         </p:blipFill>
         <p:spPr>
           <a:xfrm>
-            <a:off x="6296595" y="1874519"/>
-            <a:ext cx="5292473" cy="3017520"/>
+            <a:off x="6376784" y="1965960"/>
+            <a:ext cx="5132095" cy="2926080"/>
           </a:xfrm>
           <a:prstGeom prst="rect">
             <a:avLst/>
@@ -3825,17 +3829,19 @@
         </p:nvSpPr>
         <p:spPr>
           <a:xfrm>
-            <a:off x="548640" y="5120640"/>
-            <a:ext cx="5394960" cy="1188720"/>
+            <a:off x="548640" y="5074920"/>
+            <a:ext cx="5394960" cy="1234440"/>
           </a:xfrm>
           <a:prstGeom prst="roundRect">
             <a:avLst/>
           </a:prstGeom>
           <a:solidFill>
-            <a:srgbClr val="EEF6F4"/>
-          </a:solidFill>
-          <a:ln>
-            <a:noFill/>
+            <a:srgbClr val="DCF1EC"/>
+          </a:solidFill>
+          <a:ln w="19050">
+            <a:solidFill>
+              <a:srgbClr val="158073"/>
+            </a:solidFill>
           </a:ln>
           <a:effectLst/>
         </p:spPr>
@@ -3854,14 +3860,14 @@
           </a:fontRef>
         </p:style>
         <p:txBody>
-          <a:bodyPr rtlCol="0" anchor="ctr" tIns="50800" bIns="50800" lIns="101600" rIns="101600" wrap="square"/>
+          <a:bodyPr rtlCol="0" anchor="ctr" tIns="63500" bIns="63500" lIns="127000" rIns="127000" wrap="square"/>
           <a:lstStyle/>
           <a:p>
             <a:pPr algn="l"/>
             <a:r>
-              <a:rPr sz="1600" b="1">
-                <a:solidFill>
-                  <a:srgbClr val="1F9E8F"/>
+              <a:rPr sz="1800" b="1">
+                <a:solidFill>
+                  <a:srgbClr val="158073"/>
                 </a:solidFill>
                 <a:latin typeface="Apple SD Gothic Neo"/>
               </a:rPr>
@@ -3871,7 +3877,7 @@
           <a:p>
             <a:pPr algn="l"/>
             <a:r>
-              <a:rPr sz="1500" b="0">
+              <a:rPr sz="1700" b="0">
                 <a:solidFill>
                   <a:srgbClr val="1C2B36"/>
                 </a:solidFill>
@@ -3890,17 +3896,19 @@
         </p:nvSpPr>
         <p:spPr>
           <a:xfrm>
-            <a:off x="6245352" y="5120640"/>
-            <a:ext cx="5394960" cy="1188720"/>
+            <a:off x="6245352" y="5074920"/>
+            <a:ext cx="5394960" cy="1234440"/>
           </a:xfrm>
           <a:prstGeom prst="roundRect">
             <a:avLst/>
           </a:prstGeom>
           <a:solidFill>
-            <a:srgbClr val="FFF3D6"/>
-          </a:solidFill>
-          <a:ln>
-            <a:noFill/>
+            <a:srgbClr val="FDECC4"/>
+          </a:solidFill>
+          <a:ln w="19050">
+            <a:solidFill>
+              <a:srgbClr val="F2A900"/>
+            </a:solidFill>
           </a:ln>
           <a:effectLst/>
         </p:spPr>
@@ -3919,14 +3927,14 @@
           </a:fontRef>
         </p:style>
         <p:txBody>
-          <a:bodyPr rtlCol="0" anchor="ctr" tIns="50800" bIns="50800" lIns="101600" rIns="101600" wrap="square"/>
+          <a:bodyPr rtlCol="0" anchor="ctr" tIns="63500" bIns="63500" lIns="127000" rIns="127000" wrap="square"/>
           <a:lstStyle/>
           <a:p>
             <a:pPr algn="l"/>
             <a:r>
-              <a:rPr sz="1600" b="1">
-                <a:solidFill>
-                  <a:srgbClr val="C8860A"/>
+              <a:rPr sz="1800" b="1">
+                <a:solidFill>
+                  <a:srgbClr val="B57900"/>
                 </a:solidFill>
                 <a:latin typeface="Apple SD Gothic Neo"/>
               </a:rPr>
@@ -3936,7 +3944,7 @@
           <a:p>
             <a:pPr algn="l"/>
             <a:r>
-              <a:rPr sz="1500" b="0">
+              <a:rPr sz="1700" b="0">
                 <a:solidFill>
                   <a:srgbClr val="1C2B36"/>
                 </a:solidFill>
@@ -3973,8 +3981,8 @@
         </p:nvSpPr>
         <p:spPr>
           <a:xfrm>
-            <a:off x="548640" y="411480"/>
-            <a:ext cx="10972800" cy="822960"/>
+            <a:off x="548640" y="365760"/>
+            <a:ext cx="11064240" cy="914400"/>
           </a:xfrm>
           <a:prstGeom prst="rect">
             <a:avLst/>
@@ -3989,7 +3997,7 @@
           <a:p>
             <a:pPr algn="l"/>
             <a:r>
-              <a:rPr sz="3000" b="1">
+              <a:rPr sz="3600" b="1">
                 <a:solidFill>
                   <a:srgbClr val="0B3D5C"/>
                 </a:solidFill>
@@ -4008,8 +4016,8 @@
         </p:nvSpPr>
         <p:spPr>
           <a:xfrm>
-            <a:off x="566928" y="1207008"/>
-            <a:ext cx="2377440" cy="54864"/>
+            <a:off x="566928" y="1298448"/>
+            <a:ext cx="2651760" cy="64008"/>
           </a:xfrm>
           <a:prstGeom prst="rect">
             <a:avLst/>
@@ -4052,14 +4060,14 @@
         </p:nvSpPr>
         <p:spPr>
           <a:xfrm>
-            <a:off x="548640" y="1325880"/>
-            <a:ext cx="5394960" cy="457200"/>
+            <a:off x="548640" y="1371600"/>
+            <a:ext cx="5394960" cy="502920"/>
           </a:xfrm>
           <a:prstGeom prst="roundRect">
             <a:avLst/>
           </a:prstGeom>
           <a:solidFill>
-            <a:srgbClr val="EEF3F7"/>
+            <a:srgbClr val="0B3D5C"/>
           </a:solidFill>
           <a:ln>
             <a:noFill/>
@@ -4081,14 +4089,14 @@
           </a:fontRef>
         </p:style>
         <p:txBody>
-          <a:bodyPr rtlCol="0" anchor="ctr" tIns="50800" bIns="50800" lIns="101600" rIns="101600" wrap="square"/>
-          <a:lstStyle/>
-          <a:p>
-            <a:pPr algn="ctr"/>
-            <a:r>
-              <a:rPr sz="1700" b="1">
-                <a:solidFill>
-                  <a:srgbClr val="0B3D5C"/>
+          <a:bodyPr rtlCol="0" anchor="ctr" tIns="63500" bIns="63500" lIns="127000" rIns="127000" wrap="square"/>
+          <a:lstStyle/>
+          <a:p>
+            <a:pPr algn="ctr"/>
+            <a:r>
+              <a:rPr sz="2000" b="1">
+                <a:solidFill>
+                  <a:srgbClr val="FFFFFF"/>
                 </a:solidFill>
                 <a:latin typeface="Apple SD Gothic Neo"/>
               </a:rPr>
@@ -4105,8 +4113,8 @@
         </p:nvSpPr>
         <p:spPr>
           <a:xfrm>
-            <a:off x="6245352" y="1325880"/>
-            <a:ext cx="5394960" cy="457200"/>
+            <a:off x="6245352" y="1371600"/>
+            <a:ext cx="5394960" cy="502920"/>
           </a:xfrm>
           <a:prstGeom prst="roundRect">
             <a:avLst/>
@@ -4134,12 +4142,12 @@
           </a:fontRef>
         </p:style>
         <p:txBody>
-          <a:bodyPr rtlCol="0" anchor="ctr" tIns="50800" bIns="50800" lIns="101600" rIns="101600" wrap="square"/>
-          <a:lstStyle/>
-          <a:p>
-            <a:pPr algn="ctr"/>
-            <a:r>
-              <a:rPr sz="1700" b="1">
+          <a:bodyPr rtlCol="0" anchor="ctr" tIns="63500" bIns="63500" lIns="127000" rIns="127000" wrap="square"/>
+          <a:lstStyle/>
+          <a:p>
+            <a:pPr algn="ctr"/>
+            <a:r>
+              <a:rPr sz="2000" b="1">
                 <a:solidFill>
                   <a:srgbClr val="0F2A43"/>
                 </a:solidFill>
@@ -4166,8 +4174,8 @@
         </p:blipFill>
         <p:spPr>
           <a:xfrm>
-            <a:off x="1939359" y="1874519"/>
-            <a:ext cx="2613521" cy="3017520"/>
+            <a:off x="1978958" y="1965960"/>
+            <a:ext cx="2534323" cy="2926080"/>
           </a:xfrm>
           <a:prstGeom prst="rect">
             <a:avLst/>
@@ -4190,8 +4198,8 @@
         </p:blipFill>
         <p:spPr>
           <a:xfrm>
-            <a:off x="6856645" y="1874519"/>
-            <a:ext cx="4172373" cy="3017520"/>
+            <a:off x="6919863" y="1965960"/>
+            <a:ext cx="4045937" cy="2926080"/>
           </a:xfrm>
           <a:prstGeom prst="rect">
             <a:avLst/>
@@ -4206,17 +4214,19 @@
         </p:nvSpPr>
         <p:spPr>
           <a:xfrm>
-            <a:off x="548640" y="5120640"/>
-            <a:ext cx="5394960" cy="1188720"/>
+            <a:off x="548640" y="5074920"/>
+            <a:ext cx="5394960" cy="1234440"/>
           </a:xfrm>
           <a:prstGeom prst="roundRect">
             <a:avLst/>
           </a:prstGeom>
           <a:solidFill>
-            <a:srgbClr val="EEF6F4"/>
-          </a:solidFill>
-          <a:ln>
-            <a:noFill/>
+            <a:srgbClr val="DCF1EC"/>
+          </a:solidFill>
+          <a:ln w="19050">
+            <a:solidFill>
+              <a:srgbClr val="158073"/>
+            </a:solidFill>
           </a:ln>
           <a:effectLst/>
         </p:spPr>
@@ -4235,14 +4245,14 @@
           </a:fontRef>
         </p:style>
         <p:txBody>
-          <a:bodyPr rtlCol="0" anchor="ctr" tIns="50800" bIns="50800" lIns="101600" rIns="101600" wrap="square"/>
+          <a:bodyPr rtlCol="0" anchor="ctr" tIns="63500" bIns="63500" lIns="127000" rIns="127000" wrap="square"/>
           <a:lstStyle/>
           <a:p>
             <a:pPr algn="l"/>
             <a:r>
-              <a:rPr sz="1600" b="1">
-                <a:solidFill>
-                  <a:srgbClr val="1F9E8F"/>
+              <a:rPr sz="1800" b="1">
+                <a:solidFill>
+                  <a:srgbClr val="158073"/>
                 </a:solidFill>
                 <a:latin typeface="Apple SD Gothic Neo"/>
               </a:rPr>
@@ -4252,7 +4262,7 @@
           <a:p>
             <a:pPr algn="l"/>
             <a:r>
-              <a:rPr sz="1500" b="0">
+              <a:rPr sz="1700" b="0">
                 <a:solidFill>
                   <a:srgbClr val="1C2B36"/>
                 </a:solidFill>
@@ -4271,17 +4281,19 @@
         </p:nvSpPr>
         <p:spPr>
           <a:xfrm>
-            <a:off x="6245352" y="5120640"/>
-            <a:ext cx="5394960" cy="1188720"/>
+            <a:off x="6245352" y="5074920"/>
+            <a:ext cx="5394960" cy="1234440"/>
           </a:xfrm>
           <a:prstGeom prst="roundRect">
             <a:avLst/>
           </a:prstGeom>
           <a:solidFill>
-            <a:srgbClr val="FFF3D6"/>
-          </a:solidFill>
-          <a:ln>
-            <a:noFill/>
+            <a:srgbClr val="FDECC4"/>
+          </a:solidFill>
+          <a:ln w="19050">
+            <a:solidFill>
+              <a:srgbClr val="F2A900"/>
+            </a:solidFill>
           </a:ln>
           <a:effectLst/>
         </p:spPr>
@@ -4300,14 +4312,14 @@
           </a:fontRef>
         </p:style>
         <p:txBody>
-          <a:bodyPr rtlCol="0" anchor="ctr" tIns="50800" bIns="50800" lIns="101600" rIns="101600" wrap="square"/>
+          <a:bodyPr rtlCol="0" anchor="ctr" tIns="63500" bIns="63500" lIns="127000" rIns="127000" wrap="square"/>
           <a:lstStyle/>
           <a:p>
             <a:pPr algn="l"/>
             <a:r>
-              <a:rPr sz="1600" b="1">
-                <a:solidFill>
-                  <a:srgbClr val="C8860A"/>
+              <a:rPr sz="1800" b="1">
+                <a:solidFill>
+                  <a:srgbClr val="B57900"/>
                 </a:solidFill>
                 <a:latin typeface="Apple SD Gothic Neo"/>
               </a:rPr>
@@ -4317,7 +4329,7 @@
           <a:p>
             <a:pPr algn="l"/>
             <a:r>
-              <a:rPr sz="1500" b="0">
+              <a:rPr sz="1700" b="0">
                 <a:solidFill>
                   <a:srgbClr val="1C2B36"/>
                 </a:solidFill>
@@ -4354,8 +4366,8 @@
         </p:nvSpPr>
         <p:spPr>
           <a:xfrm>
-            <a:off x="548640" y="411480"/>
-            <a:ext cx="10972800" cy="822960"/>
+            <a:off x="548640" y="365760"/>
+            <a:ext cx="11064240" cy="914400"/>
           </a:xfrm>
           <a:prstGeom prst="rect">
             <a:avLst/>
@@ -4370,7 +4382,7 @@
           <a:p>
             <a:pPr algn="l"/>
             <a:r>
-              <a:rPr sz="3000" b="1">
+              <a:rPr sz="3600" b="1">
                 <a:solidFill>
                   <a:srgbClr val="0B3D5C"/>
                 </a:solidFill>
@@ -4389,8 +4401,8 @@
         </p:nvSpPr>
         <p:spPr>
           <a:xfrm>
-            <a:off x="566928" y="1207008"/>
-            <a:ext cx="2377440" cy="54864"/>
+            <a:off x="566928" y="1298448"/>
+            <a:ext cx="2651760" cy="64008"/>
           </a:xfrm>
           <a:prstGeom prst="rect">
             <a:avLst/>
@@ -4433,14 +4445,14 @@
         </p:nvSpPr>
         <p:spPr>
           <a:xfrm>
-            <a:off x="548640" y="1325880"/>
-            <a:ext cx="5394960" cy="457200"/>
+            <a:off x="548640" y="1371600"/>
+            <a:ext cx="5394960" cy="502920"/>
           </a:xfrm>
           <a:prstGeom prst="roundRect">
             <a:avLst/>
           </a:prstGeom>
           <a:solidFill>
-            <a:srgbClr val="EEF3F7"/>
+            <a:srgbClr val="0B3D5C"/>
           </a:solidFill>
           <a:ln>
             <a:noFill/>
@@ -4462,14 +4474,14 @@
           </a:fontRef>
         </p:style>
         <p:txBody>
-          <a:bodyPr rtlCol="0" anchor="ctr" tIns="50800" bIns="50800" lIns="101600" rIns="101600" wrap="square"/>
-          <a:lstStyle/>
-          <a:p>
-            <a:pPr algn="ctr"/>
-            <a:r>
-              <a:rPr sz="1700" b="1">
-                <a:solidFill>
-                  <a:srgbClr val="0B3D5C"/>
+          <a:bodyPr rtlCol="0" anchor="ctr" tIns="63500" bIns="63500" lIns="127000" rIns="127000" wrap="square"/>
+          <a:lstStyle/>
+          <a:p>
+            <a:pPr algn="ctr"/>
+            <a:r>
+              <a:rPr sz="2000" b="1">
+                <a:solidFill>
+                  <a:srgbClr val="FFFFFF"/>
                 </a:solidFill>
                 <a:latin typeface="Apple SD Gothic Neo"/>
               </a:rPr>
@@ -4486,8 +4498,8 @@
         </p:nvSpPr>
         <p:spPr>
           <a:xfrm>
-            <a:off x="6245352" y="1325880"/>
-            <a:ext cx="5394960" cy="457200"/>
+            <a:off x="6245352" y="1371600"/>
+            <a:ext cx="5394960" cy="502920"/>
           </a:xfrm>
           <a:prstGeom prst="roundRect">
             <a:avLst/>
@@ -4515,12 +4527,12 @@
           </a:fontRef>
         </p:style>
         <p:txBody>
-          <a:bodyPr rtlCol="0" anchor="ctr" tIns="50800" bIns="50800" lIns="101600" rIns="101600" wrap="square"/>
-          <a:lstStyle/>
-          <a:p>
-            <a:pPr algn="ctr"/>
-            <a:r>
-              <a:rPr sz="1700" b="1">
+          <a:bodyPr rtlCol="0" anchor="ctr" tIns="63500" bIns="63500" lIns="127000" rIns="127000" wrap="square"/>
+          <a:lstStyle/>
+          <a:p>
+            <a:pPr algn="ctr"/>
+            <a:r>
+              <a:rPr sz="2000" b="1">
                 <a:solidFill>
                   <a:srgbClr val="0F2A43"/>
                 </a:solidFill>
@@ -4547,8 +4559,8 @@
         </p:blipFill>
         <p:spPr>
           <a:xfrm>
-            <a:off x="1478002" y="1874519"/>
-            <a:ext cx="3536234" cy="3017520"/>
+            <a:off x="1531582" y="1965960"/>
+            <a:ext cx="3429075" cy="2926080"/>
           </a:xfrm>
           <a:prstGeom prst="rect">
             <a:avLst/>
@@ -4571,8 +4583,8 @@
         </p:blipFill>
         <p:spPr>
           <a:xfrm>
-            <a:off x="7657198" y="1874519"/>
-            <a:ext cx="2571267" cy="3017520"/>
+            <a:off x="7696157" y="1965960"/>
+            <a:ext cx="2493349" cy="2926080"/>
           </a:xfrm>
           <a:prstGeom prst="rect">
             <a:avLst/>
@@ -4587,17 +4599,19 @@
         </p:nvSpPr>
         <p:spPr>
           <a:xfrm>
-            <a:off x="548640" y="5120640"/>
-            <a:ext cx="5394960" cy="1188720"/>
+            <a:off x="548640" y="5074920"/>
+            <a:ext cx="5394960" cy="1234440"/>
           </a:xfrm>
           <a:prstGeom prst="roundRect">
             <a:avLst/>
           </a:prstGeom>
           <a:solidFill>
-            <a:srgbClr val="EEF6F4"/>
-          </a:solidFill>
-          <a:ln>
-            <a:noFill/>
+            <a:srgbClr val="DCF1EC"/>
+          </a:solidFill>
+          <a:ln w="19050">
+            <a:solidFill>
+              <a:srgbClr val="158073"/>
+            </a:solidFill>
           </a:ln>
           <a:effectLst/>
         </p:spPr>
@@ -4616,14 +4630,14 @@
           </a:fontRef>
         </p:style>
         <p:txBody>
-          <a:bodyPr rtlCol="0" anchor="ctr" tIns="50800" bIns="50800" lIns="101600" rIns="101600" wrap="square"/>
+          <a:bodyPr rtlCol="0" anchor="ctr" tIns="63500" bIns="63500" lIns="127000" rIns="127000" wrap="square"/>
           <a:lstStyle/>
           <a:p>
             <a:pPr algn="l"/>
             <a:r>
-              <a:rPr sz="1600" b="1">
-                <a:solidFill>
-                  <a:srgbClr val="1F9E8F"/>
+              <a:rPr sz="1800" b="1">
+                <a:solidFill>
+                  <a:srgbClr val="158073"/>
                 </a:solidFill>
                 <a:latin typeface="Apple SD Gothic Neo"/>
               </a:rPr>
@@ -4633,7 +4647,7 @@
           <a:p>
             <a:pPr algn="l"/>
             <a:r>
-              <a:rPr sz="1500" b="0">
+              <a:rPr sz="1700" b="0">
                 <a:solidFill>
                   <a:srgbClr val="1C2B36"/>
                 </a:solidFill>
@@ -4652,17 +4666,19 @@
         </p:nvSpPr>
         <p:spPr>
           <a:xfrm>
-            <a:off x="6245352" y="5120640"/>
-            <a:ext cx="5394960" cy="1188720"/>
+            <a:off x="6245352" y="5074920"/>
+            <a:ext cx="5394960" cy="1234440"/>
           </a:xfrm>
           <a:prstGeom prst="roundRect">
             <a:avLst/>
           </a:prstGeom>
           <a:solidFill>
-            <a:srgbClr val="FFF3D6"/>
-          </a:solidFill>
-          <a:ln>
-            <a:noFill/>
+            <a:srgbClr val="FDECC4"/>
+          </a:solidFill>
+          <a:ln w="19050">
+            <a:solidFill>
+              <a:srgbClr val="F2A900"/>
+            </a:solidFill>
           </a:ln>
           <a:effectLst/>
         </p:spPr>
@@ -4681,14 +4697,14 @@
           </a:fontRef>
         </p:style>
         <p:txBody>
-          <a:bodyPr rtlCol="0" anchor="ctr" tIns="50800" bIns="50800" lIns="101600" rIns="101600" wrap="square"/>
+          <a:bodyPr rtlCol="0" anchor="ctr" tIns="63500" bIns="63500" lIns="127000" rIns="127000" wrap="square"/>
           <a:lstStyle/>
           <a:p>
             <a:pPr algn="l"/>
             <a:r>
-              <a:rPr sz="1600" b="1">
-                <a:solidFill>
-                  <a:srgbClr val="C8860A"/>
+              <a:rPr sz="1800" b="1">
+                <a:solidFill>
+                  <a:srgbClr val="B57900"/>
                 </a:solidFill>
                 <a:latin typeface="Apple SD Gothic Neo"/>
               </a:rPr>
@@ -4698,7 +4714,7 @@
           <a:p>
             <a:pPr algn="l"/>
             <a:r>
-              <a:rPr sz="1500" b="0">
+              <a:rPr sz="1700" b="0">
                 <a:solidFill>
                   <a:srgbClr val="1C2B36"/>
                 </a:solidFill>
@@ -4735,8 +4751,8 @@
         </p:nvSpPr>
         <p:spPr>
           <a:xfrm>
-            <a:off x="548640" y="411480"/>
-            <a:ext cx="10972800" cy="822960"/>
+            <a:off x="548640" y="365760"/>
+            <a:ext cx="11064240" cy="914400"/>
           </a:xfrm>
           <a:prstGeom prst="rect">
             <a:avLst/>
@@ -4751,7 +4767,7 @@
           <a:p>
             <a:pPr algn="l"/>
             <a:r>
-              <a:rPr sz="3000" b="1">
+              <a:rPr sz="3600" b="1">
                 <a:solidFill>
                   <a:srgbClr val="0B3D5C"/>
                 </a:solidFill>
@@ -4770,8 +4786,8 @@
         </p:nvSpPr>
         <p:spPr>
           <a:xfrm>
-            <a:off x="566928" y="1207008"/>
-            <a:ext cx="2377440" cy="54864"/>
+            <a:off x="566928" y="1298448"/>
+            <a:ext cx="2651760" cy="64008"/>
           </a:xfrm>
           <a:prstGeom prst="rect">
             <a:avLst/>
@@ -4815,17 +4831,17 @@
         <p:spPr>
           <a:xfrm>
             <a:off x="914400" y="2011680"/>
-            <a:ext cx="10332720" cy="1828800"/>
+            <a:ext cx="10332720" cy="1920240"/>
           </a:xfrm>
           <a:prstGeom prst="roundRect">
             <a:avLst/>
           </a:prstGeom>
           <a:solidFill>
-            <a:srgbClr val="EEF3F7"/>
-          </a:solidFill>
-          <a:ln w="12700">
+            <a:srgbClr val="F3F6F9"/>
+          </a:solidFill>
+          <a:ln w="19050">
             <a:solidFill>
-              <a:srgbClr val="D7E1EA"/>
+              <a:srgbClr val="C3D2DF"/>
             </a:solidFill>
           </a:ln>
           <a:effectLst/>
@@ -4845,12 +4861,12 @@
           </a:fontRef>
         </p:style>
         <p:txBody>
-          <a:bodyPr rtlCol="0" anchor="ctr" tIns="50800" bIns="50800" lIns="101600" rIns="101600" wrap="square"/>
+          <a:bodyPr rtlCol="0" anchor="ctr" tIns="63500" bIns="63500" lIns="127000" rIns="127000" wrap="square"/>
           <a:lstStyle/>
           <a:p>
             <a:pPr algn="l"/>
             <a:r>
-              <a:rPr sz="1600" b="0">
+              <a:rPr sz="1800" b="0">
                 <a:solidFill>
                   <a:srgbClr val="0F2A43"/>
                 </a:solidFill>
@@ -4862,7 +4878,7 @@
           <a:p>
             <a:pPr algn="l"/>
             <a:r>
-              <a:rPr sz="1600" b="0">
+              <a:rPr sz="1800" b="0">
                 <a:solidFill>
                   <a:srgbClr val="0F2A43"/>
                 </a:solidFill>
@@ -4874,7 +4890,7 @@
           <a:p>
             <a:pPr algn="l"/>
             <a:r>
-              <a:rPr sz="1600" b="0">
+              <a:rPr sz="1800" b="0">
                 <a:solidFill>
                   <a:srgbClr val="0F2A43"/>
                 </a:solidFill>
@@ -4886,7 +4902,7 @@
           <a:p>
             <a:pPr algn="l"/>
             <a:r>
-              <a:rPr sz="1600" b="0">
+              <a:rPr sz="1800" b="0">
                 <a:solidFill>
                   <a:srgbClr val="0F2A43"/>
                 </a:solidFill>
@@ -4905,8 +4921,8 @@
         </p:nvSpPr>
         <p:spPr>
           <a:xfrm>
-            <a:off x="548640" y="4206240"/>
-            <a:ext cx="11091672" cy="822960"/>
+            <a:off x="548640" y="4389120"/>
+            <a:ext cx="11091672" cy="914400"/>
           </a:xfrm>
           <a:prstGeom prst="rect">
             <a:avLst/>
@@ -4921,7 +4937,7 @@
           <a:p>
             <a:pPr algn="ctr"/>
             <a:r>
-              <a:rPr sz="2100" b="1">
+              <a:rPr sz="2400" b="1">
                 <a:solidFill>
                   <a:srgbClr val="0B3D5C"/>
                 </a:solidFill>
@@ -4958,8 +4974,8 @@
         </p:nvSpPr>
         <p:spPr>
           <a:xfrm>
-            <a:off x="548640" y="411480"/>
-            <a:ext cx="10972800" cy="822960"/>
+            <a:off x="548640" y="365760"/>
+            <a:ext cx="11064240" cy="914400"/>
           </a:xfrm>
           <a:prstGeom prst="rect">
             <a:avLst/>
@@ -4974,7 +4990,7 @@
           <a:p>
             <a:pPr algn="l"/>
             <a:r>
-              <a:rPr sz="3000" b="1">
+              <a:rPr sz="3600" b="1">
                 <a:solidFill>
                   <a:srgbClr val="0B3D5C"/>
                 </a:solidFill>
@@ -4993,8 +5009,8 @@
         </p:nvSpPr>
         <p:spPr>
           <a:xfrm>
-            <a:off x="566928" y="1207008"/>
-            <a:ext cx="2377440" cy="54864"/>
+            <a:off x="566928" y="1298448"/>
+            <a:ext cx="2651760" cy="64008"/>
           </a:xfrm>
           <a:prstGeom prst="rect">
             <a:avLst/>
@@ -5037,14 +5053,14 @@
         </p:nvSpPr>
         <p:spPr>
           <a:xfrm>
-            <a:off x="548640" y="1325880"/>
-            <a:ext cx="5394960" cy="457200"/>
+            <a:off x="548640" y="1371600"/>
+            <a:ext cx="5394960" cy="502920"/>
           </a:xfrm>
           <a:prstGeom prst="roundRect">
             <a:avLst/>
           </a:prstGeom>
           <a:solidFill>
-            <a:srgbClr val="EEF3F7"/>
+            <a:srgbClr val="0B3D5C"/>
           </a:solidFill>
           <a:ln>
             <a:noFill/>
@@ -5066,14 +5082,14 @@
           </a:fontRef>
         </p:style>
         <p:txBody>
-          <a:bodyPr rtlCol="0" anchor="ctr" tIns="50800" bIns="50800" lIns="101600" rIns="101600" wrap="square"/>
-          <a:lstStyle/>
-          <a:p>
-            <a:pPr algn="ctr"/>
-            <a:r>
-              <a:rPr sz="1700" b="1">
-                <a:solidFill>
-                  <a:srgbClr val="0B3D5C"/>
+          <a:bodyPr rtlCol="0" anchor="ctr" tIns="63500" bIns="63500" lIns="127000" rIns="127000" wrap="square"/>
+          <a:lstStyle/>
+          <a:p>
+            <a:pPr algn="ctr"/>
+            <a:r>
+              <a:rPr sz="2000" b="1">
+                <a:solidFill>
+                  <a:srgbClr val="FFFFFF"/>
                 </a:solidFill>
                 <a:latin typeface="Apple SD Gothic Neo"/>
               </a:rPr>
@@ -5090,8 +5106,8 @@
         </p:nvSpPr>
         <p:spPr>
           <a:xfrm>
-            <a:off x="6245352" y="1325880"/>
-            <a:ext cx="5394960" cy="457200"/>
+            <a:off x="6245352" y="1371600"/>
+            <a:ext cx="5394960" cy="502920"/>
           </a:xfrm>
           <a:prstGeom prst="roundRect">
             <a:avLst/>
@@ -5119,12 +5135,12 @@
           </a:fontRef>
         </p:style>
         <p:txBody>
-          <a:bodyPr rtlCol="0" anchor="ctr" tIns="50800" bIns="50800" lIns="101600" rIns="101600" wrap="square"/>
-          <a:lstStyle/>
-          <a:p>
-            <a:pPr algn="ctr"/>
-            <a:r>
-              <a:rPr sz="1700" b="1">
+          <a:bodyPr rtlCol="0" anchor="ctr" tIns="63500" bIns="63500" lIns="127000" rIns="127000" wrap="square"/>
+          <a:lstStyle/>
+          <a:p>
+            <a:pPr algn="ctr"/>
+            <a:r>
+              <a:rPr sz="2000" b="1">
                 <a:solidFill>
                   <a:srgbClr val="0F2A43"/>
                 </a:solidFill>
@@ -5151,8 +5167,8 @@
         </p:blipFill>
         <p:spPr>
           <a:xfrm>
-            <a:off x="1737360" y="1874519"/>
-            <a:ext cx="3017520" cy="3017520"/>
+            <a:off x="1783080" y="1965960"/>
+            <a:ext cx="2926080" cy="2926080"/>
           </a:xfrm>
           <a:prstGeom prst="rect">
             <a:avLst/>
@@ -5175,8 +5191,8 @@
         </p:blipFill>
         <p:spPr>
           <a:xfrm>
-            <a:off x="7517163" y="1874519"/>
-            <a:ext cx="2851337" cy="3017520"/>
+            <a:off x="7560365" y="1965960"/>
+            <a:ext cx="2764933" cy="2926080"/>
           </a:xfrm>
           <a:prstGeom prst="rect">
             <a:avLst/>
@@ -5191,17 +5207,19 @@
         </p:nvSpPr>
         <p:spPr>
           <a:xfrm>
-            <a:off x="548640" y="5120640"/>
-            <a:ext cx="5394960" cy="1188720"/>
+            <a:off x="548640" y="5074920"/>
+            <a:ext cx="5394960" cy="1234440"/>
           </a:xfrm>
           <a:prstGeom prst="roundRect">
             <a:avLst/>
           </a:prstGeom>
           <a:solidFill>
-            <a:srgbClr val="EEF6F4"/>
-          </a:solidFill>
-          <a:ln>
-            <a:noFill/>
+            <a:srgbClr val="DCF1EC"/>
+          </a:solidFill>
+          <a:ln w="19050">
+            <a:solidFill>
+              <a:srgbClr val="158073"/>
+            </a:solidFill>
           </a:ln>
           <a:effectLst/>
         </p:spPr>
@@ -5220,14 +5238,14 @@
           </a:fontRef>
         </p:style>
         <p:txBody>
-          <a:bodyPr rtlCol="0" anchor="ctr" tIns="50800" bIns="50800" lIns="101600" rIns="101600" wrap="square"/>
+          <a:bodyPr rtlCol="0" anchor="ctr" tIns="63500" bIns="63500" lIns="127000" rIns="127000" wrap="square"/>
           <a:lstStyle/>
           <a:p>
             <a:pPr algn="l"/>
             <a:r>
-              <a:rPr sz="1600" b="1">
-                <a:solidFill>
-                  <a:srgbClr val="1F9E8F"/>
+              <a:rPr sz="1800" b="1">
+                <a:solidFill>
+                  <a:srgbClr val="158073"/>
                 </a:solidFill>
                 <a:latin typeface="Apple SD Gothic Neo"/>
               </a:rPr>
@@ -5237,7 +5255,7 @@
           <a:p>
             <a:pPr algn="l"/>
             <a:r>
-              <a:rPr sz="1500" b="0">
+              <a:rPr sz="1700" b="0">
                 <a:solidFill>
                   <a:srgbClr val="1C2B36"/>
                 </a:solidFill>
@@ -5256,17 +5274,19 @@
         </p:nvSpPr>
         <p:spPr>
           <a:xfrm>
-            <a:off x="6245352" y="5120640"/>
-            <a:ext cx="5394960" cy="1188720"/>
+            <a:off x="6245352" y="5074920"/>
+            <a:ext cx="5394960" cy="1234440"/>
           </a:xfrm>
           <a:prstGeom prst="roundRect">
             <a:avLst/>
           </a:prstGeom>
           <a:solidFill>
-            <a:srgbClr val="FFF3D6"/>
-          </a:solidFill>
-          <a:ln>
-            <a:noFill/>
+            <a:srgbClr val="FDECC4"/>
+          </a:solidFill>
+          <a:ln w="19050">
+            <a:solidFill>
+              <a:srgbClr val="F2A900"/>
+            </a:solidFill>
           </a:ln>
           <a:effectLst/>
         </p:spPr>
@@ -5285,14 +5305,14 @@
           </a:fontRef>
         </p:style>
         <p:txBody>
-          <a:bodyPr rtlCol="0" anchor="ctr" tIns="50800" bIns="50800" lIns="101600" rIns="101600" wrap="square"/>
+          <a:bodyPr rtlCol="0" anchor="ctr" tIns="63500" bIns="63500" lIns="127000" rIns="127000" wrap="square"/>
           <a:lstStyle/>
           <a:p>
             <a:pPr algn="l"/>
             <a:r>
-              <a:rPr sz="1600" b="1">
-                <a:solidFill>
-                  <a:srgbClr val="C8860A"/>
+              <a:rPr sz="1800" b="1">
+                <a:solidFill>
+                  <a:srgbClr val="B57900"/>
                 </a:solidFill>
                 <a:latin typeface="Apple SD Gothic Neo"/>
               </a:rPr>
@@ -5302,7 +5322,7 @@
           <a:p>
             <a:pPr algn="l"/>
             <a:r>
-              <a:rPr sz="1500" b="0">
+              <a:rPr sz="1700" b="0">
                 <a:solidFill>
                   <a:srgbClr val="1C2B36"/>
                 </a:solidFill>
@@ -5339,8 +5359,8 @@
         </p:nvSpPr>
         <p:spPr>
           <a:xfrm>
-            <a:off x="548640" y="411480"/>
-            <a:ext cx="10972800" cy="822960"/>
+            <a:off x="548640" y="365760"/>
+            <a:ext cx="11064240" cy="914400"/>
           </a:xfrm>
           <a:prstGeom prst="rect">
             <a:avLst/>
@@ -5355,7 +5375,7 @@
           <a:p>
             <a:pPr algn="l"/>
             <a:r>
-              <a:rPr sz="3000" b="1">
+              <a:rPr sz="3600" b="1">
                 <a:solidFill>
                   <a:srgbClr val="0B3D5C"/>
                 </a:solidFill>
@@ -5374,8 +5394,8 @@
         </p:nvSpPr>
         <p:spPr>
           <a:xfrm>
-            <a:off x="566928" y="1207008"/>
-            <a:ext cx="2377440" cy="54864"/>
+            <a:off x="566928" y="1298448"/>
+            <a:ext cx="2651760" cy="64008"/>
           </a:xfrm>
           <a:prstGeom prst="rect">
             <a:avLst/>
@@ -5418,14 +5438,14 @@
         </p:nvSpPr>
         <p:spPr>
           <a:xfrm>
-            <a:off x="548640" y="1325880"/>
-            <a:ext cx="5394960" cy="457200"/>
+            <a:off x="548640" y="1371600"/>
+            <a:ext cx="5394960" cy="502920"/>
           </a:xfrm>
           <a:prstGeom prst="roundRect">
             <a:avLst/>
           </a:prstGeom>
           <a:solidFill>
-            <a:srgbClr val="EEF3F7"/>
+            <a:srgbClr val="0B3D5C"/>
           </a:solidFill>
           <a:ln>
             <a:noFill/>
@@ -5447,14 +5467,14 @@
           </a:fontRef>
         </p:style>
         <p:txBody>
-          <a:bodyPr rtlCol="0" anchor="ctr" tIns="50800" bIns="50800" lIns="101600" rIns="101600" wrap="square"/>
-          <a:lstStyle/>
-          <a:p>
-            <a:pPr algn="ctr"/>
-            <a:r>
-              <a:rPr sz="1700" b="1">
-                <a:solidFill>
-                  <a:srgbClr val="0B3D5C"/>
+          <a:bodyPr rtlCol="0" anchor="ctr" tIns="63500" bIns="63500" lIns="127000" rIns="127000" wrap="square"/>
+          <a:lstStyle/>
+          <a:p>
+            <a:pPr algn="ctr"/>
+            <a:r>
+              <a:rPr sz="2000" b="1">
+                <a:solidFill>
+                  <a:srgbClr val="FFFFFF"/>
                 </a:solidFill>
                 <a:latin typeface="Apple SD Gothic Neo"/>
               </a:rPr>
@@ -5471,8 +5491,8 @@
         </p:nvSpPr>
         <p:spPr>
           <a:xfrm>
-            <a:off x="6245352" y="1325880"/>
-            <a:ext cx="5394960" cy="457200"/>
+            <a:off x="6245352" y="1371600"/>
+            <a:ext cx="5394960" cy="502920"/>
           </a:xfrm>
           <a:prstGeom prst="roundRect">
             <a:avLst/>
@@ -5500,12 +5520,12 @@
           </a:fontRef>
         </p:style>
         <p:txBody>
-          <a:bodyPr rtlCol="0" anchor="ctr" tIns="50800" bIns="50800" lIns="101600" rIns="101600" wrap="square"/>
-          <a:lstStyle/>
-          <a:p>
-            <a:pPr algn="ctr"/>
-            <a:r>
-              <a:rPr sz="1700" b="1">
+          <a:bodyPr rtlCol="0" anchor="ctr" tIns="63500" bIns="63500" lIns="127000" rIns="127000" wrap="square"/>
+          <a:lstStyle/>
+          <a:p>
+            <a:pPr algn="ctr"/>
+            <a:r>
+              <a:rPr sz="2000" b="1">
                 <a:solidFill>
                   <a:srgbClr val="0F2A43"/>
                 </a:solidFill>
@@ -5532,8 +5552,8 @@
         </p:blipFill>
         <p:spPr>
           <a:xfrm>
-            <a:off x="2422893" y="1874519"/>
-            <a:ext cx="1646452" cy="3017520"/>
+            <a:off x="2447839" y="1965960"/>
+            <a:ext cx="1596560" cy="2926080"/>
           </a:xfrm>
           <a:prstGeom prst="rect">
             <a:avLst/>
@@ -5556,8 +5576,8 @@
         </p:blipFill>
         <p:spPr>
           <a:xfrm>
-            <a:off x="7113179" y="1874519"/>
-            <a:ext cx="3659305" cy="3017520"/>
+            <a:off x="7168623" y="1965960"/>
+            <a:ext cx="3548417" cy="2926080"/>
           </a:xfrm>
           <a:prstGeom prst="rect">
             <a:avLst/>
@@ -5572,17 +5592,19 @@
         </p:nvSpPr>
         <p:spPr>
           <a:xfrm>
-            <a:off x="548640" y="5120640"/>
-            <a:ext cx="5394960" cy="1188720"/>
+            <a:off x="548640" y="5074920"/>
+            <a:ext cx="5394960" cy="1234440"/>
           </a:xfrm>
           <a:prstGeom prst="roundRect">
             <a:avLst/>
           </a:prstGeom>
           <a:solidFill>
-            <a:srgbClr val="EEF6F4"/>
-          </a:solidFill>
-          <a:ln>
-            <a:noFill/>
+            <a:srgbClr val="DCF1EC"/>
+          </a:solidFill>
+          <a:ln w="19050">
+            <a:solidFill>
+              <a:srgbClr val="158073"/>
+            </a:solidFill>
           </a:ln>
           <a:effectLst/>
         </p:spPr>
@@ -5601,14 +5623,14 @@
           </a:fontRef>
         </p:style>
         <p:txBody>
-          <a:bodyPr rtlCol="0" anchor="ctr" tIns="50800" bIns="50800" lIns="101600" rIns="101600" wrap="square"/>
+          <a:bodyPr rtlCol="0" anchor="ctr" tIns="63500" bIns="63500" lIns="127000" rIns="127000" wrap="square"/>
           <a:lstStyle/>
           <a:p>
             <a:pPr algn="l"/>
             <a:r>
-              <a:rPr sz="1600" b="1">
-                <a:solidFill>
-                  <a:srgbClr val="1F9E8F"/>
+              <a:rPr sz="1800" b="1">
+                <a:solidFill>
+                  <a:srgbClr val="158073"/>
                 </a:solidFill>
                 <a:latin typeface="Apple SD Gothic Neo"/>
               </a:rPr>
@@ -5618,7 +5640,7 @@
           <a:p>
             <a:pPr algn="l"/>
             <a:r>
-              <a:rPr sz="1500" b="0">
+              <a:rPr sz="1700" b="0">
                 <a:solidFill>
                   <a:srgbClr val="1C2B36"/>
                 </a:solidFill>
@@ -5637,17 +5659,19 @@
         </p:nvSpPr>
         <p:spPr>
           <a:xfrm>
-            <a:off x="6245352" y="5120640"/>
-            <a:ext cx="5394960" cy="1188720"/>
+            <a:off x="6245352" y="5074920"/>
+            <a:ext cx="5394960" cy="1234440"/>
           </a:xfrm>
           <a:prstGeom prst="roundRect">
             <a:avLst/>
           </a:prstGeom>
           <a:solidFill>
-            <a:srgbClr val="FFF3D6"/>
-          </a:solidFill>
-          <a:ln>
-            <a:noFill/>
+            <a:srgbClr val="FDECC4"/>
+          </a:solidFill>
+          <a:ln w="19050">
+            <a:solidFill>
+              <a:srgbClr val="F2A900"/>
+            </a:solidFill>
           </a:ln>
           <a:effectLst/>
         </p:spPr>
@@ -5666,14 +5690,14 @@
           </a:fontRef>
         </p:style>
         <p:txBody>
-          <a:bodyPr rtlCol="0" anchor="ctr" tIns="50800" bIns="50800" lIns="101600" rIns="101600" wrap="square"/>
+          <a:bodyPr rtlCol="0" anchor="ctr" tIns="63500" bIns="63500" lIns="127000" rIns="127000" wrap="square"/>
           <a:lstStyle/>
           <a:p>
             <a:pPr algn="l"/>
             <a:r>
-              <a:rPr sz="1600" b="1">
-                <a:solidFill>
-                  <a:srgbClr val="C8860A"/>
+              <a:rPr sz="1800" b="1">
+                <a:solidFill>
+                  <a:srgbClr val="B57900"/>
                 </a:solidFill>
                 <a:latin typeface="Apple SD Gothic Neo"/>
               </a:rPr>
@@ -5683,7 +5707,7 @@
           <a:p>
             <a:pPr algn="l"/>
             <a:r>
-              <a:rPr sz="1500" b="0">
+              <a:rPr sz="1700" b="0">
                 <a:solidFill>
                   <a:srgbClr val="1C2B36"/>
                 </a:solidFill>
@@ -5720,8 +5744,8 @@
         </p:nvSpPr>
         <p:spPr>
           <a:xfrm>
-            <a:off x="548640" y="411480"/>
-            <a:ext cx="10972800" cy="822960"/>
+            <a:off x="548640" y="365760"/>
+            <a:ext cx="11064240" cy="914400"/>
           </a:xfrm>
           <a:prstGeom prst="rect">
             <a:avLst/>
@@ -5736,7 +5760,7 @@
           <a:p>
             <a:pPr algn="l"/>
             <a:r>
-              <a:rPr sz="3000" b="1">
+              <a:rPr sz="3600" b="1">
                 <a:solidFill>
                   <a:srgbClr val="0B3D5C"/>
                 </a:solidFill>
@@ -5755,8 +5779,8 @@
         </p:nvSpPr>
         <p:spPr>
           <a:xfrm>
-            <a:off x="566928" y="1207008"/>
-            <a:ext cx="2377440" cy="54864"/>
+            <a:off x="566928" y="1298448"/>
+            <a:ext cx="2651760" cy="64008"/>
           </a:xfrm>
           <a:prstGeom prst="rect">
             <a:avLst/>
@@ -5807,7 +5831,7 @@
         </p:blipFill>
         <p:spPr>
           <a:xfrm>
-            <a:off x="4044753" y="1463040"/>
+            <a:off x="4044753" y="1417320"/>
             <a:ext cx="4072012" cy="3931920"/>
           </a:xfrm>
           <a:prstGeom prst="rect">
@@ -5823,8 +5847,8 @@
         </p:nvSpPr>
         <p:spPr>
           <a:xfrm>
-            <a:off x="548640" y="5577840"/>
-            <a:ext cx="11091672" cy="822960"/>
+            <a:off x="548640" y="5486400"/>
+            <a:ext cx="11091672" cy="914400"/>
           </a:xfrm>
           <a:prstGeom prst="rect">
             <a:avLst/>
@@ -5839,7 +5863,7 @@
           <a:p>
             <a:pPr algn="ctr"/>
             <a:r>
-              <a:rPr sz="2100" b="1">
+              <a:rPr sz="2400" b="1">
                 <a:solidFill>
                   <a:srgbClr val="0B3D5C"/>
                 </a:solidFill>
@@ -5876,8 +5900,8 @@
         </p:nvSpPr>
         <p:spPr>
           <a:xfrm>
-            <a:off x="548640" y="411480"/>
-            <a:ext cx="10972800" cy="822960"/>
+            <a:off x="548640" y="365760"/>
+            <a:ext cx="11064240" cy="914400"/>
           </a:xfrm>
           <a:prstGeom prst="rect">
             <a:avLst/>
@@ -5892,7 +5916,7 @@
           <a:p>
             <a:pPr algn="l"/>
             <a:r>
-              <a:rPr sz="3000" b="1">
+              <a:rPr sz="3600" b="1">
                 <a:solidFill>
                   <a:srgbClr val="0B3D5C"/>
                 </a:solidFill>
@@ -5911,8 +5935,8 @@
         </p:nvSpPr>
         <p:spPr>
           <a:xfrm>
-            <a:off x="566928" y="1207008"/>
-            <a:ext cx="2377440" cy="54864"/>
+            <a:off x="566928" y="1298448"/>
+            <a:ext cx="2651760" cy="64008"/>
           </a:xfrm>
           <a:prstGeom prst="rect">
             <a:avLst/>
@@ -5955,17 +5979,19 @@
         </p:nvSpPr>
         <p:spPr>
           <a:xfrm>
-            <a:off x="731520" y="1554480"/>
-            <a:ext cx="5212080" cy="1371600"/>
+            <a:off x="731520" y="1508760"/>
+            <a:ext cx="5212080" cy="1417320"/>
           </a:xfrm>
           <a:prstGeom prst="roundRect">
             <a:avLst/>
           </a:prstGeom>
           <a:solidFill>
-            <a:srgbClr val="EEF6F4"/>
-          </a:solidFill>
-          <a:ln>
-            <a:noFill/>
+            <a:srgbClr val="DCF1EC"/>
+          </a:solidFill>
+          <a:ln w="19050">
+            <a:solidFill>
+              <a:srgbClr val="158073"/>
+            </a:solidFill>
           </a:ln>
           <a:effectLst/>
         </p:spPr>
@@ -5984,12 +6010,12 @@
           </a:fontRef>
         </p:style>
         <p:txBody>
-          <a:bodyPr rtlCol="0" anchor="ctr" tIns="50800" bIns="50800" lIns="101600" rIns="101600" wrap="square"/>
+          <a:bodyPr rtlCol="0" anchor="ctr" tIns="63500" bIns="63500" lIns="127000" rIns="127000" wrap="square"/>
           <a:lstStyle/>
           <a:p>
             <a:pPr algn="l"/>
             <a:r>
-              <a:rPr sz="2100" b="1">
+              <a:rPr sz="2400" b="1">
                 <a:solidFill>
                   <a:srgbClr val="0B3D5C"/>
                 </a:solidFill>
@@ -6001,7 +6027,7 @@
           <a:p>
             <a:pPr algn="l"/>
             <a:r>
-              <a:rPr sz="1800" b="0">
+              <a:rPr sz="2000" b="0">
                 <a:solidFill>
                   <a:srgbClr val="1C2B36"/>
                 </a:solidFill>
@@ -6020,17 +6046,19 @@
         </p:nvSpPr>
         <p:spPr>
           <a:xfrm>
-            <a:off x="6245352" y="1554480"/>
-            <a:ext cx="5212080" cy="1371600"/>
+            <a:off x="6245352" y="1508760"/>
+            <a:ext cx="5212080" cy="1417320"/>
           </a:xfrm>
           <a:prstGeom prst="roundRect">
             <a:avLst/>
           </a:prstGeom>
           <a:solidFill>
-            <a:srgbClr val="EEF3F7"/>
-          </a:solidFill>
-          <a:ln>
-            <a:noFill/>
+            <a:srgbClr val="DEECF6"/>
+          </a:solidFill>
+          <a:ln w="19050">
+            <a:solidFill>
+              <a:srgbClr val="2C6F9C"/>
+            </a:solidFill>
           </a:ln>
           <a:effectLst/>
         </p:spPr>
@@ -6049,12 +6077,12 @@
           </a:fontRef>
         </p:style>
         <p:txBody>
-          <a:bodyPr rtlCol="0" anchor="ctr" tIns="50800" bIns="50800" lIns="101600" rIns="101600" wrap="square"/>
+          <a:bodyPr rtlCol="0" anchor="ctr" tIns="63500" bIns="63500" lIns="127000" rIns="127000" wrap="square"/>
           <a:lstStyle/>
           <a:p>
             <a:pPr algn="l"/>
             <a:r>
-              <a:rPr sz="2100" b="1">
+              <a:rPr sz="2400" b="1">
                 <a:solidFill>
                   <a:srgbClr val="0B3D5C"/>
                 </a:solidFill>
@@ -6066,7 +6094,7 @@
           <a:p>
             <a:pPr algn="l"/>
             <a:r>
-              <a:rPr sz="1800" b="0">
+              <a:rPr sz="2000" b="0">
                 <a:solidFill>
                   <a:srgbClr val="1C2B36"/>
                 </a:solidFill>
@@ -6085,8 +6113,8 @@
         </p:nvSpPr>
         <p:spPr>
           <a:xfrm>
-            <a:off x="700887" y="3383280"/>
-            <a:ext cx="1828800" cy="914400"/>
+            <a:off x="380847" y="3383280"/>
+            <a:ext cx="1920240" cy="1005840"/>
           </a:xfrm>
           <a:prstGeom prst="roundRect">
             <a:avLst/>
@@ -6094,9 +6122,9 @@
           <a:solidFill>
             <a:srgbClr val="EEF3F7"/>
           </a:solidFill>
-          <a:ln w="15240">
+          <a:ln w="16510">
             <a:solidFill>
-              <a:srgbClr val="D7E1EA"/>
+              <a:srgbClr val="C3D2DF"/>
             </a:solidFill>
           </a:ln>
           <a:effectLst/>
@@ -6116,12 +6144,12 @@
           </a:fontRef>
         </p:style>
         <p:txBody>
-          <a:bodyPr rtlCol="0" anchor="ctr" tIns="50800" bIns="50800" lIns="101600" rIns="101600" wrap="square"/>
-          <a:lstStyle/>
-          <a:p>
-            <a:pPr algn="ctr"/>
-            <a:r>
-              <a:rPr sz="1800" b="1">
+          <a:bodyPr rtlCol="0" anchor="ctr" tIns="63500" bIns="63500" lIns="127000" rIns="127000" wrap="square"/>
+          <a:lstStyle/>
+          <a:p>
+            <a:pPr algn="ctr"/>
+            <a:r>
+              <a:rPr sz="2200" b="1">
                 <a:solidFill>
                   <a:srgbClr val="0B3D5C"/>
                 </a:solidFill>
@@ -6140,8 +6168,8 @@
         </p:nvSpPr>
         <p:spPr>
           <a:xfrm>
-            <a:off x="700887" y="3383280"/>
-            <a:ext cx="1828800" cy="91440"/>
+            <a:off x="380847" y="3383280"/>
+            <a:ext cx="1920240" cy="109728"/>
           </a:xfrm>
           <a:prstGeom prst="rect">
             <a:avLst/>
@@ -6184,8 +6212,8 @@
         </p:nvSpPr>
         <p:spPr>
           <a:xfrm>
-            <a:off x="2547975" y="3520440"/>
-            <a:ext cx="457200" cy="548640"/>
+            <a:off x="2319375" y="3566160"/>
+            <a:ext cx="640080" cy="640080"/>
           </a:xfrm>
           <a:prstGeom prst="rect">
             <a:avLst/>
@@ -6200,7 +6228,7 @@
           <a:p>
             <a:pPr algn="ctr"/>
             <a:r>
-              <a:rPr sz="3000" b="1">
+              <a:rPr sz="2800" b="1">
                 <a:solidFill>
                   <a:srgbClr val="F2A900"/>
                 </a:solidFill>
@@ -6219,8 +6247,8 @@
         </p:nvSpPr>
         <p:spPr>
           <a:xfrm>
-            <a:off x="2941167" y="3383280"/>
-            <a:ext cx="1828800" cy="914400"/>
+            <a:off x="2758287" y="3383280"/>
+            <a:ext cx="1920240" cy="1005840"/>
           </a:xfrm>
           <a:prstGeom prst="roundRect">
             <a:avLst/>
@@ -6228,9 +6256,9 @@
           <a:solidFill>
             <a:srgbClr val="EEF3F7"/>
           </a:solidFill>
-          <a:ln w="15240">
+          <a:ln w="16510">
             <a:solidFill>
-              <a:srgbClr val="D7E1EA"/>
+              <a:srgbClr val="C3D2DF"/>
             </a:solidFill>
           </a:ln>
           <a:effectLst/>
@@ -6250,12 +6278,12 @@
           </a:fontRef>
         </p:style>
         <p:txBody>
-          <a:bodyPr rtlCol="0" anchor="ctr" tIns="50800" bIns="50800" lIns="101600" rIns="101600" wrap="square"/>
-          <a:lstStyle/>
-          <a:p>
-            <a:pPr algn="ctr"/>
-            <a:r>
-              <a:rPr sz="1800" b="1">
+          <a:bodyPr rtlCol="0" anchor="ctr" tIns="63500" bIns="63500" lIns="127000" rIns="127000" wrap="square"/>
+          <a:lstStyle/>
+          <a:p>
+            <a:pPr algn="ctr"/>
+            <a:r>
+              <a:rPr sz="2200" b="1">
                 <a:solidFill>
                   <a:srgbClr val="0B3D5C"/>
                 </a:solidFill>
@@ -6274,8 +6302,8 @@
         </p:nvSpPr>
         <p:spPr>
           <a:xfrm>
-            <a:off x="2941167" y="3383280"/>
-            <a:ext cx="1828800" cy="91440"/>
+            <a:off x="2758287" y="3383280"/>
+            <a:ext cx="1920240" cy="109728"/>
           </a:xfrm>
           <a:prstGeom prst="rect">
             <a:avLst/>
@@ -6318,8 +6346,8 @@
         </p:nvSpPr>
         <p:spPr>
           <a:xfrm>
-            <a:off x="4788255" y="3520440"/>
-            <a:ext cx="457200" cy="548640"/>
+            <a:off x="4696815" y="3566160"/>
+            <a:ext cx="640080" cy="640080"/>
           </a:xfrm>
           <a:prstGeom prst="rect">
             <a:avLst/>
@@ -6334,7 +6362,7 @@
           <a:p>
             <a:pPr algn="ctr"/>
             <a:r>
-              <a:rPr sz="3000" b="1">
+              <a:rPr sz="2800" b="1">
                 <a:solidFill>
                   <a:srgbClr val="F2A900"/>
                 </a:solidFill>
@@ -6353,8 +6381,8 @@
         </p:nvSpPr>
         <p:spPr>
           <a:xfrm>
-            <a:off x="5181447" y="3383280"/>
-            <a:ext cx="1828800" cy="914400"/>
+            <a:off x="5135727" y="3383280"/>
+            <a:ext cx="1920240" cy="1005840"/>
           </a:xfrm>
           <a:prstGeom prst="roundRect">
             <a:avLst/>
@@ -6362,9 +6390,9 @@
           <a:solidFill>
             <a:srgbClr val="EEF3F7"/>
           </a:solidFill>
-          <a:ln w="15240">
+          <a:ln w="16510">
             <a:solidFill>
-              <a:srgbClr val="D7E1EA"/>
+              <a:srgbClr val="C3D2DF"/>
             </a:solidFill>
           </a:ln>
           <a:effectLst/>
@@ -6384,12 +6412,12 @@
           </a:fontRef>
         </p:style>
         <p:txBody>
-          <a:bodyPr rtlCol="0" anchor="ctr" tIns="50800" bIns="50800" lIns="101600" rIns="101600" wrap="square"/>
-          <a:lstStyle/>
-          <a:p>
-            <a:pPr algn="ctr"/>
-            <a:r>
-              <a:rPr sz="1800" b="1">
+          <a:bodyPr rtlCol="0" anchor="ctr" tIns="63500" bIns="63500" lIns="127000" rIns="127000" wrap="square"/>
+          <a:lstStyle/>
+          <a:p>
+            <a:pPr algn="ctr"/>
+            <a:r>
+              <a:rPr sz="2200" b="1">
                 <a:solidFill>
                   <a:srgbClr val="0B3D5C"/>
                 </a:solidFill>
@@ -6408,8 +6436,8 @@
         </p:nvSpPr>
         <p:spPr>
           <a:xfrm>
-            <a:off x="5181447" y="3383280"/>
-            <a:ext cx="1828800" cy="91440"/>
+            <a:off x="5135727" y="3383280"/>
+            <a:ext cx="1920240" cy="109728"/>
           </a:xfrm>
           <a:prstGeom prst="rect">
             <a:avLst/>
@@ -6452,8 +6480,8 @@
         </p:nvSpPr>
         <p:spPr>
           <a:xfrm>
-            <a:off x="7028535" y="3520440"/>
-            <a:ext cx="457200" cy="548640"/>
+            <a:off x="7074255" y="3566160"/>
+            <a:ext cx="640080" cy="640080"/>
           </a:xfrm>
           <a:prstGeom prst="rect">
             <a:avLst/>
@@ -6468,7 +6496,7 @@
           <a:p>
             <a:pPr algn="ctr"/>
             <a:r>
-              <a:rPr sz="3000" b="1">
+              <a:rPr sz="2800" b="1">
                 <a:solidFill>
                   <a:srgbClr val="F2A900"/>
                 </a:solidFill>
@@ -6487,8 +6515,8 @@
         </p:nvSpPr>
         <p:spPr>
           <a:xfrm>
-            <a:off x="7421727" y="3383280"/>
-            <a:ext cx="1828800" cy="914400"/>
+            <a:off x="7513167" y="3383280"/>
+            <a:ext cx="1920240" cy="1005840"/>
           </a:xfrm>
           <a:prstGeom prst="roundRect">
             <a:avLst/>
@@ -6496,9 +6524,9 @@
           <a:solidFill>
             <a:srgbClr val="EEF3F7"/>
           </a:solidFill>
-          <a:ln w="15240">
+          <a:ln w="16510">
             <a:solidFill>
-              <a:srgbClr val="D7E1EA"/>
+              <a:srgbClr val="C3D2DF"/>
             </a:solidFill>
           </a:ln>
           <a:effectLst/>
@@ -6518,12 +6546,12 @@
           </a:fontRef>
         </p:style>
         <p:txBody>
-          <a:bodyPr rtlCol="0" anchor="ctr" tIns="50800" bIns="50800" lIns="101600" rIns="101600" wrap="square"/>
-          <a:lstStyle/>
-          <a:p>
-            <a:pPr algn="ctr"/>
-            <a:r>
-              <a:rPr sz="1800" b="1">
+          <a:bodyPr rtlCol="0" anchor="ctr" tIns="63500" bIns="63500" lIns="127000" rIns="127000" wrap="square"/>
+          <a:lstStyle/>
+          <a:p>
+            <a:pPr algn="ctr"/>
+            <a:r>
+              <a:rPr sz="2200" b="1">
                 <a:solidFill>
                   <a:srgbClr val="0B3D5C"/>
                 </a:solidFill>
@@ -6542,8 +6570,8 @@
         </p:nvSpPr>
         <p:spPr>
           <a:xfrm>
-            <a:off x="7421727" y="3383280"/>
-            <a:ext cx="1828800" cy="91440"/>
+            <a:off x="7513167" y="3383280"/>
+            <a:ext cx="1920240" cy="109728"/>
           </a:xfrm>
           <a:prstGeom prst="rect">
             <a:avLst/>
@@ -6586,8 +6614,8 @@
         </p:nvSpPr>
         <p:spPr>
           <a:xfrm>
-            <a:off x="9268815" y="3520440"/>
-            <a:ext cx="457200" cy="548640"/>
+            <a:off x="9451695" y="3566160"/>
+            <a:ext cx="640080" cy="640080"/>
           </a:xfrm>
           <a:prstGeom prst="rect">
             <a:avLst/>
@@ -6602,7 +6630,7 @@
           <a:p>
             <a:pPr algn="ctr"/>
             <a:r>
-              <a:rPr sz="3000" b="1">
+              <a:rPr sz="2800" b="1">
                 <a:solidFill>
                   <a:srgbClr val="F2A900"/>
                 </a:solidFill>
@@ -6621,8 +6649,8 @@
         </p:nvSpPr>
         <p:spPr>
           <a:xfrm>
-            <a:off x="9662007" y="3383280"/>
-            <a:ext cx="1828800" cy="914400"/>
+            <a:off x="9890607" y="3383280"/>
+            <a:ext cx="1920240" cy="1005840"/>
           </a:xfrm>
           <a:prstGeom prst="roundRect">
             <a:avLst/>
@@ -6630,9 +6658,9 @@
           <a:solidFill>
             <a:srgbClr val="EEF3F7"/>
           </a:solidFill>
-          <a:ln w="15240">
+          <a:ln w="16510">
             <a:solidFill>
-              <a:srgbClr val="D7E1EA"/>
+              <a:srgbClr val="C3D2DF"/>
             </a:solidFill>
           </a:ln>
           <a:effectLst/>
@@ -6652,12 +6680,12 @@
           </a:fontRef>
         </p:style>
         <p:txBody>
-          <a:bodyPr rtlCol="0" anchor="ctr" tIns="50800" bIns="50800" lIns="101600" rIns="101600" wrap="square"/>
-          <a:lstStyle/>
-          <a:p>
-            <a:pPr algn="ctr"/>
-            <a:r>
-              <a:rPr sz="1800" b="1">
+          <a:bodyPr rtlCol="0" anchor="ctr" tIns="63500" bIns="63500" lIns="127000" rIns="127000" wrap="square"/>
+          <a:lstStyle/>
+          <a:p>
+            <a:pPr algn="ctr"/>
+            <a:r>
+              <a:rPr sz="2200" b="1">
                 <a:solidFill>
                   <a:srgbClr val="0B3D5C"/>
                 </a:solidFill>
@@ -6676,8 +6704,8 @@
         </p:nvSpPr>
         <p:spPr>
           <a:xfrm>
-            <a:off x="9662007" y="3383280"/>
-            <a:ext cx="1828800" cy="91440"/>
+            <a:off x="9890607" y="3383280"/>
+            <a:ext cx="1920240" cy="109728"/>
           </a:xfrm>
           <a:prstGeom prst="rect">
             <a:avLst/>
@@ -6721,7 +6749,7 @@
         <p:spPr>
           <a:xfrm>
             <a:off x="548640" y="4846320"/>
-            <a:ext cx="11091672" cy="822960"/>
+            <a:ext cx="11091672" cy="914400"/>
           </a:xfrm>
           <a:prstGeom prst="rect">
             <a:avLst/>
@@ -6736,7 +6764,7 @@
           <a:p>
             <a:pPr algn="ctr"/>
             <a:r>
-              <a:rPr sz="2100" b="1">
+              <a:rPr sz="2400" b="1">
                 <a:solidFill>
                   <a:srgbClr val="0B3D5C"/>
                 </a:solidFill>
@@ -6773,8 +6801,8 @@
         </p:nvSpPr>
         <p:spPr>
           <a:xfrm>
-            <a:off x="548640" y="411480"/>
-            <a:ext cx="10972800" cy="822960"/>
+            <a:off x="548640" y="365760"/>
+            <a:ext cx="11064240" cy="914400"/>
           </a:xfrm>
           <a:prstGeom prst="rect">
             <a:avLst/>
@@ -6789,7 +6817,7 @@
           <a:p>
             <a:pPr algn="l"/>
             <a:r>
-              <a:rPr sz="3000" b="1">
+              <a:rPr sz="3600" b="1">
                 <a:solidFill>
                   <a:srgbClr val="0B3D5C"/>
                 </a:solidFill>
@@ -6808,8 +6836,8 @@
         </p:nvSpPr>
         <p:spPr>
           <a:xfrm>
-            <a:off x="566928" y="1207008"/>
-            <a:ext cx="2377440" cy="54864"/>
+            <a:off x="566928" y="1298448"/>
+            <a:ext cx="2651760" cy="64008"/>
           </a:xfrm>
           <a:prstGeom prst="rect">
             <a:avLst/>
@@ -6852,18 +6880,18 @@
         </p:nvSpPr>
         <p:spPr>
           <a:xfrm>
-            <a:off x="731520" y="1554480"/>
-            <a:ext cx="5212080" cy="1554480"/>
+            <a:off x="731520" y="1508760"/>
+            <a:ext cx="5212080" cy="1600200"/>
           </a:xfrm>
           <a:prstGeom prst="roundRect">
             <a:avLst/>
           </a:prstGeom>
           <a:solidFill>
-            <a:srgbClr val="F5F9FC"/>
-          </a:solidFill>
-          <a:ln w="12700">
+            <a:srgbClr val="FFFFFF"/>
+          </a:solidFill>
+          <a:ln w="16510">
             <a:solidFill>
-              <a:srgbClr val="D7E1EA"/>
+              <a:srgbClr val="C3D2DF"/>
             </a:solidFill>
           </a:ln>
           <a:effectLst/>
@@ -6883,12 +6911,12 @@
           </a:fontRef>
         </p:style>
         <p:txBody>
-          <a:bodyPr rtlCol="0" anchor="ctr" tIns="50800" bIns="50800" lIns="101600" rIns="101600" wrap="square"/>
+          <a:bodyPr rtlCol="0" anchor="ctr" tIns="63500" bIns="63500" lIns="127000" rIns="127000" wrap="square"/>
           <a:lstStyle/>
           <a:p>
             <a:pPr algn="l"/>
             <a:r>
-              <a:rPr sz="2000" b="1">
+              <a:rPr sz="2400" b="1">
                 <a:solidFill>
                   <a:srgbClr val="0B3D5C"/>
                 </a:solidFill>
@@ -6900,9 +6928,9 @@
           <a:p>
             <a:pPr algn="l"/>
             <a:r>
-              <a:rPr sz="1700" b="0">
-                <a:solidFill>
-                  <a:srgbClr val="1F9E8F"/>
+              <a:rPr sz="2000" b="0">
+                <a:solidFill>
+                  <a:srgbClr val="158073"/>
                 </a:solidFill>
                 <a:latin typeface="Apple SD Gothic Neo"/>
               </a:rPr>
@@ -6919,8 +6947,8 @@
         </p:nvSpPr>
         <p:spPr>
           <a:xfrm>
-            <a:off x="731520" y="1554480"/>
-            <a:ext cx="109728" cy="1554480"/>
+            <a:off x="731520" y="1508760"/>
+            <a:ext cx="128016" cy="1600200"/>
           </a:xfrm>
           <a:prstGeom prst="rect">
             <a:avLst/>
@@ -6963,18 +6991,18 @@
         </p:nvSpPr>
         <p:spPr>
           <a:xfrm>
-            <a:off x="6245352" y="1554480"/>
-            <a:ext cx="5212080" cy="1554480"/>
+            <a:off x="6245352" y="1508760"/>
+            <a:ext cx="5212080" cy="1600200"/>
           </a:xfrm>
           <a:prstGeom prst="roundRect">
             <a:avLst/>
           </a:prstGeom>
           <a:solidFill>
-            <a:srgbClr val="F5F9FC"/>
-          </a:solidFill>
-          <a:ln w="12700">
+            <a:srgbClr val="FFFFFF"/>
+          </a:solidFill>
+          <a:ln w="16510">
             <a:solidFill>
-              <a:srgbClr val="D7E1EA"/>
+              <a:srgbClr val="C3D2DF"/>
             </a:solidFill>
           </a:ln>
           <a:effectLst/>
@@ -6994,12 +7022,12 @@
           </a:fontRef>
         </p:style>
         <p:txBody>
-          <a:bodyPr rtlCol="0" anchor="ctr" tIns="50800" bIns="50800" lIns="101600" rIns="101600" wrap="square"/>
+          <a:bodyPr rtlCol="0" anchor="ctr" tIns="63500" bIns="63500" lIns="127000" rIns="127000" wrap="square"/>
           <a:lstStyle/>
           <a:p>
             <a:pPr algn="l"/>
             <a:r>
-              <a:rPr sz="2000" b="1">
+              <a:rPr sz="2400" b="1">
                 <a:solidFill>
                   <a:srgbClr val="0B3D5C"/>
                 </a:solidFill>
@@ -7011,9 +7039,9 @@
           <a:p>
             <a:pPr algn="l"/>
             <a:r>
-              <a:rPr sz="1700" b="0">
-                <a:solidFill>
-                  <a:srgbClr val="1F9E8F"/>
+              <a:rPr sz="2000" b="0">
+                <a:solidFill>
+                  <a:srgbClr val="158073"/>
                 </a:solidFill>
                 <a:latin typeface="Apple SD Gothic Neo"/>
               </a:rPr>
@@ -7030,8 +7058,8 @@
         </p:nvSpPr>
         <p:spPr>
           <a:xfrm>
-            <a:off x="6245352" y="1554480"/>
-            <a:ext cx="109728" cy="1554480"/>
+            <a:off x="6245352" y="1508760"/>
+            <a:ext cx="128016" cy="1600200"/>
           </a:xfrm>
           <a:prstGeom prst="rect">
             <a:avLst/>
@@ -7074,18 +7102,18 @@
         </p:nvSpPr>
         <p:spPr>
           <a:xfrm>
-            <a:off x="731520" y="3337560"/>
-            <a:ext cx="5212080" cy="1554480"/>
+            <a:off x="731520" y="3291840"/>
+            <a:ext cx="5212080" cy="1600200"/>
           </a:xfrm>
           <a:prstGeom prst="roundRect">
             <a:avLst/>
           </a:prstGeom>
           <a:solidFill>
-            <a:srgbClr val="F5F9FC"/>
-          </a:solidFill>
-          <a:ln w="12700">
+            <a:srgbClr val="FFFFFF"/>
+          </a:solidFill>
+          <a:ln w="16510">
             <a:solidFill>
-              <a:srgbClr val="D7E1EA"/>
+              <a:srgbClr val="C3D2DF"/>
             </a:solidFill>
           </a:ln>
           <a:effectLst/>
@@ -7105,12 +7133,12 @@
           </a:fontRef>
         </p:style>
         <p:txBody>
-          <a:bodyPr rtlCol="0" anchor="ctr" tIns="50800" bIns="50800" lIns="101600" rIns="101600" wrap="square"/>
+          <a:bodyPr rtlCol="0" anchor="ctr" tIns="63500" bIns="63500" lIns="127000" rIns="127000" wrap="square"/>
           <a:lstStyle/>
           <a:p>
             <a:pPr algn="l"/>
             <a:r>
-              <a:rPr sz="2000" b="1">
+              <a:rPr sz="2400" b="1">
                 <a:solidFill>
                   <a:srgbClr val="0B3D5C"/>
                 </a:solidFill>
@@ -7122,9 +7150,9 @@
           <a:p>
             <a:pPr algn="l"/>
             <a:r>
-              <a:rPr sz="1700" b="0">
-                <a:solidFill>
-                  <a:srgbClr val="1F9E8F"/>
+              <a:rPr sz="2000" b="0">
+                <a:solidFill>
+                  <a:srgbClr val="158073"/>
                 </a:solidFill>
                 <a:latin typeface="Apple SD Gothic Neo"/>
               </a:rPr>
@@ -7141,8 +7169,8 @@
         </p:nvSpPr>
         <p:spPr>
           <a:xfrm>
-            <a:off x="731520" y="3337560"/>
-            <a:ext cx="109728" cy="1554480"/>
+            <a:off x="731520" y="3291840"/>
+            <a:ext cx="128016" cy="1600200"/>
           </a:xfrm>
           <a:prstGeom prst="rect">
             <a:avLst/>
@@ -7185,18 +7213,18 @@
         </p:nvSpPr>
         <p:spPr>
           <a:xfrm>
-            <a:off x="6245352" y="3337560"/>
-            <a:ext cx="5212080" cy="1554480"/>
+            <a:off x="6245352" y="3291840"/>
+            <a:ext cx="5212080" cy="1600200"/>
           </a:xfrm>
           <a:prstGeom prst="roundRect">
             <a:avLst/>
           </a:prstGeom>
           <a:solidFill>
-            <a:srgbClr val="F5F9FC"/>
-          </a:solidFill>
-          <a:ln w="12700">
+            <a:srgbClr val="FFFFFF"/>
+          </a:solidFill>
+          <a:ln w="16510">
             <a:solidFill>
-              <a:srgbClr val="D7E1EA"/>
+              <a:srgbClr val="C3D2DF"/>
             </a:solidFill>
           </a:ln>
           <a:effectLst/>
@@ -7216,12 +7244,12 @@
           </a:fontRef>
         </p:style>
         <p:txBody>
-          <a:bodyPr rtlCol="0" anchor="ctr" tIns="50800" bIns="50800" lIns="101600" rIns="101600" wrap="square"/>
+          <a:bodyPr rtlCol="0" anchor="ctr" tIns="63500" bIns="63500" lIns="127000" rIns="127000" wrap="square"/>
           <a:lstStyle/>
           <a:p>
             <a:pPr algn="l"/>
             <a:r>
-              <a:rPr sz="2000" b="1">
+              <a:rPr sz="2400" b="1">
                 <a:solidFill>
                   <a:srgbClr val="0B3D5C"/>
                 </a:solidFill>
@@ -7233,9 +7261,9 @@
           <a:p>
             <a:pPr algn="l"/>
             <a:r>
-              <a:rPr sz="1700" b="0">
-                <a:solidFill>
-                  <a:srgbClr val="1F9E8F"/>
+              <a:rPr sz="2000" b="0">
+                <a:solidFill>
+                  <a:srgbClr val="158073"/>
                 </a:solidFill>
                 <a:latin typeface="Apple SD Gothic Neo"/>
               </a:rPr>
@@ -7252,8 +7280,8 @@
         </p:nvSpPr>
         <p:spPr>
           <a:xfrm>
-            <a:off x="6245352" y="3337560"/>
-            <a:ext cx="109728" cy="1554480"/>
+            <a:off x="6245352" y="3291840"/>
+            <a:ext cx="128016" cy="1600200"/>
           </a:xfrm>
           <a:prstGeom prst="rect">
             <a:avLst/>
@@ -7296,8 +7324,8 @@
         </p:nvSpPr>
         <p:spPr>
           <a:xfrm>
-            <a:off x="548640" y="5212080"/>
-            <a:ext cx="11091672" cy="822960"/>
+            <a:off x="548640" y="5257800"/>
+            <a:ext cx="11091672" cy="914400"/>
           </a:xfrm>
           <a:prstGeom prst="rect">
             <a:avLst/>
@@ -7312,7 +7340,7 @@
           <a:p>
             <a:pPr algn="ctr"/>
             <a:r>
-              <a:rPr sz="2100" b="1">
+              <a:rPr sz="2400" b="1">
                 <a:solidFill>
                   <a:srgbClr val="0B3D5C"/>
                 </a:solidFill>
@@ -7349,8 +7377,8 @@
         </p:nvSpPr>
         <p:spPr>
           <a:xfrm>
-            <a:off x="548640" y="411480"/>
-            <a:ext cx="10972800" cy="822960"/>
+            <a:off x="548640" y="365760"/>
+            <a:ext cx="11064240" cy="914400"/>
           </a:xfrm>
           <a:prstGeom prst="rect">
             <a:avLst/>
@@ -7365,7 +7393,7 @@
           <a:p>
             <a:pPr algn="l"/>
             <a:r>
-              <a:rPr sz="3000" b="1">
+              <a:rPr sz="3600" b="1">
                 <a:solidFill>
                   <a:srgbClr val="0B3D5C"/>
                 </a:solidFill>
@@ -7384,8 +7412,8 @@
         </p:nvSpPr>
         <p:spPr>
           <a:xfrm>
-            <a:off x="566928" y="1207008"/>
-            <a:ext cx="2377440" cy="54864"/>
+            <a:off x="566928" y="1298448"/>
+            <a:ext cx="2651760" cy="64008"/>
           </a:xfrm>
           <a:prstGeom prst="rect">
             <a:avLst/>
@@ -7428,8 +7456,8 @@
         </p:nvSpPr>
         <p:spPr>
           <a:xfrm>
-            <a:off x="1691640" y="1691640"/>
-            <a:ext cx="1920240" cy="1920240"/>
+            <a:off x="1600200" y="1600200"/>
+            <a:ext cx="2103120" cy="2103120"/>
           </a:xfrm>
           <a:prstGeom prst="ellipse">
             <a:avLst/>
@@ -7457,12 +7485,12 @@
           </a:fontRef>
         </p:style>
         <p:txBody>
-          <a:bodyPr rtlCol="0" anchor="ctr" tIns="50800" bIns="50800" lIns="101600" rIns="101600" wrap="square"/>
-          <a:lstStyle/>
-          <a:p>
-            <a:pPr algn="ctr"/>
-            <a:r>
-              <a:rPr sz="1900" b="1">
+          <a:bodyPr rtlCol="0" anchor="ctr" tIns="63500" bIns="63500" lIns="127000" rIns="127000" wrap="square"/>
+          <a:lstStyle/>
+          <a:p>
+            <a:pPr algn="ctr"/>
+            <a:r>
+              <a:rPr sz="2400" b="1">
                 <a:solidFill>
                   <a:srgbClr val="FFFFFF"/>
                 </a:solidFill>
@@ -7481,8 +7509,8 @@
         </p:nvSpPr>
         <p:spPr>
           <a:xfrm>
-            <a:off x="1143000" y="3794760"/>
-            <a:ext cx="3017520" cy="548640"/>
+            <a:off x="1051560" y="3840480"/>
+            <a:ext cx="3200400" cy="640080"/>
           </a:xfrm>
           <a:prstGeom prst="rect">
             <a:avLst/>
@@ -7497,7 +7525,7 @@
           <a:p>
             <a:pPr algn="ctr"/>
             <a:r>
-              <a:rPr sz="2400" b="1">
+              <a:rPr sz="2800" b="1">
                 <a:solidFill>
                   <a:srgbClr val="0B3D5C"/>
                 </a:solidFill>
@@ -7516,8 +7544,8 @@
         </p:nvSpPr>
         <p:spPr>
           <a:xfrm>
-            <a:off x="1143000" y="4389120"/>
-            <a:ext cx="3017520" cy="1005840"/>
+            <a:off x="1051560" y="4526280"/>
+            <a:ext cx="3200400" cy="1097280"/>
           </a:xfrm>
           <a:prstGeom prst="rect">
             <a:avLst/>
@@ -7532,7 +7560,7 @@
           <a:p>
             <a:pPr algn="ctr"/>
             <a:r>
-              <a:rPr sz="1800" b="0">
+              <a:rPr sz="2200" b="0">
                 <a:solidFill>
                   <a:srgbClr val="5B7185"/>
                 </a:solidFill>
@@ -7544,7 +7572,7 @@
           <a:p>
             <a:pPr algn="ctr"/>
             <a:r>
-              <a:rPr sz="1800" b="0">
+              <a:rPr sz="2200" b="0">
                 <a:solidFill>
                   <a:srgbClr val="5B7185"/>
                 </a:solidFill>
@@ -7563,8 +7591,8 @@
         </p:nvSpPr>
         <p:spPr>
           <a:xfrm>
-            <a:off x="5138928" y="1691640"/>
-            <a:ext cx="1920240" cy="1920240"/>
+            <a:off x="5138928" y="1600200"/>
+            <a:ext cx="2103120" cy="2103120"/>
           </a:xfrm>
           <a:prstGeom prst="ellipse">
             <a:avLst/>
@@ -7592,12 +7620,12 @@
           </a:fontRef>
         </p:style>
         <p:txBody>
-          <a:bodyPr rtlCol="0" anchor="ctr" tIns="50800" bIns="50800" lIns="101600" rIns="101600" wrap="square"/>
-          <a:lstStyle/>
-          <a:p>
-            <a:pPr algn="ctr"/>
-            <a:r>
-              <a:rPr sz="1900" b="1">
+          <a:bodyPr rtlCol="0" anchor="ctr" tIns="63500" bIns="63500" lIns="127000" rIns="127000" wrap="square"/>
+          <a:lstStyle/>
+          <a:p>
+            <a:pPr algn="ctr"/>
+            <a:r>
+              <a:rPr sz="2400" b="1">
                 <a:solidFill>
                   <a:srgbClr val="FFFFFF"/>
                 </a:solidFill>
@@ -7616,8 +7644,8 @@
         </p:nvSpPr>
         <p:spPr>
           <a:xfrm>
-            <a:off x="4590288" y="3794760"/>
-            <a:ext cx="3017520" cy="548640"/>
+            <a:off x="4590288" y="3840480"/>
+            <a:ext cx="3200400" cy="640080"/>
           </a:xfrm>
           <a:prstGeom prst="rect">
             <a:avLst/>
@@ -7632,7 +7660,7 @@
           <a:p>
             <a:pPr algn="ctr"/>
             <a:r>
-              <a:rPr sz="2400" b="1">
+              <a:rPr sz="2800" b="1">
                 <a:solidFill>
                   <a:srgbClr val="0B3D5C"/>
                 </a:solidFill>
@@ -7651,8 +7679,8 @@
         </p:nvSpPr>
         <p:spPr>
           <a:xfrm>
-            <a:off x="4590288" y="4389120"/>
-            <a:ext cx="3017520" cy="1005840"/>
+            <a:off x="4590288" y="4526280"/>
+            <a:ext cx="3200400" cy="1097280"/>
           </a:xfrm>
           <a:prstGeom prst="rect">
             <a:avLst/>
@@ -7667,7 +7695,7 @@
           <a:p>
             <a:pPr algn="ctr"/>
             <a:r>
-              <a:rPr sz="1800" b="0">
+              <a:rPr sz="2200" b="0">
                 <a:solidFill>
                   <a:srgbClr val="5B7185"/>
                 </a:solidFill>
@@ -7679,7 +7707,7 @@
           <a:p>
             <a:pPr algn="ctr"/>
             <a:r>
-              <a:rPr sz="1800" b="0">
+              <a:rPr sz="2200" b="0">
                 <a:solidFill>
                   <a:srgbClr val="5B7185"/>
                 </a:solidFill>
@@ -7698,8 +7726,8 @@
         </p:nvSpPr>
         <p:spPr>
           <a:xfrm>
-            <a:off x="8586216" y="1691640"/>
-            <a:ext cx="1920240" cy="1920240"/>
+            <a:off x="8677656" y="1600200"/>
+            <a:ext cx="2103120" cy="2103120"/>
           </a:xfrm>
           <a:prstGeom prst="ellipse">
             <a:avLst/>
@@ -7727,12 +7755,12 @@
           </a:fontRef>
         </p:style>
         <p:txBody>
-          <a:bodyPr rtlCol="0" anchor="ctr" tIns="50800" bIns="50800" lIns="101600" rIns="101600" wrap="square"/>
-          <a:lstStyle/>
-          <a:p>
-            <a:pPr algn="ctr"/>
-            <a:r>
-              <a:rPr sz="1900" b="1">
+          <a:bodyPr rtlCol="0" anchor="ctr" tIns="63500" bIns="63500" lIns="127000" rIns="127000" wrap="square"/>
+          <a:lstStyle/>
+          <a:p>
+            <a:pPr algn="ctr"/>
+            <a:r>
+              <a:rPr sz="2400" b="1">
                 <a:solidFill>
                   <a:srgbClr val="FFFFFF"/>
                 </a:solidFill>
@@ -7751,8 +7779,8 @@
         </p:nvSpPr>
         <p:spPr>
           <a:xfrm>
-            <a:off x="8037576" y="3794760"/>
-            <a:ext cx="3017520" cy="548640"/>
+            <a:off x="8129016" y="3840480"/>
+            <a:ext cx="3200400" cy="640080"/>
           </a:xfrm>
           <a:prstGeom prst="rect">
             <a:avLst/>
@@ -7767,7 +7795,7 @@
           <a:p>
             <a:pPr algn="ctr"/>
             <a:r>
-              <a:rPr sz="2400" b="1">
+              <a:rPr sz="2800" b="1">
                 <a:solidFill>
                   <a:srgbClr val="0B3D5C"/>
                 </a:solidFill>
@@ -7786,8 +7814,8 @@
         </p:nvSpPr>
         <p:spPr>
           <a:xfrm>
-            <a:off x="8037576" y="4389120"/>
-            <a:ext cx="3017520" cy="1005840"/>
+            <a:off x="8129016" y="4526280"/>
+            <a:ext cx="3200400" cy="1097280"/>
           </a:xfrm>
           <a:prstGeom prst="rect">
             <a:avLst/>
@@ -7802,7 +7830,7 @@
           <a:p>
             <a:pPr algn="ctr"/>
             <a:r>
-              <a:rPr sz="1800" b="0">
+              <a:rPr sz="2200" b="0">
                 <a:solidFill>
                   <a:srgbClr val="5B7185"/>
                 </a:solidFill>
@@ -7814,7 +7842,7 @@
           <a:p>
             <a:pPr algn="ctr"/>
             <a:r>
-              <a:rPr sz="1800" b="0">
+              <a:rPr sz="2200" b="0">
                 <a:solidFill>
                   <a:srgbClr val="5B7185"/>
                 </a:solidFill>
@@ -7859,8 +7887,8 @@
         </p:nvSpPr>
         <p:spPr>
           <a:xfrm>
-            <a:off x="914400" y="2468880"/>
-            <a:ext cx="10332720" cy="822960"/>
+            <a:off x="914400" y="2377440"/>
+            <a:ext cx="10332720" cy="914400"/>
           </a:xfrm>
           <a:prstGeom prst="rect">
             <a:avLst/>
@@ -7875,7 +7903,7 @@
           <a:p>
             <a:pPr algn="l"/>
             <a:r>
-              <a:rPr sz="3600" b="1">
+              <a:rPr sz="4000" b="1">
                 <a:solidFill>
                   <a:srgbClr val="FFFFFF"/>
                 </a:solidFill>
@@ -7894,8 +7922,8 @@
         </p:nvSpPr>
         <p:spPr>
           <a:xfrm>
-            <a:off x="914400" y="3566160"/>
-            <a:ext cx="10332720" cy="1097280"/>
+            <a:off x="914400" y="3520440"/>
+            <a:ext cx="10332720" cy="1188720"/>
           </a:xfrm>
           <a:prstGeom prst="rect">
             <a:avLst/>
@@ -7910,7 +7938,7 @@
           <a:p>
             <a:pPr algn="l"/>
             <a:r>
-              <a:rPr sz="2600" b="1">
+              <a:rPr sz="3000" b="1">
                 <a:solidFill>
                   <a:srgbClr val="F2A900"/>
                 </a:solidFill>
@@ -7947,8 +7975,8 @@
         </p:nvSpPr>
         <p:spPr>
           <a:xfrm>
-            <a:off x="548640" y="411480"/>
-            <a:ext cx="10972800" cy="822960"/>
+            <a:off x="548640" y="365760"/>
+            <a:ext cx="11064240" cy="914400"/>
           </a:xfrm>
           <a:prstGeom prst="rect">
             <a:avLst/>
@@ -7963,7 +7991,7 @@
           <a:p>
             <a:pPr algn="l"/>
             <a:r>
-              <a:rPr sz="3000" b="1">
+              <a:rPr sz="3600" b="1">
                 <a:solidFill>
                   <a:srgbClr val="0B3D5C"/>
                 </a:solidFill>
@@ -7982,8 +8010,8 @@
         </p:nvSpPr>
         <p:spPr>
           <a:xfrm>
-            <a:off x="566928" y="1207008"/>
-            <a:ext cx="2377440" cy="54864"/>
+            <a:off x="566928" y="1298448"/>
+            <a:ext cx="2651760" cy="64008"/>
           </a:xfrm>
           <a:prstGeom prst="rect">
             <a:avLst/>
@@ -8026,18 +8054,18 @@
         </p:nvSpPr>
         <p:spPr>
           <a:xfrm>
-            <a:off x="1554480" y="2286000"/>
-            <a:ext cx="4114800" cy="2377440"/>
+            <a:off x="1417320" y="2148840"/>
+            <a:ext cx="4370832" cy="2651760"/>
           </a:xfrm>
           <a:prstGeom prst="roundRect">
             <a:avLst/>
           </a:prstGeom>
           <a:solidFill>
-            <a:srgbClr val="F5F9FC"/>
-          </a:solidFill>
-          <a:ln w="12700">
+            <a:srgbClr val="FFFFFF"/>
+          </a:solidFill>
+          <a:ln w="19050">
             <a:solidFill>
-              <a:srgbClr val="D7E1EA"/>
+              <a:srgbClr val="C3D2DF"/>
             </a:solidFill>
           </a:ln>
           <a:effectLst/>
@@ -8057,7 +8085,7 @@
           </a:fontRef>
         </p:style>
         <p:txBody>
-          <a:bodyPr rtlCol="0" anchor="ctr" tIns="50800" bIns="50800" lIns="101600" rIns="101600" wrap="square"/>
+          <a:bodyPr rtlCol="0" anchor="ctr" tIns="63500" bIns="63500" lIns="127000" rIns="127000" wrap="square"/>
           <a:lstStyle/>
           <a:p>
             <a:pPr algn="ctr"/>
@@ -8072,8 +8100,8 @@
         </p:nvSpPr>
         <p:spPr>
           <a:xfrm>
-            <a:off x="1554480" y="2286000"/>
-            <a:ext cx="4114800" cy="128016"/>
+            <a:off x="1417320" y="2148840"/>
+            <a:ext cx="4370832" cy="164592"/>
           </a:xfrm>
           <a:prstGeom prst="rect">
             <a:avLst/>
@@ -8116,8 +8144,8 @@
         </p:nvSpPr>
         <p:spPr>
           <a:xfrm>
-            <a:off x="1554480" y="2880360"/>
-            <a:ext cx="4114800" cy="822960"/>
+            <a:off x="1417320" y="2880360"/>
+            <a:ext cx="4370832" cy="914400"/>
           </a:xfrm>
           <a:prstGeom prst="rect">
             <a:avLst/>
@@ -8132,7 +8160,7 @@
           <a:p>
             <a:pPr algn="ctr"/>
             <a:r>
-              <a:rPr sz="3200" b="1">
+              <a:rPr sz="3800" b="1">
                 <a:solidFill>
                   <a:srgbClr val="0B3D5C"/>
                 </a:solidFill>
@@ -8151,8 +8179,8 @@
         </p:nvSpPr>
         <p:spPr>
           <a:xfrm>
-            <a:off x="1554480" y="3794760"/>
-            <a:ext cx="4114800" cy="640080"/>
+            <a:off x="1417320" y="3931920"/>
+            <a:ext cx="4370832" cy="731520"/>
           </a:xfrm>
           <a:prstGeom prst="rect">
             <a:avLst/>
@@ -8167,7 +8195,7 @@
           <a:p>
             <a:pPr algn="ctr"/>
             <a:r>
-              <a:rPr sz="2000" b="0">
+              <a:rPr sz="2400" b="0">
                 <a:solidFill>
                   <a:srgbClr val="5B7185"/>
                 </a:solidFill>
@@ -8186,18 +8214,18 @@
         </p:nvSpPr>
         <p:spPr>
           <a:xfrm>
-            <a:off x="6519672" y="2286000"/>
-            <a:ext cx="4114800" cy="2377440"/>
+            <a:off x="6400800" y="2148840"/>
+            <a:ext cx="4370832" cy="2651760"/>
           </a:xfrm>
           <a:prstGeom prst="roundRect">
             <a:avLst/>
           </a:prstGeom>
           <a:solidFill>
-            <a:srgbClr val="F5F9FC"/>
-          </a:solidFill>
-          <a:ln w="12700">
+            <a:srgbClr val="FFFFFF"/>
+          </a:solidFill>
+          <a:ln w="19050">
             <a:solidFill>
-              <a:srgbClr val="D7E1EA"/>
+              <a:srgbClr val="C3D2DF"/>
             </a:solidFill>
           </a:ln>
           <a:effectLst/>
@@ -8217,7 +8245,7 @@
           </a:fontRef>
         </p:style>
         <p:txBody>
-          <a:bodyPr rtlCol="0" anchor="ctr" tIns="50800" bIns="50800" lIns="101600" rIns="101600" wrap="square"/>
+          <a:bodyPr rtlCol="0" anchor="ctr" tIns="63500" bIns="63500" lIns="127000" rIns="127000" wrap="square"/>
           <a:lstStyle/>
           <a:p>
             <a:pPr algn="ctr"/>
@@ -8232,8 +8260,8 @@
         </p:nvSpPr>
         <p:spPr>
           <a:xfrm>
-            <a:off x="6519672" y="2286000"/>
-            <a:ext cx="4114800" cy="128016"/>
+            <a:off x="6400800" y="2148840"/>
+            <a:ext cx="4370832" cy="164592"/>
           </a:xfrm>
           <a:prstGeom prst="rect">
             <a:avLst/>
@@ -8276,8 +8304,8 @@
         </p:nvSpPr>
         <p:spPr>
           <a:xfrm>
-            <a:off x="6519672" y="2880360"/>
-            <a:ext cx="4114800" cy="822960"/>
+            <a:off x="6400800" y="2880360"/>
+            <a:ext cx="4370832" cy="914400"/>
           </a:xfrm>
           <a:prstGeom prst="rect">
             <a:avLst/>
@@ -8292,7 +8320,7 @@
           <a:p>
             <a:pPr algn="ctr"/>
             <a:r>
-              <a:rPr sz="3200" b="1">
+              <a:rPr sz="3800" b="1">
                 <a:solidFill>
                   <a:srgbClr val="0B3D5C"/>
                 </a:solidFill>
@@ -8311,8 +8339,8 @@
         </p:nvSpPr>
         <p:spPr>
           <a:xfrm>
-            <a:off x="6519672" y="3794760"/>
-            <a:ext cx="4114800" cy="640080"/>
+            <a:off x="6400800" y="3931920"/>
+            <a:ext cx="4370832" cy="731520"/>
           </a:xfrm>
           <a:prstGeom prst="rect">
             <a:avLst/>
@@ -8327,7 +8355,7 @@
           <a:p>
             <a:pPr algn="ctr"/>
             <a:r>
-              <a:rPr sz="2000" b="0">
+              <a:rPr sz="2400" b="0">
                 <a:solidFill>
                   <a:srgbClr val="5B7185"/>
                 </a:solidFill>
@@ -8364,8 +8392,8 @@
         </p:nvSpPr>
         <p:spPr>
           <a:xfrm>
-            <a:off x="548640" y="411480"/>
-            <a:ext cx="10972800" cy="822960"/>
+            <a:off x="548640" y="365760"/>
+            <a:ext cx="11064240" cy="914400"/>
           </a:xfrm>
           <a:prstGeom prst="rect">
             <a:avLst/>
@@ -8380,7 +8408,7 @@
           <a:p>
             <a:pPr algn="l"/>
             <a:r>
-              <a:rPr sz="3000" b="1">
+              <a:rPr sz="3600" b="1">
                 <a:solidFill>
                   <a:srgbClr val="0B3D5C"/>
                 </a:solidFill>
@@ -8399,8 +8427,8 @@
         </p:nvSpPr>
         <p:spPr>
           <a:xfrm>
-            <a:off x="566928" y="1207008"/>
-            <a:ext cx="2377440" cy="54864"/>
+            <a:off x="566928" y="1298448"/>
+            <a:ext cx="2651760" cy="64008"/>
           </a:xfrm>
           <a:prstGeom prst="rect">
             <a:avLst/>
@@ -8443,8 +8471,8 @@
         </p:nvSpPr>
         <p:spPr>
           <a:xfrm>
-            <a:off x="640080" y="1554480"/>
-            <a:ext cx="10972800" cy="731520"/>
+            <a:off x="640080" y="1508760"/>
+            <a:ext cx="10972800" cy="822960"/>
           </a:xfrm>
           <a:prstGeom prst="rect">
             <a:avLst/>
@@ -8459,7 +8487,7 @@
           <a:p>
             <a:pPr algn="l"/>
             <a:r>
-              <a:rPr sz="2800" b="1">
+              <a:rPr sz="3200" b="1">
                 <a:solidFill>
                   <a:srgbClr val="0B3D5C"/>
                 </a:solidFill>
@@ -8478,8 +8506,8 @@
         </p:nvSpPr>
         <p:spPr>
           <a:xfrm>
-            <a:off x="1097280" y="3383280"/>
-            <a:ext cx="2743200" cy="1005840"/>
+            <a:off x="914400" y="3291840"/>
+            <a:ext cx="2926080" cy="1188720"/>
           </a:xfrm>
           <a:prstGeom prst="roundRect">
             <a:avLst/>
@@ -8507,12 +8535,12 @@
           </a:fontRef>
         </p:style>
         <p:txBody>
-          <a:bodyPr rtlCol="0" anchor="ctr" tIns="50800" bIns="50800" lIns="101600" rIns="101600" wrap="square"/>
-          <a:lstStyle/>
-          <a:p>
-            <a:pPr algn="ctr"/>
-            <a:r>
-              <a:rPr sz="2200" b="1">
+          <a:bodyPr rtlCol="0" anchor="ctr" tIns="63500" bIns="63500" lIns="127000" rIns="127000" wrap="square"/>
+          <a:lstStyle/>
+          <a:p>
+            <a:pPr algn="ctr"/>
+            <a:r>
+              <a:rPr sz="2500" b="1">
                 <a:solidFill>
                   <a:srgbClr val="FFFFFF"/>
                 </a:solidFill>
@@ -8531,8 +8559,8 @@
         </p:nvSpPr>
         <p:spPr>
           <a:xfrm>
-            <a:off x="4023360" y="2697480"/>
-            <a:ext cx="548640" cy="548640"/>
+            <a:off x="4069080" y="2606040"/>
+            <a:ext cx="640080" cy="640080"/>
           </a:xfrm>
           <a:prstGeom prst="rect">
             <a:avLst/>
@@ -8547,7 +8575,7 @@
           <a:p>
             <a:pPr algn="ctr"/>
             <a:r>
-              <a:rPr sz="2600" b="1">
+              <a:rPr sz="3000" b="1">
                 <a:solidFill>
                   <a:srgbClr val="F2A900"/>
                 </a:solidFill>
@@ -8566,8 +8594,8 @@
         </p:nvSpPr>
         <p:spPr>
           <a:xfrm>
-            <a:off x="4023360" y="4160520"/>
-            <a:ext cx="548640" cy="548640"/>
+            <a:off x="4069080" y="4343400"/>
+            <a:ext cx="640080" cy="640080"/>
           </a:xfrm>
           <a:prstGeom prst="rect">
             <a:avLst/>
@@ -8582,7 +8610,7 @@
           <a:p>
             <a:pPr algn="ctr"/>
             <a:r>
-              <a:rPr sz="2600" b="1">
+              <a:rPr sz="3000" b="1">
                 <a:solidFill>
                   <a:srgbClr val="F2A900"/>
                 </a:solidFill>
@@ -8601,16 +8629,16 @@
         </p:nvSpPr>
         <p:spPr>
           <a:xfrm>
-            <a:off x="4754880" y="2377440"/>
-            <a:ext cx="6400800" cy="1097280"/>
+            <a:off x="4937760" y="2240280"/>
+            <a:ext cx="6400800" cy="1234440"/>
           </a:xfrm>
           <a:prstGeom prst="roundRect">
             <a:avLst/>
           </a:prstGeom>
           <a:solidFill>
-            <a:srgbClr val="F5F9FC"/>
-          </a:solidFill>
-          <a:ln w="19050">
+            <a:srgbClr val="DEECF6"/>
+          </a:solidFill>
+          <a:ln w="25400">
             <a:solidFill>
               <a:srgbClr val="1F9E8F"/>
             </a:solidFill>
@@ -8632,12 +8660,12 @@
           </a:fontRef>
         </p:style>
         <p:txBody>
-          <a:bodyPr rtlCol="0" anchor="ctr" tIns="50800" bIns="50800" lIns="101600" rIns="101600" wrap="square"/>
+          <a:bodyPr rtlCol="0" anchor="ctr" tIns="63500" bIns="63500" lIns="127000" rIns="127000" wrap="square"/>
           <a:lstStyle/>
           <a:p>
             <a:pPr algn="l"/>
             <a:r>
-              <a:rPr sz="1900" b="1">
+              <a:rPr sz="2200" b="1">
                 <a:solidFill>
                   <a:srgbClr val="0B3D5C"/>
                 </a:solidFill>
@@ -8646,7 +8674,7 @@
               <a:t>100만 원 </a:t>
             </a:r>
             <a:r>
-              <a:rPr sz="1900" b="1">
+              <a:rPr sz="2200" b="1">
                 <a:solidFill>
                   <a:srgbClr val="1F9E8F"/>
                 </a:solidFill>
@@ -8655,7 +8683,7 @@
               <a:t>미만</a:t>
             </a:r>
             <a:r>
-              <a:rPr sz="1900" b="1">
+              <a:rPr sz="2200" b="1">
                 <a:solidFill>
                   <a:srgbClr val="1C2B36"/>
                 </a:solidFill>
@@ -8674,16 +8702,16 @@
         </p:nvSpPr>
         <p:spPr>
           <a:xfrm>
-            <a:off x="4754880" y="3840480"/>
-            <a:ext cx="6400800" cy="1097280"/>
+            <a:off x="4937760" y="3977639"/>
+            <a:ext cx="6400800" cy="1234440"/>
           </a:xfrm>
           <a:prstGeom prst="roundRect">
             <a:avLst/>
           </a:prstGeom>
           <a:solidFill>
-            <a:srgbClr val="F5F9FC"/>
-          </a:solidFill>
-          <a:ln w="19050">
+            <a:srgbClr val="FDECC4"/>
+          </a:solidFill>
+          <a:ln w="25400">
             <a:solidFill>
               <a:srgbClr val="F2A900"/>
             </a:solidFill>
@@ -8705,12 +8733,12 @@
           </a:fontRef>
         </p:style>
         <p:txBody>
-          <a:bodyPr rtlCol="0" anchor="ctr" tIns="50800" bIns="50800" lIns="101600" rIns="101600" wrap="square"/>
+          <a:bodyPr rtlCol="0" anchor="ctr" tIns="63500" bIns="63500" lIns="127000" rIns="127000" wrap="square"/>
           <a:lstStyle/>
           <a:p>
             <a:pPr algn="l"/>
             <a:r>
-              <a:rPr sz="1900" b="1">
+              <a:rPr sz="2200" b="1">
                 <a:solidFill>
                   <a:srgbClr val="0B3D5C"/>
                 </a:solidFill>
@@ -8719,16 +8747,16 @@
               <a:t>100만 원 </a:t>
             </a:r>
             <a:r>
-              <a:rPr sz="1900" b="1">
-                <a:solidFill>
-                  <a:srgbClr val="C8860A"/>
+              <a:rPr sz="2200" b="1">
+                <a:solidFill>
+                  <a:srgbClr val="B57900"/>
                 </a:solidFill>
                 <a:latin typeface="Apple SD Gothic Neo"/>
               </a:rPr>
               <a:t>이상</a:t>
             </a:r>
             <a:r>
-              <a:rPr sz="1900" b="1">
+              <a:rPr sz="2200" b="1">
                 <a:solidFill>
                   <a:srgbClr val="1C2B36"/>
                 </a:solidFill>
@@ -8765,8 +8793,8 @@
         </p:nvSpPr>
         <p:spPr>
           <a:xfrm>
-            <a:off x="548640" y="411480"/>
-            <a:ext cx="10972800" cy="822960"/>
+            <a:off x="548640" y="365760"/>
+            <a:ext cx="11064240" cy="914400"/>
           </a:xfrm>
           <a:prstGeom prst="rect">
             <a:avLst/>
@@ -8781,7 +8809,7 @@
           <a:p>
             <a:pPr algn="l"/>
             <a:r>
-              <a:rPr sz="3000" b="1">
+              <a:rPr sz="3600" b="1">
                 <a:solidFill>
                   <a:srgbClr val="0B3D5C"/>
                 </a:solidFill>
@@ -8800,8 +8828,8 @@
         </p:nvSpPr>
         <p:spPr>
           <a:xfrm>
-            <a:off x="566928" y="1207008"/>
-            <a:ext cx="2377440" cy="54864"/>
+            <a:off x="566928" y="1298448"/>
+            <a:ext cx="2651760" cy="64008"/>
           </a:xfrm>
           <a:prstGeom prst="rect">
             <a:avLst/>
@@ -8844,8 +8872,8 @@
         </p:nvSpPr>
         <p:spPr>
           <a:xfrm>
-            <a:off x="640080" y="1554480"/>
-            <a:ext cx="10972800" cy="731520"/>
+            <a:off x="640080" y="1508760"/>
+            <a:ext cx="10972800" cy="822960"/>
           </a:xfrm>
           <a:prstGeom prst="rect">
             <a:avLst/>
@@ -8860,7 +8888,7 @@
           <a:p>
             <a:pPr algn="l"/>
             <a:r>
-              <a:rPr sz="2800" b="1">
+              <a:rPr sz="3200" b="1">
                 <a:solidFill>
                   <a:srgbClr val="0B3D5C"/>
                 </a:solidFill>
@@ -8879,18 +8907,18 @@
         </p:nvSpPr>
         <p:spPr>
           <a:xfrm>
-            <a:off x="769467" y="3291840"/>
-            <a:ext cx="2286000" cy="1097280"/>
+            <a:off x="609447" y="3246120"/>
+            <a:ext cx="2331720" cy="1234440"/>
           </a:xfrm>
           <a:prstGeom prst="roundRect">
             <a:avLst/>
           </a:prstGeom>
           <a:solidFill>
-            <a:srgbClr val="F5F9FC"/>
-          </a:solidFill>
-          <a:ln w="16510">
+            <a:srgbClr val="DEECF6"/>
+          </a:solidFill>
+          <a:ln w="22860">
             <a:solidFill>
-              <a:srgbClr val="D7E1EA"/>
+              <a:srgbClr val="2C6F9C"/>
             </a:solidFill>
           </a:ln>
           <a:effectLst/>
@@ -8910,12 +8938,12 @@
           </a:fontRef>
         </p:style>
         <p:txBody>
-          <a:bodyPr rtlCol="0" anchor="ctr" tIns="50800" bIns="50800" lIns="101600" rIns="101600" wrap="square"/>
-          <a:lstStyle/>
-          <a:p>
-            <a:pPr algn="ctr"/>
-            <a:r>
-              <a:rPr sz="2000" b="1">
+          <a:bodyPr rtlCol="0" anchor="ctr" tIns="63500" bIns="63500" lIns="127000" rIns="127000" wrap="square"/>
+          <a:lstStyle/>
+          <a:p>
+            <a:pPr algn="ctr"/>
+            <a:r>
+              <a:rPr sz="2300" b="1">
                 <a:solidFill>
                   <a:srgbClr val="0B3D5C"/>
                 </a:solidFill>
@@ -8934,8 +8962,8 @@
         </p:nvSpPr>
         <p:spPr>
           <a:xfrm>
-            <a:off x="3073755" y="3429000"/>
-            <a:ext cx="548640" cy="548640"/>
+            <a:off x="2977743" y="3429000"/>
+            <a:ext cx="640080" cy="640080"/>
           </a:xfrm>
           <a:prstGeom prst="rect">
             <a:avLst/>
@@ -8950,7 +8978,7 @@
           <a:p>
             <a:pPr algn="ctr"/>
             <a:r>
-              <a:rPr sz="3000" b="1">
+              <a:rPr sz="3600" b="1">
                 <a:solidFill>
                   <a:srgbClr val="F2A900"/>
                 </a:solidFill>
@@ -8969,18 +8997,18 @@
         </p:nvSpPr>
         <p:spPr>
           <a:xfrm>
-            <a:off x="3558387" y="3291840"/>
-            <a:ext cx="2286000" cy="1097280"/>
+            <a:off x="3489807" y="3246120"/>
+            <a:ext cx="2331720" cy="1234440"/>
           </a:xfrm>
           <a:prstGeom prst="roundRect">
             <a:avLst/>
           </a:prstGeom>
           <a:solidFill>
-            <a:srgbClr val="F5F9FC"/>
-          </a:solidFill>
-          <a:ln w="16510">
+            <a:srgbClr val="DEECF6"/>
+          </a:solidFill>
+          <a:ln w="22860">
             <a:solidFill>
-              <a:srgbClr val="D7E1EA"/>
+              <a:srgbClr val="2C6F9C"/>
             </a:solidFill>
           </a:ln>
           <a:effectLst/>
@@ -9000,12 +9028,12 @@
           </a:fontRef>
         </p:style>
         <p:txBody>
-          <a:bodyPr rtlCol="0" anchor="ctr" tIns="50800" bIns="50800" lIns="101600" rIns="101600" wrap="square"/>
-          <a:lstStyle/>
-          <a:p>
-            <a:pPr algn="ctr"/>
-            <a:r>
-              <a:rPr sz="2000" b="1">
+          <a:bodyPr rtlCol="0" anchor="ctr" tIns="63500" bIns="63500" lIns="127000" rIns="127000" wrap="square"/>
+          <a:lstStyle/>
+          <a:p>
+            <a:pPr algn="ctr"/>
+            <a:r>
+              <a:rPr sz="2300" b="1">
                 <a:solidFill>
                   <a:srgbClr val="0B3D5C"/>
                 </a:solidFill>
@@ -9024,8 +9052,8 @@
         </p:nvSpPr>
         <p:spPr>
           <a:xfrm>
-            <a:off x="5862675" y="3429000"/>
-            <a:ext cx="548640" cy="548640"/>
+            <a:off x="5858103" y="3429000"/>
+            <a:ext cx="640080" cy="640080"/>
           </a:xfrm>
           <a:prstGeom prst="rect">
             <a:avLst/>
@@ -9040,7 +9068,7 @@
           <a:p>
             <a:pPr algn="ctr"/>
             <a:r>
-              <a:rPr sz="3000" b="1">
+              <a:rPr sz="3600" b="1">
                 <a:solidFill>
                   <a:srgbClr val="F2A900"/>
                 </a:solidFill>
@@ -9059,18 +9087,18 @@
         </p:nvSpPr>
         <p:spPr>
           <a:xfrm>
-            <a:off x="6347307" y="3291840"/>
-            <a:ext cx="2286000" cy="1097280"/>
+            <a:off x="6370167" y="3246120"/>
+            <a:ext cx="2331720" cy="1234440"/>
           </a:xfrm>
           <a:prstGeom prst="roundRect">
             <a:avLst/>
           </a:prstGeom>
           <a:solidFill>
-            <a:srgbClr val="F5F9FC"/>
-          </a:solidFill>
-          <a:ln w="16510">
+            <a:srgbClr val="DEECF6"/>
+          </a:solidFill>
+          <a:ln w="22860">
             <a:solidFill>
-              <a:srgbClr val="D7E1EA"/>
+              <a:srgbClr val="2C6F9C"/>
             </a:solidFill>
           </a:ln>
           <a:effectLst/>
@@ -9090,12 +9118,12 @@
           </a:fontRef>
         </p:style>
         <p:txBody>
-          <a:bodyPr rtlCol="0" anchor="ctr" tIns="50800" bIns="50800" lIns="101600" rIns="101600" wrap="square"/>
-          <a:lstStyle/>
-          <a:p>
-            <a:pPr algn="ctr"/>
-            <a:r>
-              <a:rPr sz="2000" b="1">
+          <a:bodyPr rtlCol="0" anchor="ctr" tIns="63500" bIns="63500" lIns="127000" rIns="127000" wrap="square"/>
+          <a:lstStyle/>
+          <a:p>
+            <a:pPr algn="ctr"/>
+            <a:r>
+              <a:rPr sz="2300" b="1">
                 <a:solidFill>
                   <a:srgbClr val="0B3D5C"/>
                 </a:solidFill>
@@ -9114,8 +9142,8 @@
         </p:nvSpPr>
         <p:spPr>
           <a:xfrm>
-            <a:off x="8651595" y="3429000"/>
-            <a:ext cx="548640" cy="548640"/>
+            <a:off x="8738463" y="3429000"/>
+            <a:ext cx="640080" cy="640080"/>
           </a:xfrm>
           <a:prstGeom prst="rect">
             <a:avLst/>
@@ -9130,7 +9158,7 @@
           <a:p>
             <a:pPr algn="ctr"/>
             <a:r>
-              <a:rPr sz="3000" b="1">
+              <a:rPr sz="3600" b="1">
                 <a:solidFill>
                   <a:srgbClr val="F2A900"/>
                 </a:solidFill>
@@ -9149,8 +9177,8 @@
         </p:nvSpPr>
         <p:spPr>
           <a:xfrm>
-            <a:off x="9136227" y="3291840"/>
-            <a:ext cx="2286000" cy="1097280"/>
+            <a:off x="9250527" y="3246120"/>
+            <a:ext cx="2331720" cy="1234440"/>
           </a:xfrm>
           <a:prstGeom prst="roundRect">
             <a:avLst/>
@@ -9158,9 +9186,9 @@
           <a:solidFill>
             <a:srgbClr val="0B3D5C"/>
           </a:solidFill>
-          <a:ln w="16510">
+          <a:ln w="22860">
             <a:solidFill>
-              <a:srgbClr val="D7E1EA"/>
+              <a:srgbClr val="2C6F9C"/>
             </a:solidFill>
           </a:ln>
           <a:effectLst/>
@@ -9180,12 +9208,12 @@
           </a:fontRef>
         </p:style>
         <p:txBody>
-          <a:bodyPr rtlCol="0" anchor="ctr" tIns="50800" bIns="50800" lIns="101600" rIns="101600" wrap="square"/>
-          <a:lstStyle/>
-          <a:p>
-            <a:pPr algn="ctr"/>
-            <a:r>
-              <a:rPr sz="2000" b="1">
+          <a:bodyPr rtlCol="0" anchor="ctr" tIns="63500" bIns="63500" lIns="127000" rIns="127000" wrap="square"/>
+          <a:lstStyle/>
+          <a:p>
+            <a:pPr algn="ctr"/>
+            <a:r>
+              <a:rPr sz="2300" b="1">
                 <a:solidFill>
                   <a:srgbClr val="FFFFFF"/>
                 </a:solidFill>
@@ -9222,8 +9250,8 @@
         </p:nvSpPr>
         <p:spPr>
           <a:xfrm>
-            <a:off x="548640" y="411480"/>
-            <a:ext cx="10972800" cy="822960"/>
+            <a:off x="548640" y="365760"/>
+            <a:ext cx="11064240" cy="914400"/>
           </a:xfrm>
           <a:prstGeom prst="rect">
             <a:avLst/>
@@ -9238,7 +9266,7 @@
           <a:p>
             <a:pPr algn="l"/>
             <a:r>
-              <a:rPr sz="3000" b="1">
+              <a:rPr sz="3600" b="1">
                 <a:solidFill>
                   <a:srgbClr val="0B3D5C"/>
                 </a:solidFill>
@@ -9257,8 +9285,8 @@
         </p:nvSpPr>
         <p:spPr>
           <a:xfrm>
-            <a:off x="566928" y="1207008"/>
-            <a:ext cx="2377440" cy="54864"/>
+            <a:off x="566928" y="1298448"/>
+            <a:ext cx="2651760" cy="64008"/>
           </a:xfrm>
           <a:prstGeom prst="rect">
             <a:avLst/>
@@ -9301,8 +9329,8 @@
         </p:nvSpPr>
         <p:spPr>
           <a:xfrm>
-            <a:off x="1752447" y="2286000"/>
-            <a:ext cx="1005840" cy="1005840"/>
+            <a:off x="1135227" y="2148840"/>
+            <a:ext cx="1280160" cy="1280160"/>
           </a:xfrm>
           <a:prstGeom prst="ellipse">
             <a:avLst/>
@@ -9330,12 +9358,12 @@
           </a:fontRef>
         </p:style>
         <p:txBody>
-          <a:bodyPr rtlCol="0" anchor="ctr" tIns="50800" bIns="50800" lIns="101600" rIns="101600" wrap="square"/>
-          <a:lstStyle/>
-          <a:p>
-            <a:pPr algn="ctr"/>
-            <a:r>
-              <a:rPr sz="1700" b="1">
+          <a:bodyPr rtlCol="0" anchor="ctr" tIns="63500" bIns="63500" lIns="127000" rIns="127000" wrap="square"/>
+          <a:lstStyle/>
+          <a:p>
+            <a:pPr algn="ctr"/>
+            <a:r>
+              <a:rPr sz="2100" b="1">
                 <a:solidFill>
                   <a:srgbClr val="FFFFFF"/>
                 </a:solidFill>
@@ -9354,18 +9382,18 @@
         </p:nvSpPr>
         <p:spPr>
           <a:xfrm>
-            <a:off x="1249527" y="3520440"/>
-            <a:ext cx="2011680" cy="914400"/>
+            <a:off x="655167" y="3703320"/>
+            <a:ext cx="2240280" cy="1097280"/>
           </a:xfrm>
           <a:prstGeom prst="roundRect">
             <a:avLst/>
           </a:prstGeom>
           <a:solidFill>
-            <a:srgbClr val="F5F9FC"/>
-          </a:solidFill>
-          <a:ln w="16510">
+            <a:srgbClr val="DEECF6"/>
+          </a:solidFill>
+          <a:ln w="25400">
             <a:solidFill>
-              <a:srgbClr val="D7E1EA"/>
+              <a:srgbClr val="2C6F9C"/>
             </a:solidFill>
           </a:ln>
           <a:effectLst/>
@@ -9385,12 +9413,12 @@
           </a:fontRef>
         </p:style>
         <p:txBody>
-          <a:bodyPr rtlCol="0" anchor="ctr" tIns="50800" bIns="50800" lIns="101600" rIns="101600" wrap="square"/>
-          <a:lstStyle/>
-          <a:p>
-            <a:pPr algn="ctr"/>
-            <a:r>
-              <a:rPr sz="1900" b="1">
+          <a:bodyPr rtlCol="0" anchor="ctr" tIns="63500" bIns="63500" lIns="127000" rIns="127000" wrap="square"/>
+          <a:lstStyle/>
+          <a:p>
+            <a:pPr algn="ctr"/>
+            <a:r>
+              <a:rPr sz="2400" b="1">
                 <a:solidFill>
                   <a:srgbClr val="0B3D5C"/>
                 </a:solidFill>
@@ -9409,8 +9437,8 @@
         </p:nvSpPr>
         <p:spPr>
           <a:xfrm>
-            <a:off x="3306927" y="3657600"/>
-            <a:ext cx="457200" cy="548640"/>
+            <a:off x="2968599" y="3931920"/>
+            <a:ext cx="640080" cy="640080"/>
           </a:xfrm>
           <a:prstGeom prst="rect">
             <a:avLst/>
@@ -9425,7 +9453,7 @@
           <a:p>
             <a:pPr algn="ctr"/>
             <a:r>
-              <a:rPr sz="3000" b="1">
+              <a:rPr sz="3600" b="1">
                 <a:solidFill>
                   <a:srgbClr val="F2A900"/>
                 </a:solidFill>
@@ -9444,8 +9472,8 @@
         </p:nvSpPr>
         <p:spPr>
           <a:xfrm>
-            <a:off x="4312767" y="2286000"/>
-            <a:ext cx="1005840" cy="1005840"/>
+            <a:off x="4015587" y="2148840"/>
+            <a:ext cx="1280160" cy="1280160"/>
           </a:xfrm>
           <a:prstGeom prst="ellipse">
             <a:avLst/>
@@ -9473,12 +9501,12 @@
           </a:fontRef>
         </p:style>
         <p:txBody>
-          <a:bodyPr rtlCol="0" anchor="ctr" tIns="50800" bIns="50800" lIns="101600" rIns="101600" wrap="square"/>
-          <a:lstStyle/>
-          <a:p>
-            <a:pPr algn="ctr"/>
-            <a:r>
-              <a:rPr sz="1700" b="1">
+          <a:bodyPr rtlCol="0" anchor="ctr" tIns="63500" bIns="63500" lIns="127000" rIns="127000" wrap="square"/>
+          <a:lstStyle/>
+          <a:p>
+            <a:pPr algn="ctr"/>
+            <a:r>
+              <a:rPr sz="2100" b="1">
                 <a:solidFill>
                   <a:srgbClr val="FFFFFF"/>
                 </a:solidFill>
@@ -9497,18 +9525,18 @@
         </p:nvSpPr>
         <p:spPr>
           <a:xfrm>
-            <a:off x="3809847" y="3520440"/>
-            <a:ext cx="2011680" cy="914400"/>
+            <a:off x="3535527" y="3703320"/>
+            <a:ext cx="2240280" cy="1097280"/>
           </a:xfrm>
           <a:prstGeom prst="roundRect">
             <a:avLst/>
           </a:prstGeom>
           <a:solidFill>
-            <a:srgbClr val="F5F9FC"/>
-          </a:solidFill>
-          <a:ln w="16510">
+            <a:srgbClr val="DEECF6"/>
+          </a:solidFill>
+          <a:ln w="25400">
             <a:solidFill>
-              <a:srgbClr val="D7E1EA"/>
+              <a:srgbClr val="2C6F9C"/>
             </a:solidFill>
           </a:ln>
           <a:effectLst/>
@@ -9528,12 +9556,12 @@
           </a:fontRef>
         </p:style>
         <p:txBody>
-          <a:bodyPr rtlCol="0" anchor="ctr" tIns="50800" bIns="50800" lIns="101600" rIns="101600" wrap="square"/>
-          <a:lstStyle/>
-          <a:p>
-            <a:pPr algn="ctr"/>
-            <a:r>
-              <a:rPr sz="1900" b="1">
+          <a:bodyPr rtlCol="0" anchor="ctr" tIns="63500" bIns="63500" lIns="127000" rIns="127000" wrap="square"/>
+          <a:lstStyle/>
+          <a:p>
+            <a:pPr algn="ctr"/>
+            <a:r>
+              <a:rPr sz="2400" b="1">
                 <a:solidFill>
                   <a:srgbClr val="0B3D5C"/>
                 </a:solidFill>
@@ -9552,8 +9580,8 @@
         </p:nvSpPr>
         <p:spPr>
           <a:xfrm>
-            <a:off x="5867247" y="3657600"/>
-            <a:ext cx="457200" cy="548640"/>
+            <a:off x="5848959" y="3931920"/>
+            <a:ext cx="640080" cy="640080"/>
           </a:xfrm>
           <a:prstGeom prst="rect">
             <a:avLst/>
@@ -9568,7 +9596,7 @@
           <a:p>
             <a:pPr algn="ctr"/>
             <a:r>
-              <a:rPr sz="3000" b="1">
+              <a:rPr sz="3600" b="1">
                 <a:solidFill>
                   <a:srgbClr val="F2A900"/>
                 </a:solidFill>
@@ -9587,8 +9615,8 @@
         </p:nvSpPr>
         <p:spPr>
           <a:xfrm>
-            <a:off x="6873087" y="2286000"/>
-            <a:ext cx="1005840" cy="1005840"/>
+            <a:off x="6895947" y="2148840"/>
+            <a:ext cx="1280160" cy="1280160"/>
           </a:xfrm>
           <a:prstGeom prst="ellipse">
             <a:avLst/>
@@ -9616,12 +9644,12 @@
           </a:fontRef>
         </p:style>
         <p:txBody>
-          <a:bodyPr rtlCol="0" anchor="ctr" tIns="50800" bIns="50800" lIns="101600" rIns="101600" wrap="square"/>
-          <a:lstStyle/>
-          <a:p>
-            <a:pPr algn="ctr"/>
-            <a:r>
-              <a:rPr sz="1700" b="1">
+          <a:bodyPr rtlCol="0" anchor="ctr" tIns="63500" bIns="63500" lIns="127000" rIns="127000" wrap="square"/>
+          <a:lstStyle/>
+          <a:p>
+            <a:pPr algn="ctr"/>
+            <a:r>
+              <a:rPr sz="2100" b="1">
                 <a:solidFill>
                   <a:srgbClr val="FFFFFF"/>
                 </a:solidFill>
@@ -9640,18 +9668,18 @@
         </p:nvSpPr>
         <p:spPr>
           <a:xfrm>
-            <a:off x="6370167" y="3520440"/>
-            <a:ext cx="2011680" cy="914400"/>
+            <a:off x="6415887" y="3703320"/>
+            <a:ext cx="2240280" cy="1097280"/>
           </a:xfrm>
           <a:prstGeom prst="roundRect">
             <a:avLst/>
           </a:prstGeom>
           <a:solidFill>
-            <a:srgbClr val="F5F9FC"/>
-          </a:solidFill>
-          <a:ln w="16510">
+            <a:srgbClr val="DCF1EC"/>
+          </a:solidFill>
+          <a:ln w="25400">
             <a:solidFill>
-              <a:srgbClr val="D7E1EA"/>
+              <a:srgbClr val="1F9E8F"/>
             </a:solidFill>
           </a:ln>
           <a:effectLst/>
@@ -9671,12 +9699,12 @@
           </a:fontRef>
         </p:style>
         <p:txBody>
-          <a:bodyPr rtlCol="0" anchor="ctr" tIns="50800" bIns="50800" lIns="101600" rIns="101600" wrap="square"/>
-          <a:lstStyle/>
-          <a:p>
-            <a:pPr algn="ctr"/>
-            <a:r>
-              <a:rPr sz="1900" b="1">
+          <a:bodyPr rtlCol="0" anchor="ctr" tIns="63500" bIns="63500" lIns="127000" rIns="127000" wrap="square"/>
+          <a:lstStyle/>
+          <a:p>
+            <a:pPr algn="ctr"/>
+            <a:r>
+              <a:rPr sz="2400" b="1">
                 <a:solidFill>
                   <a:srgbClr val="0B3D5C"/>
                 </a:solidFill>
@@ -9695,8 +9723,8 @@
         </p:nvSpPr>
         <p:spPr>
           <a:xfrm>
-            <a:off x="8427567" y="3657600"/>
-            <a:ext cx="457200" cy="548640"/>
+            <a:off x="8729319" y="3931920"/>
+            <a:ext cx="640080" cy="640080"/>
           </a:xfrm>
           <a:prstGeom prst="rect">
             <a:avLst/>
@@ -9711,7 +9739,7 @@
           <a:p>
             <a:pPr algn="ctr"/>
             <a:r>
-              <a:rPr sz="3000" b="1">
+              <a:rPr sz="3600" b="1">
                 <a:solidFill>
                   <a:srgbClr val="F2A900"/>
                 </a:solidFill>
@@ -9730,8 +9758,8 @@
         </p:nvSpPr>
         <p:spPr>
           <a:xfrm>
-            <a:off x="9433407" y="2286000"/>
-            <a:ext cx="1005840" cy="1005840"/>
+            <a:off x="9776307" y="2148840"/>
+            <a:ext cx="1280160" cy="1280160"/>
           </a:xfrm>
           <a:prstGeom prst="ellipse">
             <a:avLst/>
@@ -9759,12 +9787,12 @@
           </a:fontRef>
         </p:style>
         <p:txBody>
-          <a:bodyPr rtlCol="0" anchor="ctr" tIns="50800" bIns="50800" lIns="101600" rIns="101600" wrap="square"/>
-          <a:lstStyle/>
-          <a:p>
-            <a:pPr algn="ctr"/>
-            <a:r>
-              <a:rPr sz="1700" b="1">
+          <a:bodyPr rtlCol="0" anchor="ctr" tIns="63500" bIns="63500" lIns="127000" rIns="127000" wrap="square"/>
+          <a:lstStyle/>
+          <a:p>
+            <a:pPr algn="ctr"/>
+            <a:r>
+              <a:rPr sz="2100" b="1">
                 <a:solidFill>
                   <a:srgbClr val="FFFFFF"/>
                 </a:solidFill>
@@ -9783,18 +9811,18 @@
         </p:nvSpPr>
         <p:spPr>
           <a:xfrm>
-            <a:off x="8930487" y="3520440"/>
-            <a:ext cx="2011680" cy="914400"/>
+            <a:off x="9296247" y="3703320"/>
+            <a:ext cx="2240280" cy="1097280"/>
           </a:xfrm>
           <a:prstGeom prst="roundRect">
             <a:avLst/>
           </a:prstGeom>
           <a:solidFill>
-            <a:srgbClr val="F5F9FC"/>
-          </a:solidFill>
-          <a:ln w="16510">
+            <a:srgbClr val="0B3D5C"/>
+          </a:solidFill>
+          <a:ln w="25400">
             <a:solidFill>
-              <a:srgbClr val="D7E1EA"/>
+              <a:srgbClr val="0B3D5C"/>
             </a:solidFill>
           </a:ln>
           <a:effectLst/>
@@ -9814,14 +9842,14 @@
           </a:fontRef>
         </p:style>
         <p:txBody>
-          <a:bodyPr rtlCol="0" anchor="ctr" tIns="50800" bIns="50800" lIns="101600" rIns="101600" wrap="square"/>
-          <a:lstStyle/>
-          <a:p>
-            <a:pPr algn="ctr"/>
-            <a:r>
-              <a:rPr sz="1900" b="1">
-                <a:solidFill>
-                  <a:srgbClr val="0B3D5C"/>
+          <a:bodyPr rtlCol="0" anchor="ctr" tIns="63500" bIns="63500" lIns="127000" rIns="127000" wrap="square"/>
+          <a:lstStyle/>
+          <a:p>
+            <a:pPr algn="ctr"/>
+            <a:r>
+              <a:rPr sz="2400" b="1">
+                <a:solidFill>
+                  <a:srgbClr val="FFFFFF"/>
                 </a:solidFill>
                 <a:latin typeface="Apple SD Gothic Neo"/>
               </a:rPr>
@@ -9838,8 +9866,8 @@
         </p:nvSpPr>
         <p:spPr>
           <a:xfrm>
-            <a:off x="548640" y="4937760"/>
-            <a:ext cx="11091672" cy="822960"/>
+            <a:off x="548640" y="5212080"/>
+            <a:ext cx="11091672" cy="914400"/>
           </a:xfrm>
           <a:prstGeom prst="rect">
             <a:avLst/>
@@ -9854,7 +9882,7 @@
           <a:p>
             <a:pPr algn="ctr"/>
             <a:r>
-              <a:rPr sz="2100" b="1">
+              <a:rPr sz="2400" b="1">
                 <a:solidFill>
                   <a:srgbClr val="0B3D5C"/>
                 </a:solidFill>
@@ -9891,8 +9919,8 @@
         </p:nvSpPr>
         <p:spPr>
           <a:xfrm>
-            <a:off x="548640" y="411480"/>
-            <a:ext cx="10972800" cy="822960"/>
+            <a:off x="548640" y="365760"/>
+            <a:ext cx="11064240" cy="914400"/>
           </a:xfrm>
           <a:prstGeom prst="rect">
             <a:avLst/>
@@ -9907,7 +9935,7 @@
           <a:p>
             <a:pPr algn="l"/>
             <a:r>
-              <a:rPr sz="3000" b="1">
+              <a:rPr sz="3600" b="1">
                 <a:solidFill>
                   <a:srgbClr val="0B3D5C"/>
                 </a:solidFill>
@@ -9926,8 +9954,8 @@
         </p:nvSpPr>
         <p:spPr>
           <a:xfrm>
-            <a:off x="566928" y="1207008"/>
-            <a:ext cx="2377440" cy="54864"/>
+            <a:off x="566928" y="1298448"/>
+            <a:ext cx="2651760" cy="64008"/>
           </a:xfrm>
           <a:prstGeom prst="rect">
             <a:avLst/>
@@ -9970,8 +9998,8 @@
         </p:nvSpPr>
         <p:spPr>
           <a:xfrm>
-            <a:off x="3032607" y="2286000"/>
-            <a:ext cx="1005840" cy="1005840"/>
+            <a:off x="2575407" y="2148840"/>
+            <a:ext cx="1280160" cy="1280160"/>
           </a:xfrm>
           <a:prstGeom prst="ellipse">
             <a:avLst/>
@@ -9999,12 +10027,12 @@
           </a:fontRef>
         </p:style>
         <p:txBody>
-          <a:bodyPr rtlCol="0" anchor="ctr" tIns="50800" bIns="50800" lIns="101600" rIns="101600" wrap="square"/>
-          <a:lstStyle/>
-          <a:p>
-            <a:pPr algn="ctr"/>
-            <a:r>
-              <a:rPr sz="1700" b="1">
+          <a:bodyPr rtlCol="0" anchor="ctr" tIns="63500" bIns="63500" lIns="127000" rIns="127000" wrap="square"/>
+          <a:lstStyle/>
+          <a:p>
+            <a:pPr algn="ctr"/>
+            <a:r>
+              <a:rPr sz="2100" b="1">
                 <a:solidFill>
                   <a:srgbClr val="FFFFFF"/>
                 </a:solidFill>
@@ -10023,18 +10051,18 @@
         </p:nvSpPr>
         <p:spPr>
           <a:xfrm>
-            <a:off x="2529687" y="3520440"/>
-            <a:ext cx="2011680" cy="914400"/>
+            <a:off x="2095347" y="3703320"/>
+            <a:ext cx="2240280" cy="1097280"/>
           </a:xfrm>
           <a:prstGeom prst="roundRect">
             <a:avLst/>
           </a:prstGeom>
           <a:solidFill>
-            <a:srgbClr val="F5F9FC"/>
-          </a:solidFill>
-          <a:ln w="16510">
+            <a:srgbClr val="DEECF6"/>
+          </a:solidFill>
+          <a:ln w="25400">
             <a:solidFill>
-              <a:srgbClr val="D7E1EA"/>
+              <a:srgbClr val="2C6F9C"/>
             </a:solidFill>
           </a:ln>
           <a:effectLst/>
@@ -10054,12 +10082,12 @@
           </a:fontRef>
         </p:style>
         <p:txBody>
-          <a:bodyPr rtlCol="0" anchor="ctr" tIns="50800" bIns="50800" lIns="101600" rIns="101600" wrap="square"/>
-          <a:lstStyle/>
-          <a:p>
-            <a:pPr algn="ctr"/>
-            <a:r>
-              <a:rPr sz="1900" b="1">
+          <a:bodyPr rtlCol="0" anchor="ctr" tIns="63500" bIns="63500" lIns="127000" rIns="127000" wrap="square"/>
+          <a:lstStyle/>
+          <a:p>
+            <a:pPr algn="ctr"/>
+            <a:r>
+              <a:rPr sz="2400" b="1">
                 <a:solidFill>
                   <a:srgbClr val="0B3D5C"/>
                 </a:solidFill>
@@ -10078,8 +10106,8 @@
         </p:nvSpPr>
         <p:spPr>
           <a:xfrm>
-            <a:off x="4587087" y="3657600"/>
-            <a:ext cx="457200" cy="548640"/>
+            <a:off x="4408779" y="3931920"/>
+            <a:ext cx="640080" cy="640080"/>
           </a:xfrm>
           <a:prstGeom prst="rect">
             <a:avLst/>
@@ -10094,7 +10122,7 @@
           <a:p>
             <a:pPr algn="ctr"/>
             <a:r>
-              <a:rPr sz="3000" b="1">
+              <a:rPr sz="3600" b="1">
                 <a:solidFill>
                   <a:srgbClr val="F2A900"/>
                 </a:solidFill>
@@ -10113,8 +10141,8 @@
         </p:nvSpPr>
         <p:spPr>
           <a:xfrm>
-            <a:off x="5592927" y="2286000"/>
-            <a:ext cx="1005840" cy="1005840"/>
+            <a:off x="5455767" y="2148840"/>
+            <a:ext cx="1280160" cy="1280160"/>
           </a:xfrm>
           <a:prstGeom prst="ellipse">
             <a:avLst/>
@@ -10142,12 +10170,12 @@
           </a:fontRef>
         </p:style>
         <p:txBody>
-          <a:bodyPr rtlCol="0" anchor="ctr" tIns="50800" bIns="50800" lIns="101600" rIns="101600" wrap="square"/>
-          <a:lstStyle/>
-          <a:p>
-            <a:pPr algn="ctr"/>
-            <a:r>
-              <a:rPr sz="1700" b="1">
+          <a:bodyPr rtlCol="0" anchor="ctr" tIns="63500" bIns="63500" lIns="127000" rIns="127000" wrap="square"/>
+          <a:lstStyle/>
+          <a:p>
+            <a:pPr algn="ctr"/>
+            <a:r>
+              <a:rPr sz="2100" b="1">
                 <a:solidFill>
                   <a:srgbClr val="FFFFFF"/>
                 </a:solidFill>
@@ -10166,18 +10194,18 @@
         </p:nvSpPr>
         <p:spPr>
           <a:xfrm>
-            <a:off x="5090007" y="3520440"/>
-            <a:ext cx="2011680" cy="914400"/>
+            <a:off x="4975707" y="3703320"/>
+            <a:ext cx="2240280" cy="1097280"/>
           </a:xfrm>
           <a:prstGeom prst="roundRect">
             <a:avLst/>
           </a:prstGeom>
           <a:solidFill>
-            <a:srgbClr val="F5F9FC"/>
-          </a:solidFill>
-          <a:ln w="16510">
+            <a:srgbClr val="0B3D5C"/>
+          </a:solidFill>
+          <a:ln w="25400">
             <a:solidFill>
-              <a:srgbClr val="D7E1EA"/>
+              <a:srgbClr val="0B3D5C"/>
             </a:solidFill>
           </a:ln>
           <a:effectLst/>
@@ -10197,14 +10225,14 @@
           </a:fontRef>
         </p:style>
         <p:txBody>
-          <a:bodyPr rtlCol="0" anchor="ctr" tIns="50800" bIns="50800" lIns="101600" rIns="101600" wrap="square"/>
-          <a:lstStyle/>
-          <a:p>
-            <a:pPr algn="ctr"/>
-            <a:r>
-              <a:rPr sz="1900" b="1">
-                <a:solidFill>
-                  <a:srgbClr val="0B3D5C"/>
+          <a:bodyPr rtlCol="0" anchor="ctr" tIns="63500" bIns="63500" lIns="127000" rIns="127000" wrap="square"/>
+          <a:lstStyle/>
+          <a:p>
+            <a:pPr algn="ctr"/>
+            <a:r>
+              <a:rPr sz="2400" b="1">
+                <a:solidFill>
+                  <a:srgbClr val="FFFFFF"/>
                 </a:solidFill>
                 <a:latin typeface="Apple SD Gothic Neo"/>
               </a:rPr>
@@ -10221,8 +10249,8 @@
         </p:nvSpPr>
         <p:spPr>
           <a:xfrm>
-            <a:off x="7147407" y="3657600"/>
-            <a:ext cx="457200" cy="548640"/>
+            <a:off x="7289139" y="3931920"/>
+            <a:ext cx="640080" cy="640080"/>
           </a:xfrm>
           <a:prstGeom prst="rect">
             <a:avLst/>
@@ -10237,7 +10265,7 @@
           <a:p>
             <a:pPr algn="ctr"/>
             <a:r>
-              <a:rPr sz="3000" b="1">
+              <a:rPr sz="3600" b="1">
                 <a:solidFill>
                   <a:srgbClr val="F2A900"/>
                 </a:solidFill>
@@ -10256,8 +10284,8 @@
         </p:nvSpPr>
         <p:spPr>
           <a:xfrm>
-            <a:off x="8153247" y="2286000"/>
-            <a:ext cx="1005840" cy="1005840"/>
+            <a:off x="8336127" y="2148840"/>
+            <a:ext cx="1280160" cy="1280160"/>
           </a:xfrm>
           <a:prstGeom prst="ellipse">
             <a:avLst/>
@@ -10285,12 +10313,12 @@
           </a:fontRef>
         </p:style>
         <p:txBody>
-          <a:bodyPr rtlCol="0" anchor="ctr" tIns="50800" bIns="50800" lIns="101600" rIns="101600" wrap="square"/>
-          <a:lstStyle/>
-          <a:p>
-            <a:pPr algn="ctr"/>
-            <a:r>
-              <a:rPr sz="1700" b="1">
+          <a:bodyPr rtlCol="0" anchor="ctr" tIns="63500" bIns="63500" lIns="127000" rIns="127000" wrap="square"/>
+          <a:lstStyle/>
+          <a:p>
+            <a:pPr algn="ctr"/>
+            <a:r>
+              <a:rPr sz="2100" b="1">
                 <a:solidFill>
                   <a:srgbClr val="FFFFFF"/>
                 </a:solidFill>
@@ -10309,18 +10337,18 @@
         </p:nvSpPr>
         <p:spPr>
           <a:xfrm>
-            <a:off x="7650327" y="3520440"/>
-            <a:ext cx="2011680" cy="914400"/>
+            <a:off x="7856067" y="3703320"/>
+            <a:ext cx="2240280" cy="1097280"/>
           </a:xfrm>
           <a:prstGeom prst="roundRect">
             <a:avLst/>
           </a:prstGeom>
           <a:solidFill>
-            <a:srgbClr val="F5F9FC"/>
-          </a:solidFill>
-          <a:ln w="16510">
+            <a:srgbClr val="0B3D5C"/>
+          </a:solidFill>
+          <a:ln w="25400">
             <a:solidFill>
-              <a:srgbClr val="D7E1EA"/>
+              <a:srgbClr val="0B3D5C"/>
             </a:solidFill>
           </a:ln>
           <a:effectLst/>
@@ -10340,14 +10368,14 @@
           </a:fontRef>
         </p:style>
         <p:txBody>
-          <a:bodyPr rtlCol="0" anchor="ctr" tIns="50800" bIns="50800" lIns="101600" rIns="101600" wrap="square"/>
-          <a:lstStyle/>
-          <a:p>
-            <a:pPr algn="ctr"/>
-            <a:r>
-              <a:rPr sz="1900" b="1">
-                <a:solidFill>
-                  <a:srgbClr val="0B3D5C"/>
+          <a:bodyPr rtlCol="0" anchor="ctr" tIns="63500" bIns="63500" lIns="127000" rIns="127000" wrap="square"/>
+          <a:lstStyle/>
+          <a:p>
+            <a:pPr algn="ctr"/>
+            <a:r>
+              <a:rPr sz="2400" b="1">
+                <a:solidFill>
+                  <a:srgbClr val="FFFFFF"/>
                 </a:solidFill>
                 <a:latin typeface="Apple SD Gothic Neo"/>
               </a:rPr>
@@ -10364,8 +10392,8 @@
         </p:nvSpPr>
         <p:spPr>
           <a:xfrm>
-            <a:off x="548640" y="4937760"/>
-            <a:ext cx="11091672" cy="822960"/>
+            <a:off x="548640" y="5212080"/>
+            <a:ext cx="11091672" cy="914400"/>
           </a:xfrm>
           <a:prstGeom prst="rect">
             <a:avLst/>
@@ -10380,7 +10408,7 @@
           <a:p>
             <a:pPr algn="ctr"/>
             <a:r>
-              <a:rPr sz="2100" b="1">
+              <a:rPr sz="2400" b="1">
                 <a:solidFill>
                   <a:srgbClr val="0B3D5C"/>
                 </a:solidFill>
@@ -10417,8 +10445,8 @@
         </p:nvSpPr>
         <p:spPr>
           <a:xfrm>
-            <a:off x="548640" y="411480"/>
-            <a:ext cx="10972800" cy="822960"/>
+            <a:off x="548640" y="365760"/>
+            <a:ext cx="11064240" cy="914400"/>
           </a:xfrm>
           <a:prstGeom prst="rect">
             <a:avLst/>
@@ -10433,7 +10461,7 @@
           <a:p>
             <a:pPr algn="l"/>
             <a:r>
-              <a:rPr sz="3000" b="1">
+              <a:rPr sz="3600" b="1">
                 <a:solidFill>
                   <a:srgbClr val="0B3D5C"/>
                 </a:solidFill>
@@ -10452,8 +10480,8 @@
         </p:nvSpPr>
         <p:spPr>
           <a:xfrm>
-            <a:off x="566928" y="1207008"/>
-            <a:ext cx="2377440" cy="54864"/>
+            <a:off x="566928" y="1298448"/>
+            <a:ext cx="2651760" cy="64008"/>
           </a:xfrm>
           <a:prstGeom prst="rect">
             <a:avLst/>
@@ -10496,8 +10524,8 @@
         </p:nvSpPr>
         <p:spPr>
           <a:xfrm>
-            <a:off x="3032607" y="2286000"/>
-            <a:ext cx="1005840" cy="1005840"/>
+            <a:off x="2575407" y="2148840"/>
+            <a:ext cx="1280160" cy="1280160"/>
           </a:xfrm>
           <a:prstGeom prst="ellipse">
             <a:avLst/>
@@ -10525,12 +10553,12 @@
           </a:fontRef>
         </p:style>
         <p:txBody>
-          <a:bodyPr rtlCol="0" anchor="ctr" tIns="50800" bIns="50800" lIns="101600" rIns="101600" wrap="square"/>
-          <a:lstStyle/>
-          <a:p>
-            <a:pPr algn="ctr"/>
-            <a:r>
-              <a:rPr sz="1700" b="1">
+          <a:bodyPr rtlCol="0" anchor="ctr" tIns="63500" bIns="63500" lIns="127000" rIns="127000" wrap="square"/>
+          <a:lstStyle/>
+          <a:p>
+            <a:pPr algn="ctr"/>
+            <a:r>
+              <a:rPr sz="2100" b="1">
                 <a:solidFill>
                   <a:srgbClr val="FFFFFF"/>
                 </a:solidFill>
@@ -10549,18 +10577,18 @@
         </p:nvSpPr>
         <p:spPr>
           <a:xfrm>
-            <a:off x="2529687" y="3520440"/>
-            <a:ext cx="2011680" cy="914400"/>
+            <a:off x="2095347" y="3703320"/>
+            <a:ext cx="2240280" cy="1097280"/>
           </a:xfrm>
           <a:prstGeom prst="roundRect">
             <a:avLst/>
           </a:prstGeom>
           <a:solidFill>
-            <a:srgbClr val="F5F9FC"/>
-          </a:solidFill>
-          <a:ln w="16510">
+            <a:srgbClr val="DEECF6"/>
+          </a:solidFill>
+          <a:ln w="25400">
             <a:solidFill>
-              <a:srgbClr val="D7E1EA"/>
+              <a:srgbClr val="2C6F9C"/>
             </a:solidFill>
           </a:ln>
           <a:effectLst/>
@@ -10580,12 +10608,12 @@
           </a:fontRef>
         </p:style>
         <p:txBody>
-          <a:bodyPr rtlCol="0" anchor="ctr" tIns="50800" bIns="50800" lIns="101600" rIns="101600" wrap="square"/>
-          <a:lstStyle/>
-          <a:p>
-            <a:pPr algn="ctr"/>
-            <a:r>
-              <a:rPr sz="1900" b="1">
+          <a:bodyPr rtlCol="0" anchor="ctr" tIns="63500" bIns="63500" lIns="127000" rIns="127000" wrap="square"/>
+          <a:lstStyle/>
+          <a:p>
+            <a:pPr algn="ctr"/>
+            <a:r>
+              <a:rPr sz="2400" b="1">
                 <a:solidFill>
                   <a:srgbClr val="0B3D5C"/>
                 </a:solidFill>
@@ -10604,8 +10632,8 @@
         </p:nvSpPr>
         <p:spPr>
           <a:xfrm>
-            <a:off x="4587087" y="3657600"/>
-            <a:ext cx="457200" cy="548640"/>
+            <a:off x="4408779" y="3931920"/>
+            <a:ext cx="640080" cy="640080"/>
           </a:xfrm>
           <a:prstGeom prst="rect">
             <a:avLst/>
@@ -10620,7 +10648,7 @@
           <a:p>
             <a:pPr algn="ctr"/>
             <a:r>
-              <a:rPr sz="3000" b="1">
+              <a:rPr sz="3600" b="1">
                 <a:solidFill>
                   <a:srgbClr val="F2A900"/>
                 </a:solidFill>
@@ -10639,8 +10667,8 @@
         </p:nvSpPr>
         <p:spPr>
           <a:xfrm>
-            <a:off x="5592927" y="2286000"/>
-            <a:ext cx="1005840" cy="1005840"/>
+            <a:off x="5455767" y="2148840"/>
+            <a:ext cx="1280160" cy="1280160"/>
           </a:xfrm>
           <a:prstGeom prst="ellipse">
             <a:avLst/>
@@ -10668,12 +10696,12 @@
           </a:fontRef>
         </p:style>
         <p:txBody>
-          <a:bodyPr rtlCol="0" anchor="ctr" tIns="50800" bIns="50800" lIns="101600" rIns="101600" wrap="square"/>
-          <a:lstStyle/>
-          <a:p>
-            <a:pPr algn="ctr"/>
-            <a:r>
-              <a:rPr sz="1700" b="1">
+          <a:bodyPr rtlCol="0" anchor="ctr" tIns="63500" bIns="63500" lIns="127000" rIns="127000" wrap="square"/>
+          <a:lstStyle/>
+          <a:p>
+            <a:pPr algn="ctr"/>
+            <a:r>
+              <a:rPr sz="2100" b="1">
                 <a:solidFill>
                   <a:srgbClr val="FFFFFF"/>
                 </a:solidFill>
@@ -10692,18 +10720,18 @@
         </p:nvSpPr>
         <p:spPr>
           <a:xfrm>
-            <a:off x="5090007" y="3520440"/>
-            <a:ext cx="2011680" cy="914400"/>
+            <a:off x="4975707" y="3703320"/>
+            <a:ext cx="2240280" cy="1097280"/>
           </a:xfrm>
           <a:prstGeom prst="roundRect">
             <a:avLst/>
           </a:prstGeom>
           <a:solidFill>
-            <a:srgbClr val="F5F9FC"/>
-          </a:solidFill>
-          <a:ln w="16510">
+            <a:srgbClr val="DCF1EC"/>
+          </a:solidFill>
+          <a:ln w="25400">
             <a:solidFill>
-              <a:srgbClr val="D7E1EA"/>
+              <a:srgbClr val="1F9E8F"/>
             </a:solidFill>
           </a:ln>
           <a:effectLst/>
@@ -10723,12 +10751,12 @@
           </a:fontRef>
         </p:style>
         <p:txBody>
-          <a:bodyPr rtlCol="0" anchor="ctr" tIns="50800" bIns="50800" lIns="101600" rIns="101600" wrap="square"/>
-          <a:lstStyle/>
-          <a:p>
-            <a:pPr algn="ctr"/>
-            <a:r>
-              <a:rPr sz="1900" b="1">
+          <a:bodyPr rtlCol="0" anchor="ctr" tIns="63500" bIns="63500" lIns="127000" rIns="127000" wrap="square"/>
+          <a:lstStyle/>
+          <a:p>
+            <a:pPr algn="ctr"/>
+            <a:r>
+              <a:rPr sz="2400" b="1">
                 <a:solidFill>
                   <a:srgbClr val="0B3D5C"/>
                 </a:solidFill>
@@ -10747,8 +10775,8 @@
         </p:nvSpPr>
         <p:spPr>
           <a:xfrm>
-            <a:off x="7147407" y="3657600"/>
-            <a:ext cx="457200" cy="548640"/>
+            <a:off x="7289139" y="3931920"/>
+            <a:ext cx="640080" cy="640080"/>
           </a:xfrm>
           <a:prstGeom prst="rect">
             <a:avLst/>
@@ -10763,7 +10791,7 @@
           <a:p>
             <a:pPr algn="ctr"/>
             <a:r>
-              <a:rPr sz="3000" b="1">
+              <a:rPr sz="3600" b="1">
                 <a:solidFill>
                   <a:srgbClr val="F2A900"/>
                 </a:solidFill>
@@ -10782,8 +10810,8 @@
         </p:nvSpPr>
         <p:spPr>
           <a:xfrm>
-            <a:off x="8153247" y="2286000"/>
-            <a:ext cx="1005840" cy="1005840"/>
+            <a:off x="8336127" y="2148840"/>
+            <a:ext cx="1280160" cy="1280160"/>
           </a:xfrm>
           <a:prstGeom prst="ellipse">
             <a:avLst/>
@@ -10811,12 +10839,12 @@
           </a:fontRef>
         </p:style>
         <p:txBody>
-          <a:bodyPr rtlCol="0" anchor="ctr" tIns="50800" bIns="50800" lIns="101600" rIns="101600" wrap="square"/>
-          <a:lstStyle/>
-          <a:p>
-            <a:pPr algn="ctr"/>
-            <a:r>
-              <a:rPr sz="1700" b="1">
+          <a:bodyPr rtlCol="0" anchor="ctr" tIns="63500" bIns="63500" lIns="127000" rIns="127000" wrap="square"/>
+          <a:lstStyle/>
+          <a:p>
+            <a:pPr algn="ctr"/>
+            <a:r>
+              <a:rPr sz="2100" b="1">
                 <a:solidFill>
                   <a:srgbClr val="FFFFFF"/>
                 </a:solidFill>
@@ -10835,18 +10863,18 @@
         </p:nvSpPr>
         <p:spPr>
           <a:xfrm>
-            <a:off x="7650327" y="3520440"/>
-            <a:ext cx="2011680" cy="914400"/>
+            <a:off x="7856067" y="3703320"/>
+            <a:ext cx="2240280" cy="1097280"/>
           </a:xfrm>
           <a:prstGeom prst="roundRect">
             <a:avLst/>
           </a:prstGeom>
           <a:solidFill>
-            <a:srgbClr val="F5F9FC"/>
-          </a:solidFill>
-          <a:ln w="16510">
+            <a:srgbClr val="0B3D5C"/>
+          </a:solidFill>
+          <a:ln w="25400">
             <a:solidFill>
-              <a:srgbClr val="D7E1EA"/>
+              <a:srgbClr val="0B3D5C"/>
             </a:solidFill>
           </a:ln>
           <a:effectLst/>
@@ -10866,14 +10894,14 @@
           </a:fontRef>
         </p:style>
         <p:txBody>
-          <a:bodyPr rtlCol="0" anchor="ctr" tIns="50800" bIns="50800" lIns="101600" rIns="101600" wrap="square"/>
-          <a:lstStyle/>
-          <a:p>
-            <a:pPr algn="ctr"/>
-            <a:r>
-              <a:rPr sz="1900" b="1">
-                <a:solidFill>
-                  <a:srgbClr val="0B3D5C"/>
+          <a:bodyPr rtlCol="0" anchor="ctr" tIns="63500" bIns="63500" lIns="127000" rIns="127000" wrap="square"/>
+          <a:lstStyle/>
+          <a:p>
+            <a:pPr algn="ctr"/>
+            <a:r>
+              <a:rPr sz="2400" b="1">
+                <a:solidFill>
+                  <a:srgbClr val="FFFFFF"/>
                 </a:solidFill>
                 <a:latin typeface="Apple SD Gothic Neo"/>
               </a:rPr>
@@ -10890,8 +10918,8 @@
         </p:nvSpPr>
         <p:spPr>
           <a:xfrm>
-            <a:off x="548640" y="4937760"/>
-            <a:ext cx="11091672" cy="822960"/>
+            <a:off x="548640" y="5212080"/>
+            <a:ext cx="11091672" cy="914400"/>
           </a:xfrm>
           <a:prstGeom prst="rect">
             <a:avLst/>
@@ -10906,7 +10934,7 @@
           <a:p>
             <a:pPr algn="ctr"/>
             <a:r>
-              <a:rPr sz="2100" b="1">
+              <a:rPr sz="2400" b="1">
                 <a:solidFill>
                   <a:srgbClr val="0B3D5C"/>
                 </a:solidFill>
@@ -10943,8 +10971,8 @@
         </p:nvSpPr>
         <p:spPr>
           <a:xfrm>
-            <a:off x="548640" y="411480"/>
-            <a:ext cx="10972800" cy="822960"/>
+            <a:off x="548640" y="365760"/>
+            <a:ext cx="11064240" cy="914400"/>
           </a:xfrm>
           <a:prstGeom prst="rect">
             <a:avLst/>
@@ -10959,7 +10987,7 @@
           <a:p>
             <a:pPr algn="l"/>
             <a:r>
-              <a:rPr sz="3000" b="1">
+              <a:rPr sz="3600" b="1">
                 <a:solidFill>
                   <a:srgbClr val="0B3D5C"/>
                 </a:solidFill>
@@ -10978,8 +11006,8 @@
         </p:nvSpPr>
         <p:spPr>
           <a:xfrm>
-            <a:off x="566928" y="1207008"/>
-            <a:ext cx="2377440" cy="54864"/>
+            <a:off x="566928" y="1298448"/>
+            <a:ext cx="2651760" cy="64008"/>
           </a:xfrm>
           <a:prstGeom prst="rect">
             <a:avLst/>
@@ -11022,19 +11050,17 @@
         </p:nvSpPr>
         <p:spPr>
           <a:xfrm>
-            <a:off x="586587" y="2926080"/>
-            <a:ext cx="1645920" cy="914400"/>
+            <a:off x="188823" y="2834640"/>
+            <a:ext cx="1755648" cy="1143000"/>
           </a:xfrm>
           <a:prstGeom prst="roundRect">
             <a:avLst/>
           </a:prstGeom>
           <a:solidFill>
-            <a:srgbClr val="EEF3F7"/>
-          </a:solidFill>
-          <a:ln w="16510">
-            <a:solidFill>
-              <a:srgbClr val="0B3D5C"/>
-            </a:solidFill>
+            <a:srgbClr val="0B3D5C"/>
+          </a:solidFill>
+          <a:ln>
+            <a:noFill/>
           </a:ln>
           <a:effectLst/>
         </p:spPr>
@@ -11053,14 +11079,14 @@
           </a:fontRef>
         </p:style>
         <p:txBody>
-          <a:bodyPr rtlCol="0" anchor="ctr" tIns="50800" bIns="50800" lIns="101600" rIns="101600" wrap="square"/>
-          <a:lstStyle/>
-          <a:p>
-            <a:pPr algn="ctr"/>
-            <a:r>
-              <a:rPr sz="2000" b="1">
-                <a:solidFill>
-                  <a:srgbClr val="0B3D5C"/>
+          <a:bodyPr rtlCol="0" anchor="ctr" tIns="63500" bIns="63500" lIns="127000" rIns="127000" wrap="square"/>
+          <a:lstStyle/>
+          <a:p>
+            <a:pPr algn="ctr"/>
+            <a:r>
+              <a:rPr sz="2400" b="1">
+                <a:solidFill>
+                  <a:srgbClr val="FFFFFF"/>
                 </a:solidFill>
                 <a:latin typeface="Apple SD Gothic Neo"/>
               </a:rPr>
@@ -11077,19 +11103,17 @@
         </p:nvSpPr>
         <p:spPr>
           <a:xfrm>
-            <a:off x="2461107" y="2926080"/>
-            <a:ext cx="1645920" cy="914400"/>
+            <a:off x="2200503" y="2834640"/>
+            <a:ext cx="1755648" cy="1143000"/>
           </a:xfrm>
           <a:prstGeom prst="roundRect">
             <a:avLst/>
           </a:prstGeom>
           <a:solidFill>
-            <a:srgbClr val="EEF3F7"/>
-          </a:solidFill>
-          <a:ln w="16510">
-            <a:solidFill>
-              <a:srgbClr val="0B3D5C"/>
-            </a:solidFill>
+            <a:srgbClr val="0B3D5C"/>
+          </a:solidFill>
+          <a:ln>
+            <a:noFill/>
           </a:ln>
           <a:effectLst/>
         </p:spPr>
@@ -11108,14 +11132,14 @@
           </a:fontRef>
         </p:style>
         <p:txBody>
-          <a:bodyPr rtlCol="0" anchor="ctr" tIns="50800" bIns="50800" lIns="101600" rIns="101600" wrap="square"/>
-          <a:lstStyle/>
-          <a:p>
-            <a:pPr algn="ctr"/>
-            <a:r>
-              <a:rPr sz="2000" b="1">
-                <a:solidFill>
-                  <a:srgbClr val="0B3D5C"/>
+          <a:bodyPr rtlCol="0" anchor="ctr" tIns="63500" bIns="63500" lIns="127000" rIns="127000" wrap="square"/>
+          <a:lstStyle/>
+          <a:p>
+            <a:pPr algn="ctr"/>
+            <a:r>
+              <a:rPr sz="2400" b="1">
+                <a:solidFill>
+                  <a:srgbClr val="FFFFFF"/>
                 </a:solidFill>
                 <a:latin typeface="Apple SD Gothic Neo"/>
               </a:rPr>
@@ -11132,19 +11156,17 @@
         </p:nvSpPr>
         <p:spPr>
           <a:xfrm>
-            <a:off x="4335627" y="2926080"/>
-            <a:ext cx="1645920" cy="914400"/>
+            <a:off x="4212183" y="2834640"/>
+            <a:ext cx="1755648" cy="1143000"/>
           </a:xfrm>
           <a:prstGeom prst="roundRect">
             <a:avLst/>
           </a:prstGeom>
           <a:solidFill>
-            <a:srgbClr val="EEF3F7"/>
-          </a:solidFill>
-          <a:ln w="16510">
-            <a:solidFill>
-              <a:srgbClr val="0B3D5C"/>
-            </a:solidFill>
+            <a:srgbClr val="0B3D5C"/>
+          </a:solidFill>
+          <a:ln>
+            <a:noFill/>
           </a:ln>
           <a:effectLst/>
         </p:spPr>
@@ -11163,14 +11185,14 @@
           </a:fontRef>
         </p:style>
         <p:txBody>
-          <a:bodyPr rtlCol="0" anchor="ctr" tIns="50800" bIns="50800" lIns="101600" rIns="101600" wrap="square"/>
-          <a:lstStyle/>
-          <a:p>
-            <a:pPr algn="ctr"/>
-            <a:r>
-              <a:rPr sz="2000" b="1">
-                <a:solidFill>
-                  <a:srgbClr val="0B3D5C"/>
+          <a:bodyPr rtlCol="0" anchor="ctr" tIns="63500" bIns="63500" lIns="127000" rIns="127000" wrap="square"/>
+          <a:lstStyle/>
+          <a:p>
+            <a:pPr algn="ctr"/>
+            <a:r>
+              <a:rPr sz="2400" b="1">
+                <a:solidFill>
+                  <a:srgbClr val="FFFFFF"/>
                 </a:solidFill>
                 <a:latin typeface="Apple SD Gothic Neo"/>
               </a:rPr>
@@ -11187,19 +11209,17 @@
         </p:nvSpPr>
         <p:spPr>
           <a:xfrm>
-            <a:off x="6210147" y="2926080"/>
-            <a:ext cx="1645920" cy="914400"/>
+            <a:off x="6223863" y="2834640"/>
+            <a:ext cx="1755648" cy="1143000"/>
           </a:xfrm>
           <a:prstGeom prst="roundRect">
             <a:avLst/>
           </a:prstGeom>
           <a:solidFill>
-            <a:srgbClr val="EEF3F7"/>
-          </a:solidFill>
-          <a:ln w="16510">
-            <a:solidFill>
-              <a:srgbClr val="0B3D5C"/>
-            </a:solidFill>
+            <a:srgbClr val="0B3D5C"/>
+          </a:solidFill>
+          <a:ln>
+            <a:noFill/>
           </a:ln>
           <a:effectLst/>
         </p:spPr>
@@ -11218,14 +11238,14 @@
           </a:fontRef>
         </p:style>
         <p:txBody>
-          <a:bodyPr rtlCol="0" anchor="ctr" tIns="50800" bIns="50800" lIns="101600" rIns="101600" wrap="square"/>
-          <a:lstStyle/>
-          <a:p>
-            <a:pPr algn="ctr"/>
-            <a:r>
-              <a:rPr sz="2000" b="1">
-                <a:solidFill>
-                  <a:srgbClr val="0B3D5C"/>
+          <a:bodyPr rtlCol="0" anchor="ctr" tIns="63500" bIns="63500" lIns="127000" rIns="127000" wrap="square"/>
+          <a:lstStyle/>
+          <a:p>
+            <a:pPr algn="ctr"/>
+            <a:r>
+              <a:rPr sz="2400" b="1">
+                <a:solidFill>
+                  <a:srgbClr val="FFFFFF"/>
                 </a:solidFill>
                 <a:latin typeface="Apple SD Gothic Neo"/>
               </a:rPr>
@@ -11242,19 +11262,17 @@
         </p:nvSpPr>
         <p:spPr>
           <a:xfrm>
-            <a:off x="8084667" y="2926080"/>
-            <a:ext cx="1645920" cy="914400"/>
+            <a:off x="8235543" y="2834640"/>
+            <a:ext cx="1755648" cy="1143000"/>
           </a:xfrm>
           <a:prstGeom prst="roundRect">
             <a:avLst/>
           </a:prstGeom>
           <a:solidFill>
-            <a:srgbClr val="EEF3F7"/>
-          </a:solidFill>
-          <a:ln w="16510">
-            <a:solidFill>
-              <a:srgbClr val="0B3D5C"/>
-            </a:solidFill>
+            <a:srgbClr val="0B3D5C"/>
+          </a:solidFill>
+          <a:ln>
+            <a:noFill/>
           </a:ln>
           <a:effectLst/>
         </p:spPr>
@@ -11273,14 +11291,14 @@
           </a:fontRef>
         </p:style>
         <p:txBody>
-          <a:bodyPr rtlCol="0" anchor="ctr" tIns="50800" bIns="50800" lIns="101600" rIns="101600" wrap="square"/>
-          <a:lstStyle/>
-          <a:p>
-            <a:pPr algn="ctr"/>
-            <a:r>
-              <a:rPr sz="2000" b="1">
-                <a:solidFill>
-                  <a:srgbClr val="0B3D5C"/>
+          <a:bodyPr rtlCol="0" anchor="ctr" tIns="63500" bIns="63500" lIns="127000" rIns="127000" wrap="square"/>
+          <a:lstStyle/>
+          <a:p>
+            <a:pPr algn="ctr"/>
+            <a:r>
+              <a:rPr sz="2400" b="1">
+                <a:solidFill>
+                  <a:srgbClr val="FFFFFF"/>
                 </a:solidFill>
                 <a:latin typeface="Apple SD Gothic Neo"/>
               </a:rPr>
@@ -11297,19 +11315,17 @@
         </p:nvSpPr>
         <p:spPr>
           <a:xfrm>
-            <a:off x="9959187" y="2926080"/>
-            <a:ext cx="1645920" cy="914400"/>
+            <a:off x="10247223" y="2834640"/>
+            <a:ext cx="1755648" cy="1143000"/>
           </a:xfrm>
           <a:prstGeom prst="roundRect">
             <a:avLst/>
           </a:prstGeom>
           <a:solidFill>
-            <a:srgbClr val="EEF3F7"/>
-          </a:solidFill>
-          <a:ln w="16510">
-            <a:solidFill>
-              <a:srgbClr val="0B3D5C"/>
-            </a:solidFill>
+            <a:srgbClr val="0B3D5C"/>
+          </a:solidFill>
+          <a:ln>
+            <a:noFill/>
           </a:ln>
           <a:effectLst/>
         </p:spPr>
@@ -11328,14 +11344,14 @@
           </a:fontRef>
         </p:style>
         <p:txBody>
-          <a:bodyPr rtlCol="0" anchor="ctr" tIns="50800" bIns="50800" lIns="101600" rIns="101600" wrap="square"/>
-          <a:lstStyle/>
-          <a:p>
-            <a:pPr algn="ctr"/>
-            <a:r>
-              <a:rPr sz="2000" b="1">
-                <a:solidFill>
-                  <a:srgbClr val="0B3D5C"/>
+          <a:bodyPr rtlCol="0" anchor="ctr" tIns="63500" bIns="63500" lIns="127000" rIns="127000" wrap="square"/>
+          <a:lstStyle/>
+          <a:p>
+            <a:pPr algn="ctr"/>
+            <a:r>
+              <a:rPr sz="2400" b="1">
+                <a:solidFill>
+                  <a:srgbClr val="FFFFFF"/>
                 </a:solidFill>
                 <a:latin typeface="Apple SD Gothic Neo"/>
               </a:rPr>

--- a/docs/presentation/보험발표-편집가능.pptx
+++ b/docs/presentation/보험발표-편집가능.pptx
@@ -6053,11 +6053,11 @@
             <a:avLst/>
           </a:prstGeom>
           <a:solidFill>
-            <a:srgbClr val="DEECF6"/>
+            <a:srgbClr val="DCE7F8"/>
           </a:solidFill>
           <a:ln w="19050">
             <a:solidFill>
-              <a:srgbClr val="2C6F9C"/>
+              <a:srgbClr val="1E64C8"/>
             </a:solidFill>
           </a:ln>
           <a:effectLst/>
@@ -7463,7 +7463,7 @@
             <a:avLst/>
           </a:prstGeom>
           <a:solidFill>
-            <a:srgbClr val="2C6F9C"/>
+            <a:srgbClr val="1E64C8"/>
           </a:solidFill>
           <a:ln>
             <a:noFill/>
@@ -7598,7 +7598,7 @@
             <a:avLst/>
           </a:prstGeom>
           <a:solidFill>
-            <a:srgbClr val="1F9E8F"/>
+            <a:srgbClr val="D8392B"/>
           </a:solidFill>
           <a:ln>
             <a:noFill/>
@@ -7733,7 +7733,7 @@
             <a:avLst/>
           </a:prstGeom>
           <a:solidFill>
-            <a:srgbClr val="0B3D5C"/>
+            <a:srgbClr val="F4B400"/>
           </a:solidFill>
           <a:ln>
             <a:noFill/>
@@ -7762,7 +7762,7 @@
             <a:r>
               <a:rPr sz="2400" b="1">
                 <a:solidFill>
-                  <a:srgbClr val="FFFFFF"/>
+                  <a:srgbClr val="0B3D5C"/>
                 </a:solidFill>
                 <a:latin typeface="Apple SD Gothic Neo"/>
               </a:rPr>
@@ -8636,11 +8636,11 @@
             <a:avLst/>
           </a:prstGeom>
           <a:solidFill>
-            <a:srgbClr val="DEECF6"/>
+            <a:srgbClr val="DCE7F8"/>
           </a:solidFill>
           <a:ln w="25400">
             <a:solidFill>
-              <a:srgbClr val="1F9E8F"/>
+              <a:srgbClr val="D8392B"/>
             </a:solidFill>
           </a:ln>
           <a:effectLst/>
@@ -8676,7 +8676,7 @@
             <a:r>
               <a:rPr sz="2200" b="1">
                 <a:solidFill>
-                  <a:srgbClr val="1F9E8F"/>
+                  <a:srgbClr val="D8392B"/>
                 </a:solidFill>
                 <a:latin typeface="Apple SD Gothic Neo"/>
               </a:rPr>
@@ -8914,11 +8914,11 @@
             <a:avLst/>
           </a:prstGeom>
           <a:solidFill>
-            <a:srgbClr val="DEECF6"/>
+            <a:srgbClr val="DCE7F8"/>
           </a:solidFill>
           <a:ln w="22860">
             <a:solidFill>
-              <a:srgbClr val="2C6F9C"/>
+              <a:srgbClr val="1E64C8"/>
             </a:solidFill>
           </a:ln>
           <a:effectLst/>
@@ -9004,11 +9004,11 @@
             <a:avLst/>
           </a:prstGeom>
           <a:solidFill>
-            <a:srgbClr val="DEECF6"/>
+            <a:srgbClr val="DCE7F8"/>
           </a:solidFill>
           <a:ln w="22860">
             <a:solidFill>
-              <a:srgbClr val="2C6F9C"/>
+              <a:srgbClr val="1E64C8"/>
             </a:solidFill>
           </a:ln>
           <a:effectLst/>
@@ -9094,11 +9094,11 @@
             <a:avLst/>
           </a:prstGeom>
           <a:solidFill>
-            <a:srgbClr val="DEECF6"/>
+            <a:srgbClr val="DCE7F8"/>
           </a:solidFill>
           <a:ln w="22860">
             <a:solidFill>
-              <a:srgbClr val="2C6F9C"/>
+              <a:srgbClr val="1E64C8"/>
             </a:solidFill>
           </a:ln>
           <a:effectLst/>
@@ -9184,11 +9184,11 @@
             <a:avLst/>
           </a:prstGeom>
           <a:solidFill>
-            <a:srgbClr val="0B3D5C"/>
+            <a:srgbClr val="F4B400"/>
           </a:solidFill>
           <a:ln w="22860">
             <a:solidFill>
-              <a:srgbClr val="2C6F9C"/>
+              <a:srgbClr val="1E64C8"/>
             </a:solidFill>
           </a:ln>
           <a:effectLst/>
@@ -9215,7 +9215,7 @@
             <a:r>
               <a:rPr sz="2300" b="1">
                 <a:solidFill>
-                  <a:srgbClr val="FFFFFF"/>
+                  <a:srgbClr val="0B3D5C"/>
                 </a:solidFill>
                 <a:latin typeface="Apple SD Gothic Neo"/>
               </a:rPr>
@@ -9336,7 +9336,7 @@
             <a:avLst/>
           </a:prstGeom>
           <a:solidFill>
-            <a:srgbClr val="2C6F9C"/>
+            <a:srgbClr val="1E64C8"/>
           </a:solidFill>
           <a:ln>
             <a:noFill/>
@@ -9389,11 +9389,11 @@
             <a:avLst/>
           </a:prstGeom>
           <a:solidFill>
-            <a:srgbClr val="DEECF6"/>
+            <a:srgbClr val="DCE7F8"/>
           </a:solidFill>
           <a:ln w="25400">
             <a:solidFill>
-              <a:srgbClr val="2C6F9C"/>
+              <a:srgbClr val="1E64C8"/>
             </a:solidFill>
           </a:ln>
           <a:effectLst/>
@@ -9479,7 +9479,7 @@
             <a:avLst/>
           </a:prstGeom>
           <a:solidFill>
-            <a:srgbClr val="2C6F9C"/>
+            <a:srgbClr val="1E64C8"/>
           </a:solidFill>
           <a:ln>
             <a:noFill/>
@@ -9532,11 +9532,11 @@
             <a:avLst/>
           </a:prstGeom>
           <a:solidFill>
-            <a:srgbClr val="DEECF6"/>
+            <a:srgbClr val="DCE7F8"/>
           </a:solidFill>
           <a:ln w="25400">
             <a:solidFill>
-              <a:srgbClr val="2C6F9C"/>
+              <a:srgbClr val="1E64C8"/>
             </a:solidFill>
           </a:ln>
           <a:effectLst/>
@@ -9622,7 +9622,7 @@
             <a:avLst/>
           </a:prstGeom>
           <a:solidFill>
-            <a:srgbClr val="1F9E8F"/>
+            <a:srgbClr val="D8392B"/>
           </a:solidFill>
           <a:ln>
             <a:noFill/>
@@ -9675,11 +9675,11 @@
             <a:avLst/>
           </a:prstGeom>
           <a:solidFill>
-            <a:srgbClr val="DCF1EC"/>
+            <a:srgbClr val="F8DEDB"/>
           </a:solidFill>
           <a:ln w="25400">
             <a:solidFill>
-              <a:srgbClr val="1F9E8F"/>
+              <a:srgbClr val="D8392B"/>
             </a:solidFill>
           </a:ln>
           <a:effectLst/>
@@ -9765,7 +9765,7 @@
             <a:avLst/>
           </a:prstGeom>
           <a:solidFill>
-            <a:srgbClr val="0B3D5C"/>
+            <a:srgbClr val="F4B400"/>
           </a:solidFill>
           <a:ln>
             <a:noFill/>
@@ -9794,7 +9794,7 @@
             <a:r>
               <a:rPr sz="2100" b="1">
                 <a:solidFill>
-                  <a:srgbClr val="FFFFFF"/>
+                  <a:srgbClr val="0B3D5C"/>
                 </a:solidFill>
                 <a:latin typeface="Apple SD Gothic Neo"/>
               </a:rPr>
@@ -9818,11 +9818,11 @@
             <a:avLst/>
           </a:prstGeom>
           <a:solidFill>
-            <a:srgbClr val="0B3D5C"/>
+            <a:srgbClr val="F4B400"/>
           </a:solidFill>
           <a:ln w="25400">
             <a:solidFill>
-              <a:srgbClr val="0B3D5C"/>
+              <a:srgbClr val="F4B400"/>
             </a:solidFill>
           </a:ln>
           <a:effectLst/>
@@ -9849,7 +9849,7 @@
             <a:r>
               <a:rPr sz="2400" b="1">
                 <a:solidFill>
-                  <a:srgbClr val="FFFFFF"/>
+                  <a:srgbClr val="0B3D5C"/>
                 </a:solidFill>
                 <a:latin typeface="Apple SD Gothic Neo"/>
               </a:rPr>
@@ -10005,7 +10005,7 @@
             <a:avLst/>
           </a:prstGeom>
           <a:solidFill>
-            <a:srgbClr val="2C6F9C"/>
+            <a:srgbClr val="1E64C8"/>
           </a:solidFill>
           <a:ln>
             <a:noFill/>
@@ -10058,11 +10058,11 @@
             <a:avLst/>
           </a:prstGeom>
           <a:solidFill>
-            <a:srgbClr val="DEECF6"/>
+            <a:srgbClr val="DCE7F8"/>
           </a:solidFill>
           <a:ln w="25400">
             <a:solidFill>
-              <a:srgbClr val="2C6F9C"/>
+              <a:srgbClr val="1E64C8"/>
             </a:solidFill>
           </a:ln>
           <a:effectLst/>
@@ -10148,7 +10148,7 @@
             <a:avLst/>
           </a:prstGeom>
           <a:solidFill>
-            <a:srgbClr val="0B3D5C"/>
+            <a:srgbClr val="F4B400"/>
           </a:solidFill>
           <a:ln>
             <a:noFill/>
@@ -10177,7 +10177,7 @@
             <a:r>
               <a:rPr sz="2100" b="1">
                 <a:solidFill>
-                  <a:srgbClr val="FFFFFF"/>
+                  <a:srgbClr val="0B3D5C"/>
                 </a:solidFill>
                 <a:latin typeface="Apple SD Gothic Neo"/>
               </a:rPr>
@@ -10201,11 +10201,11 @@
             <a:avLst/>
           </a:prstGeom>
           <a:solidFill>
-            <a:srgbClr val="0B3D5C"/>
+            <a:srgbClr val="F4B400"/>
           </a:solidFill>
           <a:ln w="25400">
             <a:solidFill>
-              <a:srgbClr val="0B3D5C"/>
+              <a:srgbClr val="F4B400"/>
             </a:solidFill>
           </a:ln>
           <a:effectLst/>
@@ -10232,7 +10232,7 @@
             <a:r>
               <a:rPr sz="2400" b="1">
                 <a:solidFill>
-                  <a:srgbClr val="FFFFFF"/>
+                  <a:srgbClr val="0B3D5C"/>
                 </a:solidFill>
                 <a:latin typeface="Apple SD Gothic Neo"/>
               </a:rPr>
@@ -10291,7 +10291,7 @@
             <a:avLst/>
           </a:prstGeom>
           <a:solidFill>
-            <a:srgbClr val="0B3D5C"/>
+            <a:srgbClr val="F4B400"/>
           </a:solidFill>
           <a:ln>
             <a:noFill/>
@@ -10320,7 +10320,7 @@
             <a:r>
               <a:rPr sz="2100" b="1">
                 <a:solidFill>
-                  <a:srgbClr val="FFFFFF"/>
+                  <a:srgbClr val="0B3D5C"/>
                 </a:solidFill>
                 <a:latin typeface="Apple SD Gothic Neo"/>
               </a:rPr>
@@ -10344,11 +10344,11 @@
             <a:avLst/>
           </a:prstGeom>
           <a:solidFill>
-            <a:srgbClr val="0B3D5C"/>
+            <a:srgbClr val="F4B400"/>
           </a:solidFill>
           <a:ln w="25400">
             <a:solidFill>
-              <a:srgbClr val="0B3D5C"/>
+              <a:srgbClr val="F4B400"/>
             </a:solidFill>
           </a:ln>
           <a:effectLst/>
@@ -10375,7 +10375,7 @@
             <a:r>
               <a:rPr sz="2400" b="1">
                 <a:solidFill>
-                  <a:srgbClr val="FFFFFF"/>
+                  <a:srgbClr val="0B3D5C"/>
                 </a:solidFill>
                 <a:latin typeface="Apple SD Gothic Neo"/>
               </a:rPr>
@@ -10531,7 +10531,7 @@
             <a:avLst/>
           </a:prstGeom>
           <a:solidFill>
-            <a:srgbClr val="2C6F9C"/>
+            <a:srgbClr val="1E64C8"/>
           </a:solidFill>
           <a:ln>
             <a:noFill/>
@@ -10584,11 +10584,11 @@
             <a:avLst/>
           </a:prstGeom>
           <a:solidFill>
-            <a:srgbClr val="DEECF6"/>
+            <a:srgbClr val="DCE7F8"/>
           </a:solidFill>
           <a:ln w="25400">
             <a:solidFill>
-              <a:srgbClr val="2C6F9C"/>
+              <a:srgbClr val="1E64C8"/>
             </a:solidFill>
           </a:ln>
           <a:effectLst/>
@@ -10674,7 +10674,7 @@
             <a:avLst/>
           </a:prstGeom>
           <a:solidFill>
-            <a:srgbClr val="1F9E8F"/>
+            <a:srgbClr val="D8392B"/>
           </a:solidFill>
           <a:ln>
             <a:noFill/>
@@ -10727,11 +10727,11 @@
             <a:avLst/>
           </a:prstGeom>
           <a:solidFill>
-            <a:srgbClr val="DCF1EC"/>
+            <a:srgbClr val="F8DEDB"/>
           </a:solidFill>
           <a:ln w="25400">
             <a:solidFill>
-              <a:srgbClr val="1F9E8F"/>
+              <a:srgbClr val="D8392B"/>
             </a:solidFill>
           </a:ln>
           <a:effectLst/>
@@ -10817,7 +10817,7 @@
             <a:avLst/>
           </a:prstGeom>
           <a:solidFill>
-            <a:srgbClr val="0B3D5C"/>
+            <a:srgbClr val="F4B400"/>
           </a:solidFill>
           <a:ln>
             <a:noFill/>
@@ -10846,7 +10846,7 @@
             <a:r>
               <a:rPr sz="2100" b="1">
                 <a:solidFill>
-                  <a:srgbClr val="FFFFFF"/>
+                  <a:srgbClr val="0B3D5C"/>
                 </a:solidFill>
                 <a:latin typeface="Apple SD Gothic Neo"/>
               </a:rPr>
@@ -10870,11 +10870,11 @@
             <a:avLst/>
           </a:prstGeom>
           <a:solidFill>
-            <a:srgbClr val="0B3D5C"/>
+            <a:srgbClr val="F4B400"/>
           </a:solidFill>
           <a:ln w="25400">
             <a:solidFill>
-              <a:srgbClr val="0B3D5C"/>
+              <a:srgbClr val="F4B400"/>
             </a:solidFill>
           </a:ln>
           <a:effectLst/>
@@ -10901,7 +10901,7 @@
             <a:r>
               <a:rPr sz="2400" b="1">
                 <a:solidFill>
-                  <a:srgbClr val="FFFFFF"/>
+                  <a:srgbClr val="0B3D5C"/>
                 </a:solidFill>
                 <a:latin typeface="Apple SD Gothic Neo"/>
               </a:rPr>

--- a/docs/presentation/보험발표-편집가능.pptx
+++ b/docs/presentation/보험발표-편집가능.pptx
@@ -3123,8 +3123,43 @@
         </p:nvSpPr>
         <p:spPr>
           <a:xfrm>
-            <a:off x="914400" y="2377440"/>
-            <a:ext cx="10332720" cy="1280160"/>
+            <a:off x="914400" y="2148840"/>
+            <a:ext cx="10332720" cy="548640"/>
+          </a:xfrm>
+          <a:prstGeom prst="rect">
+            <a:avLst/>
+          </a:prstGeom>
+          <a:noFill/>
+        </p:spPr>
+        <p:txBody>
+          <a:bodyPr wrap="square" anchor="t">
+            <a:spAutoFit/>
+          </a:bodyPr>
+          <a:lstStyle/>
+          <a:p>
+            <a:pPr algn="l"/>
+            <a:r>
+              <a:rPr sz="2000" b="1">
+                <a:solidFill>
+                  <a:srgbClr val="F2A900"/>
+                </a:solidFill>
+                <a:latin typeface="Apple SD Gothic Neo"/>
+              </a:rPr>
+              <a:t>기말 발표</a:t>
+            </a:r>
+          </a:p>
+        </p:txBody>
+      </p:sp>
+      <p:sp>
+        <p:nvSpPr>
+          <p:cNvPr id="3" name="TextBox 2"/>
+          <p:cNvSpPr txBox="1"/>
+          <p:nvPr/>
+        </p:nvSpPr>
+        <p:spPr>
+          <a:xfrm>
+            <a:off x="914400" y="2697480"/>
+            <a:ext cx="10515600" cy="1280160"/>
           </a:xfrm>
           <a:prstGeom prst="rect">
             <a:avLst/>
@@ -3139,7 +3174,7 @@
           <a:p>
             <a:pPr algn="l"/>
             <a:r>
-              <a:rPr sz="4600" b="1">
+              <a:rPr sz="4800" b="1">
                 <a:solidFill>
                   <a:srgbClr val="FFFFFF"/>
                 </a:solidFill>
@@ -3152,13 +3187,57 @@
       </p:sp>
       <p:sp>
         <p:nvSpPr>
-          <p:cNvPr id="3" name="TextBox 2"/>
+          <p:cNvPr id="4" name="Rectangle 3"/>
+          <p:cNvSpPr/>
+          <p:nvPr/>
+        </p:nvSpPr>
+        <p:spPr>
+          <a:xfrm>
+            <a:off x="932688" y="3977639"/>
+            <a:ext cx="2743200" cy="73152"/>
+          </a:xfrm>
+          <a:prstGeom prst="rect">
+            <a:avLst/>
+          </a:prstGeom>
+          <a:solidFill>
+            <a:srgbClr val="F2A900"/>
+          </a:solidFill>
+          <a:ln>
+            <a:noFill/>
+          </a:ln>
+          <a:effectLst/>
+        </p:spPr>
+        <p:style>
+          <a:lnRef idx="1">
+            <a:schemeClr val="accent1"/>
+          </a:lnRef>
+          <a:fillRef idx="3">
+            <a:schemeClr val="accent1"/>
+          </a:fillRef>
+          <a:effectRef idx="2">
+            <a:schemeClr val="accent1"/>
+          </a:effectRef>
+          <a:fontRef idx="minor">
+            <a:schemeClr val="lt1"/>
+          </a:fontRef>
+        </p:style>
+        <p:txBody>
+          <a:bodyPr rtlCol="0" anchor="ctr"/>
+          <a:lstStyle/>
+          <a:p>
+            <a:pPr algn="ctr"/>
+          </a:p>
+        </p:txBody>
+      </p:sp>
+      <p:sp>
+        <p:nvSpPr>
+          <p:cNvPr id="5" name="TextBox 4"/>
           <p:cNvSpPr txBox="1"/>
           <p:nvPr/>
         </p:nvSpPr>
         <p:spPr>
           <a:xfrm>
-            <a:off x="914400" y="3703320"/>
+            <a:off x="914400" y="4206240"/>
             <a:ext cx="10332720" cy="822960"/>
           </a:xfrm>
           <a:prstGeom prst="rect">
@@ -3174,9 +3253,9 @@
           <a:p>
             <a:pPr algn="l"/>
             <a:r>
-              <a:rPr sz="2800" b="1">
-                <a:solidFill>
-                  <a:srgbClr val="F2A900"/>
+              <a:rPr sz="2600" b="1">
+                <a:solidFill>
+                  <a:srgbClr val="CFE0EC"/>
                 </a:solidFill>
                 <a:latin typeface="Apple SD Gothic Neo"/>
               </a:rPr>
@@ -7456,8 +7535,8 @@
         </p:nvSpPr>
         <p:spPr>
           <a:xfrm>
-            <a:off x="1600200" y="1600200"/>
-            <a:ext cx="2103120" cy="2103120"/>
+            <a:off x="1417320" y="1737360"/>
+            <a:ext cx="2286000" cy="2286000"/>
           </a:xfrm>
           <a:prstGeom prst="ellipse">
             <a:avLst/>
@@ -7485,12 +7564,12 @@
           </a:fontRef>
         </p:style>
         <p:txBody>
-          <a:bodyPr rtlCol="0" anchor="ctr" tIns="63500" bIns="63500" lIns="127000" rIns="127000" wrap="square"/>
+          <a:bodyPr rtlCol="0" anchor="ctr" tIns="63500" bIns="63500" lIns="127000" rIns="127000" wrap="none"/>
           <a:lstStyle/>
           <a:p>
             <a:pPr algn="ctr"/>
             <a:r>
-              <a:rPr sz="2400" b="1">
+              <a:rPr sz="2800" b="1">
                 <a:solidFill>
                   <a:srgbClr val="FFFFFF"/>
                 </a:solidFill>
@@ -7509,8 +7588,8 @@
         </p:nvSpPr>
         <p:spPr>
           <a:xfrm>
-            <a:off x="1051560" y="3840480"/>
-            <a:ext cx="3200400" cy="640080"/>
+            <a:off x="502920" y="4343400"/>
+            <a:ext cx="4114800" cy="731520"/>
           </a:xfrm>
           <a:prstGeom prst="rect">
             <a:avLst/>
@@ -7518,81 +7597,34 @@
           <a:noFill/>
         </p:spPr>
         <p:txBody>
-          <a:bodyPr wrap="square" anchor="t">
+          <a:bodyPr wrap="square" anchor="ctr">
             <a:spAutoFit/>
           </a:bodyPr>
           <a:lstStyle/>
           <a:p>
             <a:pPr algn="ctr"/>
             <a:r>
-              <a:rPr sz="2800" b="1">
+              <a:rPr sz="2300" b="1">
                 <a:solidFill>
                   <a:srgbClr val="0B3D5C"/>
                 </a:solidFill>
                 <a:latin typeface="Apple SD Gothic Neo"/>
               </a:rPr>
-              <a:t>고객</a:t>
-            </a:r>
-          </a:p>
-        </p:txBody>
-      </p:sp>
-      <p:sp>
-        <p:nvSpPr>
-          <p:cNvPr id="6" name="TextBox 5"/>
-          <p:cNvSpPr txBox="1"/>
-          <p:nvPr/>
-        </p:nvSpPr>
-        <p:spPr>
-          <a:xfrm>
-            <a:off x="1051560" y="4526280"/>
-            <a:ext cx="3200400" cy="1097280"/>
-          </a:xfrm>
-          <a:prstGeom prst="rect">
-            <a:avLst/>
-          </a:prstGeom>
-          <a:noFill/>
-        </p:spPr>
-        <p:txBody>
-          <a:bodyPr wrap="square" anchor="t">
-            <a:spAutoFit/>
-          </a:bodyPr>
-          <a:lstStyle/>
-          <a:p>
-            <a:pPr algn="ctr"/>
-            <a:r>
-              <a:rPr sz="2200" b="0">
-                <a:solidFill>
-                  <a:srgbClr val="5B7185"/>
-                </a:solidFill>
-                <a:latin typeface="Apple SD Gothic Neo"/>
-              </a:rPr>
-              <a:t>보험에 가입하고</a:t>
-            </a:r>
-          </a:p>
-          <a:p>
-            <a:pPr algn="ctr"/>
-            <a:r>
-              <a:rPr sz="2200" b="0">
-                <a:solidFill>
-                  <a:srgbClr val="5B7185"/>
-                </a:solidFill>
-                <a:latin typeface="Apple SD Gothic Neo"/>
-              </a:rPr>
-              <a:t>청구·납부한다</a:t>
-            </a:r>
-          </a:p>
-        </p:txBody>
-      </p:sp>
-      <p:sp>
-        <p:nvSpPr>
-          <p:cNvPr id="7" name="Oval 6"/>
+              <a:t>가입·청구·납부</a:t>
+            </a:r>
+          </a:p>
+        </p:txBody>
+      </p:sp>
+      <p:sp>
+        <p:nvSpPr>
+          <p:cNvPr id="6" name="Oval 5"/>
           <p:cNvSpPr/>
           <p:nvPr/>
         </p:nvSpPr>
         <p:spPr>
           <a:xfrm>
-            <a:off x="5138928" y="1600200"/>
-            <a:ext cx="2103120" cy="2103120"/>
+            <a:off x="4956048" y="1737360"/>
+            <a:ext cx="2286000" cy="2286000"/>
           </a:xfrm>
           <a:prstGeom prst="ellipse">
             <a:avLst/>
@@ -7620,12 +7652,12 @@
           </a:fontRef>
         </p:style>
         <p:txBody>
-          <a:bodyPr rtlCol="0" anchor="ctr" tIns="63500" bIns="63500" lIns="127000" rIns="127000" wrap="square"/>
+          <a:bodyPr rtlCol="0" anchor="ctr" tIns="63500" bIns="63500" lIns="127000" rIns="127000" wrap="none"/>
           <a:lstStyle/>
           <a:p>
             <a:pPr algn="ctr"/>
             <a:r>
-              <a:rPr sz="2400" b="1">
+              <a:rPr sz="2800" b="1">
                 <a:solidFill>
                   <a:srgbClr val="FFFFFF"/>
                 </a:solidFill>
@@ -7638,14 +7670,14 @@
       </p:sp>
       <p:sp>
         <p:nvSpPr>
-          <p:cNvPr id="8" name="TextBox 7"/>
+          <p:cNvPr id="7" name="TextBox 6"/>
           <p:cNvSpPr txBox="1"/>
           <p:nvPr/>
         </p:nvSpPr>
         <p:spPr>
           <a:xfrm>
-            <a:off x="4590288" y="3840480"/>
-            <a:ext cx="3200400" cy="640080"/>
+            <a:off x="4041648" y="4343400"/>
+            <a:ext cx="4114800" cy="731520"/>
           </a:xfrm>
           <a:prstGeom prst="rect">
             <a:avLst/>
@@ -7653,81 +7685,34 @@
           <a:noFill/>
         </p:spPr>
         <p:txBody>
-          <a:bodyPr wrap="square" anchor="t">
+          <a:bodyPr wrap="square" anchor="ctr">
             <a:spAutoFit/>
           </a:bodyPr>
           <a:lstStyle/>
           <a:p>
             <a:pPr algn="ctr"/>
             <a:r>
-              <a:rPr sz="2800" b="1">
+              <a:rPr sz="2300" b="1">
                 <a:solidFill>
                   <a:srgbClr val="0B3D5C"/>
                 </a:solidFill>
                 <a:latin typeface="Apple SD Gothic Neo"/>
               </a:rPr>
-              <a:t>보험사 직원</a:t>
-            </a:r>
-          </a:p>
-        </p:txBody>
-      </p:sp>
-      <p:sp>
-        <p:nvSpPr>
-          <p:cNvPr id="9" name="TextBox 8"/>
-          <p:cNvSpPr txBox="1"/>
-          <p:nvPr/>
-        </p:nvSpPr>
-        <p:spPr>
-          <a:xfrm>
-            <a:off x="4590288" y="4526280"/>
-            <a:ext cx="3200400" cy="1097280"/>
-          </a:xfrm>
-          <a:prstGeom prst="rect">
-            <a:avLst/>
-          </a:prstGeom>
-          <a:noFill/>
-        </p:spPr>
-        <p:txBody>
-          <a:bodyPr wrap="square" anchor="t">
-            <a:spAutoFit/>
-          </a:bodyPr>
-          <a:lstStyle/>
-          <a:p>
-            <a:pPr algn="ctr"/>
-            <a:r>
-              <a:rPr sz="2200" b="0">
-                <a:solidFill>
-                  <a:srgbClr val="5B7185"/>
-                </a:solidFill>
-                <a:latin typeface="Apple SD Gothic Neo"/>
-              </a:rPr>
-              <a:t>가입과 지급을</a:t>
-            </a:r>
-          </a:p>
-          <a:p>
-            <a:pPr algn="ctr"/>
-            <a:r>
-              <a:rPr sz="2200" b="0">
-                <a:solidFill>
-                  <a:srgbClr val="5B7185"/>
-                </a:solidFill>
-                <a:latin typeface="Apple SD Gothic Neo"/>
-              </a:rPr>
-              <a:t>심사한다</a:t>
-            </a:r>
-          </a:p>
-        </p:txBody>
-      </p:sp>
-      <p:sp>
-        <p:nvSpPr>
-          <p:cNvPr id="10" name="Oval 9"/>
+              <a:t>가입·지급 심사</a:t>
+            </a:r>
+          </a:p>
+        </p:txBody>
+      </p:sp>
+      <p:sp>
+        <p:nvSpPr>
+          <p:cNvPr id="8" name="Oval 7"/>
           <p:cNvSpPr/>
           <p:nvPr/>
         </p:nvSpPr>
         <p:spPr>
           <a:xfrm>
-            <a:off x="8677656" y="1600200"/>
-            <a:ext cx="2103120" cy="2103120"/>
+            <a:off x="8494776" y="1737360"/>
+            <a:ext cx="2286000" cy="2286000"/>
           </a:xfrm>
           <a:prstGeom prst="ellipse">
             <a:avLst/>
@@ -7755,12 +7740,12 @@
           </a:fontRef>
         </p:style>
         <p:txBody>
-          <a:bodyPr rtlCol="0" anchor="ctr" tIns="63500" bIns="63500" lIns="127000" rIns="127000" wrap="square"/>
+          <a:bodyPr rtlCol="0" anchor="ctr" tIns="63500" bIns="63500" lIns="127000" rIns="127000" wrap="none"/>
           <a:lstStyle/>
           <a:p>
             <a:pPr algn="ctr"/>
             <a:r>
-              <a:rPr sz="2400" b="1">
+              <a:rPr sz="2800" b="1">
                 <a:solidFill>
                   <a:srgbClr val="0B3D5C"/>
                 </a:solidFill>
@@ -7773,14 +7758,14 @@
       </p:sp>
       <p:sp>
         <p:nvSpPr>
-          <p:cNvPr id="11" name="TextBox 10"/>
+          <p:cNvPr id="9" name="TextBox 8"/>
           <p:cNvSpPr txBox="1"/>
           <p:nvPr/>
         </p:nvSpPr>
         <p:spPr>
           <a:xfrm>
-            <a:off x="8129016" y="3840480"/>
-            <a:ext cx="3200400" cy="640080"/>
+            <a:off x="7580375" y="4343400"/>
+            <a:ext cx="4114800" cy="731520"/>
           </a:xfrm>
           <a:prstGeom prst="rect">
             <a:avLst/>
@@ -7788,67 +7773,20 @@
           <a:noFill/>
         </p:spPr>
         <p:txBody>
-          <a:bodyPr wrap="square" anchor="t">
+          <a:bodyPr wrap="square" anchor="ctr">
             <a:spAutoFit/>
           </a:bodyPr>
           <a:lstStyle/>
           <a:p>
             <a:pPr algn="ctr"/>
             <a:r>
-              <a:rPr sz="2800" b="1">
+              <a:rPr sz="2300" b="1">
                 <a:solidFill>
                   <a:srgbClr val="0B3D5C"/>
                 </a:solidFill>
                 <a:latin typeface="Apple SD Gothic Neo"/>
               </a:rPr>
-              <a:t>시스템</a:t>
-            </a:r>
-          </a:p>
-        </p:txBody>
-      </p:sp>
-      <p:sp>
-        <p:nvSpPr>
-          <p:cNvPr id="12" name="TextBox 11"/>
-          <p:cNvSpPr txBox="1"/>
-          <p:nvPr/>
-        </p:nvSpPr>
-        <p:spPr>
-          <a:xfrm>
-            <a:off x="8129016" y="4526280"/>
-            <a:ext cx="3200400" cy="1097280"/>
-          </a:xfrm>
-          <a:prstGeom prst="rect">
-            <a:avLst/>
-          </a:prstGeom>
-          <a:noFill/>
-        </p:spPr>
-        <p:txBody>
-          <a:bodyPr wrap="square" anchor="t">
-            <a:spAutoFit/>
-          </a:bodyPr>
-          <a:lstStyle/>
-          <a:p>
-            <a:pPr algn="ctr"/>
-            <a:r>
-              <a:rPr sz="2200" b="0">
-                <a:solidFill>
-                  <a:srgbClr val="5B7185"/>
-                </a:solidFill>
-                <a:latin typeface="Apple SD Gothic Neo"/>
-              </a:rPr>
-              <a:t>계약·고지서·지급을</a:t>
-            </a:r>
-          </a:p>
-          <a:p>
-            <a:pPr algn="ctr"/>
-            <a:r>
-              <a:rPr sz="2200" b="0">
-                <a:solidFill>
-                  <a:srgbClr val="5B7185"/>
-                </a:solidFill>
-                <a:latin typeface="Apple SD Gothic Neo"/>
-              </a:rPr>
-              <a:t>자동 처리한다</a:t>
+              <a:t>계약·고지서·지급 자동화</a:t>
             </a:r>
           </a:p>
         </p:txBody>
@@ -8640,7 +8578,7 @@
           </a:solidFill>
           <a:ln w="25400">
             <a:solidFill>
-              <a:srgbClr val="D8392B"/>
+              <a:srgbClr val="1E64C8"/>
             </a:solidFill>
           </a:ln>
           <a:effectLst/>
@@ -8660,7 +8598,7 @@
           </a:fontRef>
         </p:style>
         <p:txBody>
-          <a:bodyPr rtlCol="0" anchor="ctr" tIns="63500" bIns="63500" lIns="127000" rIns="127000" wrap="square"/>
+          <a:bodyPr rtlCol="0" anchor="ctr" tIns="63500" bIns="63500" lIns="127000" rIns="127000" wrap="none"/>
           <a:lstStyle/>
           <a:p>
             <a:pPr algn="l"/>
@@ -8676,7 +8614,7 @@
             <a:r>
               <a:rPr sz="2200" b="1">
                 <a:solidFill>
-                  <a:srgbClr val="D8392B"/>
+                  <a:srgbClr val="1E64C8"/>
                 </a:solidFill>
                 <a:latin typeface="Apple SD Gothic Neo"/>
               </a:rPr>
@@ -8709,11 +8647,11 @@
             <a:avLst/>
           </a:prstGeom>
           <a:solidFill>
-            <a:srgbClr val="FDECC4"/>
+            <a:srgbClr val="F8DEDB"/>
           </a:solidFill>
           <a:ln w="25400">
             <a:solidFill>
-              <a:srgbClr val="F2A900"/>
+              <a:srgbClr val="D8392B"/>
             </a:solidFill>
           </a:ln>
           <a:effectLst/>
@@ -8733,7 +8671,7 @@
           </a:fontRef>
         </p:style>
         <p:txBody>
-          <a:bodyPr rtlCol="0" anchor="ctr" tIns="63500" bIns="63500" lIns="127000" rIns="127000" wrap="square"/>
+          <a:bodyPr rtlCol="0" anchor="ctr" tIns="63500" bIns="63500" lIns="127000" rIns="127000" wrap="none"/>
           <a:lstStyle/>
           <a:p>
             <a:pPr algn="l"/>
@@ -8749,7 +8687,7 @@
             <a:r>
               <a:rPr sz="2200" b="1">
                 <a:solidFill>
-                  <a:srgbClr val="B57900"/>
+                  <a:srgbClr val="D8392B"/>
                 </a:solidFill>
                 <a:latin typeface="Apple SD Gothic Neo"/>
               </a:rPr>
@@ -8938,7 +8876,7 @@
           </a:fontRef>
         </p:style>
         <p:txBody>
-          <a:bodyPr rtlCol="0" anchor="ctr" tIns="63500" bIns="63500" lIns="127000" rIns="127000" wrap="square"/>
+          <a:bodyPr rtlCol="0" anchor="ctr" tIns="63500" bIns="63500" lIns="127000" rIns="127000" wrap="none"/>
           <a:lstStyle/>
           <a:p>
             <a:pPr algn="ctr"/>
@@ -9028,7 +8966,7 @@
           </a:fontRef>
         </p:style>
         <p:txBody>
-          <a:bodyPr rtlCol="0" anchor="ctr" tIns="63500" bIns="63500" lIns="127000" rIns="127000" wrap="square"/>
+          <a:bodyPr rtlCol="0" anchor="ctr" tIns="63500" bIns="63500" lIns="127000" rIns="127000" wrap="none"/>
           <a:lstStyle/>
           <a:p>
             <a:pPr algn="ctr"/>
@@ -9118,7 +9056,7 @@
           </a:fontRef>
         </p:style>
         <p:txBody>
-          <a:bodyPr rtlCol="0" anchor="ctr" tIns="63500" bIns="63500" lIns="127000" rIns="127000" wrap="square"/>
+          <a:bodyPr rtlCol="0" anchor="ctr" tIns="63500" bIns="63500" lIns="127000" rIns="127000" wrap="none"/>
           <a:lstStyle/>
           <a:p>
             <a:pPr algn="ctr"/>
@@ -9208,7 +9146,7 @@
           </a:fontRef>
         </p:style>
         <p:txBody>
-          <a:bodyPr rtlCol="0" anchor="ctr" tIns="63500" bIns="63500" lIns="127000" rIns="127000" wrap="square"/>
+          <a:bodyPr rtlCol="0" anchor="ctr" tIns="63500" bIns="63500" lIns="127000" rIns="127000" wrap="none"/>
           <a:lstStyle/>
           <a:p>
             <a:pPr algn="ctr"/>
@@ -9329,8 +9267,8 @@
         </p:nvSpPr>
         <p:spPr>
           <a:xfrm>
-            <a:off x="1135227" y="2148840"/>
-            <a:ext cx="1280160" cy="1280160"/>
+            <a:off x="1089507" y="2103120"/>
+            <a:ext cx="1371600" cy="1371600"/>
           </a:xfrm>
           <a:prstGeom prst="ellipse">
             <a:avLst/>
@@ -9358,7 +9296,7 @@
           </a:fontRef>
         </p:style>
         <p:txBody>
-          <a:bodyPr rtlCol="0" anchor="ctr" tIns="63500" bIns="63500" lIns="127000" rIns="127000" wrap="square"/>
+          <a:bodyPr rtlCol="0" anchor="ctr" tIns="63500" bIns="63500" lIns="127000" rIns="127000" wrap="none"/>
           <a:lstStyle/>
           <a:p>
             <a:pPr algn="ctr"/>
@@ -9382,7 +9320,7 @@
         </p:nvSpPr>
         <p:spPr>
           <a:xfrm>
-            <a:off x="655167" y="3703320"/>
+            <a:off x="655167" y="3749039"/>
             <a:ext cx="2240280" cy="1097280"/>
           </a:xfrm>
           <a:prstGeom prst="roundRect">
@@ -9413,7 +9351,7 @@
           </a:fontRef>
         </p:style>
         <p:txBody>
-          <a:bodyPr rtlCol="0" anchor="ctr" tIns="63500" bIns="63500" lIns="127000" rIns="127000" wrap="square"/>
+          <a:bodyPr rtlCol="0" anchor="ctr" tIns="63500" bIns="63500" lIns="127000" rIns="127000" wrap="none"/>
           <a:lstStyle/>
           <a:p>
             <a:pPr algn="ctr"/>
@@ -9437,7 +9375,7 @@
         </p:nvSpPr>
         <p:spPr>
           <a:xfrm>
-            <a:off x="2968599" y="3931920"/>
+            <a:off x="2968599" y="3977639"/>
             <a:ext cx="640080" cy="640080"/>
           </a:xfrm>
           <a:prstGeom prst="rect">
@@ -9472,8 +9410,8 @@
         </p:nvSpPr>
         <p:spPr>
           <a:xfrm>
-            <a:off x="4015587" y="2148840"/>
-            <a:ext cx="1280160" cy="1280160"/>
+            <a:off x="3969867" y="2103120"/>
+            <a:ext cx="1371600" cy="1371600"/>
           </a:xfrm>
           <a:prstGeom prst="ellipse">
             <a:avLst/>
@@ -9501,7 +9439,7 @@
           </a:fontRef>
         </p:style>
         <p:txBody>
-          <a:bodyPr rtlCol="0" anchor="ctr" tIns="63500" bIns="63500" lIns="127000" rIns="127000" wrap="square"/>
+          <a:bodyPr rtlCol="0" anchor="ctr" tIns="63500" bIns="63500" lIns="127000" rIns="127000" wrap="none"/>
           <a:lstStyle/>
           <a:p>
             <a:pPr algn="ctr"/>
@@ -9525,7 +9463,7 @@
         </p:nvSpPr>
         <p:spPr>
           <a:xfrm>
-            <a:off x="3535527" y="3703320"/>
+            <a:off x="3535527" y="3749039"/>
             <a:ext cx="2240280" cy="1097280"/>
           </a:xfrm>
           <a:prstGeom prst="roundRect">
@@ -9556,7 +9494,7 @@
           </a:fontRef>
         </p:style>
         <p:txBody>
-          <a:bodyPr rtlCol="0" anchor="ctr" tIns="63500" bIns="63500" lIns="127000" rIns="127000" wrap="square"/>
+          <a:bodyPr rtlCol="0" anchor="ctr" tIns="63500" bIns="63500" lIns="127000" rIns="127000" wrap="none"/>
           <a:lstStyle/>
           <a:p>
             <a:pPr algn="ctr"/>
@@ -9580,7 +9518,7 @@
         </p:nvSpPr>
         <p:spPr>
           <a:xfrm>
-            <a:off x="5848959" y="3931920"/>
+            <a:off x="5848959" y="3977639"/>
             <a:ext cx="640080" cy="640080"/>
           </a:xfrm>
           <a:prstGeom prst="rect">
@@ -9615,8 +9553,8 @@
         </p:nvSpPr>
         <p:spPr>
           <a:xfrm>
-            <a:off x="6895947" y="2148840"/>
-            <a:ext cx="1280160" cy="1280160"/>
+            <a:off x="6850227" y="2103120"/>
+            <a:ext cx="1371600" cy="1371600"/>
           </a:xfrm>
           <a:prstGeom prst="ellipse">
             <a:avLst/>
@@ -9644,7 +9582,7 @@
           </a:fontRef>
         </p:style>
         <p:txBody>
-          <a:bodyPr rtlCol="0" anchor="ctr" tIns="63500" bIns="63500" lIns="127000" rIns="127000" wrap="square"/>
+          <a:bodyPr rtlCol="0" anchor="ctr" tIns="63500" bIns="63500" lIns="127000" rIns="127000" wrap="none"/>
           <a:lstStyle/>
           <a:p>
             <a:pPr algn="ctr"/>
@@ -9668,7 +9606,7 @@
         </p:nvSpPr>
         <p:spPr>
           <a:xfrm>
-            <a:off x="6415887" y="3703320"/>
+            <a:off x="6415887" y="3749039"/>
             <a:ext cx="2240280" cy="1097280"/>
           </a:xfrm>
           <a:prstGeom prst="roundRect">
@@ -9699,7 +9637,7 @@
           </a:fontRef>
         </p:style>
         <p:txBody>
-          <a:bodyPr rtlCol="0" anchor="ctr" tIns="63500" bIns="63500" lIns="127000" rIns="127000" wrap="square"/>
+          <a:bodyPr rtlCol="0" anchor="ctr" tIns="63500" bIns="63500" lIns="127000" rIns="127000" wrap="none"/>
           <a:lstStyle/>
           <a:p>
             <a:pPr algn="ctr"/>
@@ -9723,7 +9661,7 @@
         </p:nvSpPr>
         <p:spPr>
           <a:xfrm>
-            <a:off x="8729319" y="3931920"/>
+            <a:off x="8729319" y="3977639"/>
             <a:ext cx="640080" cy="640080"/>
           </a:xfrm>
           <a:prstGeom prst="rect">
@@ -9758,8 +9696,8 @@
         </p:nvSpPr>
         <p:spPr>
           <a:xfrm>
-            <a:off x="9776307" y="2148840"/>
-            <a:ext cx="1280160" cy="1280160"/>
+            <a:off x="9730587" y="2103120"/>
+            <a:ext cx="1371600" cy="1371600"/>
           </a:xfrm>
           <a:prstGeom prst="ellipse">
             <a:avLst/>
@@ -9787,7 +9725,7 @@
           </a:fontRef>
         </p:style>
         <p:txBody>
-          <a:bodyPr rtlCol="0" anchor="ctr" tIns="63500" bIns="63500" lIns="127000" rIns="127000" wrap="square"/>
+          <a:bodyPr rtlCol="0" anchor="ctr" tIns="63500" bIns="63500" lIns="127000" rIns="127000" wrap="none"/>
           <a:lstStyle/>
           <a:p>
             <a:pPr algn="ctr"/>
@@ -9811,7 +9749,7 @@
         </p:nvSpPr>
         <p:spPr>
           <a:xfrm>
-            <a:off x="9296247" y="3703320"/>
+            <a:off x="9296247" y="3749039"/>
             <a:ext cx="2240280" cy="1097280"/>
           </a:xfrm>
           <a:prstGeom prst="roundRect">
@@ -9842,7 +9780,7 @@
           </a:fontRef>
         </p:style>
         <p:txBody>
-          <a:bodyPr rtlCol="0" anchor="ctr" tIns="63500" bIns="63500" lIns="127000" rIns="127000" wrap="square"/>
+          <a:bodyPr rtlCol="0" anchor="ctr" tIns="63500" bIns="63500" lIns="127000" rIns="127000" wrap="none"/>
           <a:lstStyle/>
           <a:p>
             <a:pPr algn="ctr"/>
@@ -9853,7 +9791,7 @@
                 </a:solidFill>
                 <a:latin typeface="Apple SD Gothic Neo"/>
               </a:rPr>
-              <a:t>계약 자동 생성</a:t>
+              <a:t>계약 생성</a:t>
             </a:r>
           </a:p>
         </p:txBody>
@@ -9866,7 +9804,7 @@
         </p:nvSpPr>
         <p:spPr>
           <a:xfrm>
-            <a:off x="548640" y="5212080"/>
+            <a:off x="548640" y="5257800"/>
             <a:ext cx="11091672" cy="914400"/>
           </a:xfrm>
           <a:prstGeom prst="rect">
@@ -9998,8 +9936,8 @@
         </p:nvSpPr>
         <p:spPr>
           <a:xfrm>
-            <a:off x="2575407" y="2148840"/>
-            <a:ext cx="1280160" cy="1280160"/>
+            <a:off x="2529687" y="2103120"/>
+            <a:ext cx="1371600" cy="1371600"/>
           </a:xfrm>
           <a:prstGeom prst="ellipse">
             <a:avLst/>
@@ -10027,7 +9965,7 @@
           </a:fontRef>
         </p:style>
         <p:txBody>
-          <a:bodyPr rtlCol="0" anchor="ctr" tIns="63500" bIns="63500" lIns="127000" rIns="127000" wrap="square"/>
+          <a:bodyPr rtlCol="0" anchor="ctr" tIns="63500" bIns="63500" lIns="127000" rIns="127000" wrap="none"/>
           <a:lstStyle/>
           <a:p>
             <a:pPr algn="ctr"/>
@@ -10051,7 +9989,7 @@
         </p:nvSpPr>
         <p:spPr>
           <a:xfrm>
-            <a:off x="2095347" y="3703320"/>
+            <a:off x="2095347" y="3749039"/>
             <a:ext cx="2240280" cy="1097280"/>
           </a:xfrm>
           <a:prstGeom prst="roundRect">
@@ -10082,7 +10020,7 @@
           </a:fontRef>
         </p:style>
         <p:txBody>
-          <a:bodyPr rtlCol="0" anchor="ctr" tIns="63500" bIns="63500" lIns="127000" rIns="127000" wrap="square"/>
+          <a:bodyPr rtlCol="0" anchor="ctr" tIns="63500" bIns="63500" lIns="127000" rIns="127000" wrap="none"/>
           <a:lstStyle/>
           <a:p>
             <a:pPr algn="ctr"/>
@@ -10093,7 +10031,7 @@
                 </a:solidFill>
                 <a:latin typeface="Apple SD Gothic Neo"/>
               </a:rPr>
-              <a:t>매달 보험료 납부</a:t>
+              <a:t>보험료 납부</a:t>
             </a:r>
           </a:p>
         </p:txBody>
@@ -10106,7 +10044,7 @@
         </p:nvSpPr>
         <p:spPr>
           <a:xfrm>
-            <a:off x="4408779" y="3931920"/>
+            <a:off x="4408779" y="3977639"/>
             <a:ext cx="640080" cy="640080"/>
           </a:xfrm>
           <a:prstGeom prst="rect">
@@ -10141,8 +10079,8 @@
         </p:nvSpPr>
         <p:spPr>
           <a:xfrm>
-            <a:off x="5455767" y="2148840"/>
-            <a:ext cx="1280160" cy="1280160"/>
+            <a:off x="5410047" y="2103120"/>
+            <a:ext cx="1371600" cy="1371600"/>
           </a:xfrm>
           <a:prstGeom prst="ellipse">
             <a:avLst/>
@@ -10170,7 +10108,7 @@
           </a:fontRef>
         </p:style>
         <p:txBody>
-          <a:bodyPr rtlCol="0" anchor="ctr" tIns="63500" bIns="63500" lIns="127000" rIns="127000" wrap="square"/>
+          <a:bodyPr rtlCol="0" anchor="ctr" tIns="63500" bIns="63500" lIns="127000" rIns="127000" wrap="none"/>
           <a:lstStyle/>
           <a:p>
             <a:pPr algn="ctr"/>
@@ -10194,7 +10132,7 @@
         </p:nvSpPr>
         <p:spPr>
           <a:xfrm>
-            <a:off x="4975707" y="3703320"/>
+            <a:off x="4975707" y="3749039"/>
             <a:ext cx="2240280" cy="1097280"/>
           </a:xfrm>
           <a:prstGeom prst="roundRect">
@@ -10225,7 +10163,7 @@
           </a:fontRef>
         </p:style>
         <p:txBody>
-          <a:bodyPr rtlCol="0" anchor="ctr" tIns="63500" bIns="63500" lIns="127000" rIns="127000" wrap="square"/>
+          <a:bodyPr rtlCol="0" anchor="ctr" tIns="63500" bIns="63500" lIns="127000" rIns="127000" wrap="none"/>
           <a:lstStyle/>
           <a:p>
             <a:pPr algn="ctr"/>
@@ -10249,7 +10187,7 @@
         </p:nvSpPr>
         <p:spPr>
           <a:xfrm>
-            <a:off x="7289139" y="3931920"/>
+            <a:off x="7289139" y="3977639"/>
             <a:ext cx="640080" cy="640080"/>
           </a:xfrm>
           <a:prstGeom prst="rect">
@@ -10284,8 +10222,8 @@
         </p:nvSpPr>
         <p:spPr>
           <a:xfrm>
-            <a:off x="8336127" y="2148840"/>
-            <a:ext cx="1280160" cy="1280160"/>
+            <a:off x="8290407" y="2103120"/>
+            <a:ext cx="1371600" cy="1371600"/>
           </a:xfrm>
           <a:prstGeom prst="ellipse">
             <a:avLst/>
@@ -10313,7 +10251,7 @@
           </a:fontRef>
         </p:style>
         <p:txBody>
-          <a:bodyPr rtlCol="0" anchor="ctr" tIns="63500" bIns="63500" lIns="127000" rIns="127000" wrap="square"/>
+          <a:bodyPr rtlCol="0" anchor="ctr" tIns="63500" bIns="63500" lIns="127000" rIns="127000" wrap="none"/>
           <a:lstStyle/>
           <a:p>
             <a:pPr algn="ctr"/>
@@ -10337,7 +10275,7 @@
         </p:nvSpPr>
         <p:spPr>
           <a:xfrm>
-            <a:off x="7856067" y="3703320"/>
+            <a:off x="7856067" y="3749039"/>
             <a:ext cx="2240280" cy="1097280"/>
           </a:xfrm>
           <a:prstGeom prst="roundRect">
@@ -10368,7 +10306,7 @@
           </a:fontRef>
         </p:style>
         <p:txBody>
-          <a:bodyPr rtlCol="0" anchor="ctr" tIns="63500" bIns="63500" lIns="127000" rIns="127000" wrap="square"/>
+          <a:bodyPr rtlCol="0" anchor="ctr" tIns="63500" bIns="63500" lIns="127000" rIns="127000" wrap="none"/>
           <a:lstStyle/>
           <a:p>
             <a:pPr algn="ctr"/>
@@ -10379,7 +10317,7 @@
                 </a:solidFill>
                 <a:latin typeface="Apple SD Gothic Neo"/>
               </a:rPr>
-              <a:t>고지서 자동 발송</a:t>
+              <a:t>고지서 발송</a:t>
             </a:r>
           </a:p>
         </p:txBody>
@@ -10392,7 +10330,7 @@
         </p:nvSpPr>
         <p:spPr>
           <a:xfrm>
-            <a:off x="548640" y="5212080"/>
+            <a:off x="548640" y="5257800"/>
             <a:ext cx="11091672" cy="914400"/>
           </a:xfrm>
           <a:prstGeom prst="rect">
@@ -10414,7 +10352,7 @@
                 </a:solidFill>
                 <a:latin typeface="Apple SD Gothic Neo"/>
               </a:rPr>
-              <a:t>낼 회차보다 납부가 밀리면 미납으로 잡히고, 매일 아침 고지서를 보냅니다 (30일 넘으면 해지 예고).</a:t>
+              <a:t>납부가 밀리면 미납으로 잡히고, 매일 아침 고지서가 나갑니다 (30일 초과 시 해지 예고).</a:t>
             </a:r>
           </a:p>
         </p:txBody>
@@ -10524,8 +10462,8 @@
         </p:nvSpPr>
         <p:spPr>
           <a:xfrm>
-            <a:off x="2575407" y="2148840"/>
-            <a:ext cx="1280160" cy="1280160"/>
+            <a:off x="2529687" y="2103120"/>
+            <a:ext cx="1371600" cy="1371600"/>
           </a:xfrm>
           <a:prstGeom prst="ellipse">
             <a:avLst/>
@@ -10553,7 +10491,7 @@
           </a:fontRef>
         </p:style>
         <p:txBody>
-          <a:bodyPr rtlCol="0" anchor="ctr" tIns="63500" bIns="63500" lIns="127000" rIns="127000" wrap="square"/>
+          <a:bodyPr rtlCol="0" anchor="ctr" tIns="63500" bIns="63500" lIns="127000" rIns="127000" wrap="none"/>
           <a:lstStyle/>
           <a:p>
             <a:pPr algn="ctr"/>
@@ -10577,7 +10515,7 @@
         </p:nvSpPr>
         <p:spPr>
           <a:xfrm>
-            <a:off x="2095347" y="3703320"/>
+            <a:off x="2095347" y="3749039"/>
             <a:ext cx="2240280" cy="1097280"/>
           </a:xfrm>
           <a:prstGeom prst="roundRect">
@@ -10608,7 +10546,7 @@
           </a:fontRef>
         </p:style>
         <p:txBody>
-          <a:bodyPr rtlCol="0" anchor="ctr" tIns="63500" bIns="63500" lIns="127000" rIns="127000" wrap="square"/>
+          <a:bodyPr rtlCol="0" anchor="ctr" tIns="63500" bIns="63500" lIns="127000" rIns="127000" wrap="none"/>
           <a:lstStyle/>
           <a:p>
             <a:pPr algn="ctr"/>
@@ -10619,7 +10557,7 @@
                 </a:solidFill>
                 <a:latin typeface="Apple SD Gothic Neo"/>
               </a:rPr>
-              <a:t>청구·사고 접수</a:t>
+              <a:t>청구·접수</a:t>
             </a:r>
           </a:p>
         </p:txBody>
@@ -10632,7 +10570,7 @@
         </p:nvSpPr>
         <p:spPr>
           <a:xfrm>
-            <a:off x="4408779" y="3931920"/>
+            <a:off x="4408779" y="3977639"/>
             <a:ext cx="640080" cy="640080"/>
           </a:xfrm>
           <a:prstGeom prst="rect">
@@ -10667,8 +10605,8 @@
         </p:nvSpPr>
         <p:spPr>
           <a:xfrm>
-            <a:off x="5455767" y="2148840"/>
-            <a:ext cx="1280160" cy="1280160"/>
+            <a:off x="5410047" y="2103120"/>
+            <a:ext cx="1371600" cy="1371600"/>
           </a:xfrm>
           <a:prstGeom prst="ellipse">
             <a:avLst/>
@@ -10696,7 +10634,7 @@
           </a:fontRef>
         </p:style>
         <p:txBody>
-          <a:bodyPr rtlCol="0" anchor="ctr" tIns="63500" bIns="63500" lIns="127000" rIns="127000" wrap="square"/>
+          <a:bodyPr rtlCol="0" anchor="ctr" tIns="63500" bIns="63500" lIns="127000" rIns="127000" wrap="none"/>
           <a:lstStyle/>
           <a:p>
             <a:pPr algn="ctr"/>
@@ -10720,7 +10658,7 @@
         </p:nvSpPr>
         <p:spPr>
           <a:xfrm>
-            <a:off x="4975707" y="3703320"/>
+            <a:off x="4975707" y="3749039"/>
             <a:ext cx="2240280" cy="1097280"/>
           </a:xfrm>
           <a:prstGeom prst="roundRect">
@@ -10751,7 +10689,7 @@
           </a:fontRef>
         </p:style>
         <p:txBody>
-          <a:bodyPr rtlCol="0" anchor="ctr" tIns="63500" bIns="63500" lIns="127000" rIns="127000" wrap="square"/>
+          <a:bodyPr rtlCol="0" anchor="ctr" tIns="63500" bIns="63500" lIns="127000" rIns="127000" wrap="none"/>
           <a:lstStyle/>
           <a:p>
             <a:pPr algn="ctr"/>
@@ -10775,7 +10713,7 @@
         </p:nvSpPr>
         <p:spPr>
           <a:xfrm>
-            <a:off x="7289139" y="3931920"/>
+            <a:off x="7289139" y="3977639"/>
             <a:ext cx="640080" cy="640080"/>
           </a:xfrm>
           <a:prstGeom prst="rect">
@@ -10810,8 +10748,8 @@
         </p:nvSpPr>
         <p:spPr>
           <a:xfrm>
-            <a:off x="8336127" y="2148840"/>
-            <a:ext cx="1280160" cy="1280160"/>
+            <a:off x="8290407" y="2103120"/>
+            <a:ext cx="1371600" cy="1371600"/>
           </a:xfrm>
           <a:prstGeom prst="ellipse">
             <a:avLst/>
@@ -10839,7 +10777,7 @@
           </a:fontRef>
         </p:style>
         <p:txBody>
-          <a:bodyPr rtlCol="0" anchor="ctr" tIns="63500" bIns="63500" lIns="127000" rIns="127000" wrap="square"/>
+          <a:bodyPr rtlCol="0" anchor="ctr" tIns="63500" bIns="63500" lIns="127000" rIns="127000" wrap="none"/>
           <a:lstStyle/>
           <a:p>
             <a:pPr algn="ctr"/>
@@ -10863,7 +10801,7 @@
         </p:nvSpPr>
         <p:spPr>
           <a:xfrm>
-            <a:off x="7856067" y="3703320"/>
+            <a:off x="7856067" y="3749039"/>
             <a:ext cx="2240280" cy="1097280"/>
           </a:xfrm>
           <a:prstGeom prst="roundRect">
@@ -10894,7 +10832,7 @@
           </a:fontRef>
         </p:style>
         <p:txBody>
-          <a:bodyPr rtlCol="0" anchor="ctr" tIns="63500" bIns="63500" lIns="127000" rIns="127000" wrap="square"/>
+          <a:bodyPr rtlCol="0" anchor="ctr" tIns="63500" bIns="63500" lIns="127000" rIns="127000" wrap="none"/>
           <a:lstStyle/>
           <a:p>
             <a:pPr algn="ctr"/>
@@ -10918,7 +10856,7 @@
         </p:nvSpPr>
         <p:spPr>
           <a:xfrm>
-            <a:off x="548640" y="5212080"/>
+            <a:off x="548640" y="5257800"/>
             <a:ext cx="11091672" cy="914400"/>
           </a:xfrm>
           <a:prstGeom prst="rect">
@@ -10940,7 +10878,7 @@
                 </a:solidFill>
                 <a:latin typeface="Apple SD Gothic Neo"/>
               </a:rPr>
-              <a:t>병원비는 100만 원 미만이면 즉시, 이상이거나 자동차 사고면 직원 심사를 거쳐 지급됩니다.</a:t>
+              <a:t>병원비는 100만 원 미만이면 즉시, 이상이거나 자동차 사고는 직원 심사 후 지급.</a:t>
             </a:r>
           </a:p>
         </p:txBody>

--- a/docs/presentation/보험발표-편집가능.pptx
+++ b/docs/presentation/보험발표-편집가능.pptx
@@ -9122,7 +9122,7 @@
             <a:avLst/>
           </a:prstGeom>
           <a:solidFill>
-            <a:srgbClr val="F4B400"/>
+            <a:srgbClr val="FBEFC4"/>
           </a:solidFill>
           <a:ln w="22860">
             <a:solidFill>
@@ -9756,7 +9756,7 @@
             <a:avLst/>
           </a:prstGeom>
           <a:solidFill>
-            <a:srgbClr val="F4B400"/>
+            <a:srgbClr val="FBEFC4"/>
           </a:solidFill>
           <a:ln w="25400">
             <a:solidFill>
@@ -10139,7 +10139,7 @@
             <a:avLst/>
           </a:prstGeom>
           <a:solidFill>
-            <a:srgbClr val="F4B400"/>
+            <a:srgbClr val="FBEFC4"/>
           </a:solidFill>
           <a:ln w="25400">
             <a:solidFill>
@@ -10282,7 +10282,7 @@
             <a:avLst/>
           </a:prstGeom>
           <a:solidFill>
-            <a:srgbClr val="F4B400"/>
+            <a:srgbClr val="FBEFC4"/>
           </a:solidFill>
           <a:ln w="25400">
             <a:solidFill>
@@ -10808,7 +10808,7 @@
             <a:avLst/>
           </a:prstGeom>
           <a:solidFill>
-            <a:srgbClr val="F4B400"/>
+            <a:srgbClr val="FBEFC4"/>
           </a:solidFill>
           <a:ln w="25400">
             <a:solidFill>
